--- a/Kazbiofert_Budget_Brief.pptx
+++ b/Kazbiofert_Budget_Brief.pptx
@@ -14,9 +14,11 @@
     <p:sldId id="262" r:id="rId8"/>
     <p:sldId id="263" r:id="rId9"/>
     <p:sldId id="264" r:id="rId10"/>
+    <p:sldId id="265" r:id="rId11"/>
+    <p:sldId id="266" r:id="rId12"/>
   </p:sldIdLst>
   <p:notesMasterIdLst>
-    <p:notesMasterId r:id="rId11"/>
+    <p:notesMasterId r:id="rId13"/>
   </p:notesMasterIdLst>
   <p:sldSz cx="12192000" cy="6858000"/>
   <p:notesSz cx="6858000" cy="12192000"/>
@@ -807,6 +809,182 @@
 </p:notes>
 </file>
 
+<file path=ppt/notesSlides/notesSlide10.xml><?xml version="1.0" encoding="utf-8"?>
+<p:notes xmlns:a="http://schemas.openxmlformats.org/drawingml/2006/main" xmlns:r="http://schemas.openxmlformats.org/officeDocument/2006/relationships" xmlns:p="http://schemas.openxmlformats.org/presentationml/2006/main">
+  <p:cSld>
+    <p:spTree>
+      <p:nvGrpSpPr>
+        <p:cNvPr id="1" name=""/>
+        <p:cNvGrpSpPr/>
+        <p:nvPr/>
+      </p:nvGrpSpPr>
+      <p:grpSpPr>
+        <a:xfrm>
+          <a:off x="0" y="0"/>
+          <a:ext cx="0" cy="0"/>
+          <a:chOff x="0" y="0"/>
+          <a:chExt cx="0" cy="0"/>
+        </a:xfrm>
+      </p:grpSpPr>
+      <p:sp>
+        <p:nvSpPr>
+          <p:cNvPr id="2" name="Slide Image Placeholder 1"/>
+          <p:cNvSpPr>
+            <a:spLocks noGrp="1" noRot="1" noChangeAspect="1"/>
+          </p:cNvSpPr>
+          <p:nvPr>
+            <p:ph type="sldImg"/>
+          </p:nvPr>
+        </p:nvSpPr>
+        <p:spPr/>
+      </p:sp>
+      <p:sp>
+        <p:nvSpPr>
+          <p:cNvPr id="3" name="Notes Placeholder 2"/>
+          <p:cNvSpPr>
+            <a:spLocks noGrp="1"/>
+          </p:cNvSpPr>
+          <p:nvPr>
+            <p:ph type="body" idx="1"/>
+          </p:nvPr>
+        </p:nvSpPr>
+        <p:spPr/>
+        <p:txBody>
+          <a:bodyPr/>
+          <a:lstStyle/>
+          <a:p>
+            <a:r>
+              <a:rPr lang="en-US" dirty="0"/>
+              <a:t>Оборудование +16%, КИП кратно (объём). Сравнимый пакет +22%. Рекомендация: собрать CAPEX-2026.</a:t>
+            </a:r>
+            <a:endParaRPr lang="en-US" dirty="0"/>
+          </a:p>
+        </p:txBody>
+      </p:sp>
+      <p:sp>
+        <p:nvSpPr>
+          <p:cNvPr id="4" name="Slide Number Placeholder 3"/>
+          <p:cNvSpPr>
+            <a:spLocks noGrp="1"/>
+          </p:cNvSpPr>
+          <p:nvPr>
+            <p:ph type="sldNum" sz="quarter" idx="10"/>
+          </p:nvPr>
+        </p:nvSpPr>
+        <p:spPr/>
+        <p:txBody>
+          <a:bodyPr/>
+          <a:lstStyle/>
+          <a:p>
+            <a:fld id="{F7021451-1387-4CA6-816F-3879F97B5CBC}" type="slidenum">
+              <a:rPr lang="en-US"/>
+              <a:t>10</a:t>
+            </a:fld>
+            <a:endParaRPr lang="en-US"/>
+          </a:p>
+        </p:txBody>
+      </p:sp>
+    </p:spTree>
+    <p:extLst>
+      <p:ext uri="{BB962C8B-B14F-4D97-AF65-F5344CB8AC3E}">
+        <p14:creationId xmlns:p14="http://schemas.microsoft.com/office/powerpoint/2010/main" val="1024086991"/>
+      </p:ext>
+    </p:extLst>
+  </p:cSld>
+  <p:clrMapOvr>
+    <a:masterClrMapping/>
+  </p:clrMapOvr>
+</p:notes>
+</file>
+
+<file path=ppt/notesSlides/notesSlide11.xml><?xml version="1.0" encoding="utf-8"?>
+<p:notes xmlns:a="http://schemas.openxmlformats.org/drawingml/2006/main" xmlns:r="http://schemas.openxmlformats.org/officeDocument/2006/relationships" xmlns:p="http://schemas.openxmlformats.org/presentationml/2006/main">
+  <p:cSld>
+    <p:spTree>
+      <p:nvGrpSpPr>
+        <p:cNvPr id="1" name=""/>
+        <p:cNvGrpSpPr/>
+        <p:nvPr/>
+      </p:nvGrpSpPr>
+      <p:grpSpPr>
+        <a:xfrm>
+          <a:off x="0" y="0"/>
+          <a:ext cx="0" cy="0"/>
+          <a:chOff x="0" y="0"/>
+          <a:chExt cx="0" cy="0"/>
+        </a:xfrm>
+      </p:grpSpPr>
+      <p:sp>
+        <p:nvSpPr>
+          <p:cNvPr id="2" name="Slide Image Placeholder 1"/>
+          <p:cNvSpPr>
+            <a:spLocks noGrp="1" noRot="1" noChangeAspect="1"/>
+          </p:cNvSpPr>
+          <p:nvPr>
+            <p:ph type="sldImg"/>
+          </p:nvPr>
+        </p:nvSpPr>
+        <p:spPr/>
+      </p:sp>
+      <p:sp>
+        <p:nvSpPr>
+          <p:cNvPr id="3" name="Notes Placeholder 2"/>
+          <p:cNvSpPr>
+            <a:spLocks noGrp="1"/>
+          </p:cNvSpPr>
+          <p:nvPr>
+            <p:ph type="body" idx="1"/>
+          </p:nvPr>
+        </p:nvSpPr>
+        <p:spPr/>
+        <p:txBody>
+          <a:bodyPr/>
+          <a:lstStyle/>
+          <a:p>
+            <a:r>
+              <a:rPr lang="en-US" dirty="0"/>
+              <a:t>Пять шагов до готовности заявки. Приоритет №1 — расценить электрику и собрать полный CAPEX.</a:t>
+            </a:r>
+            <a:endParaRPr lang="en-US" dirty="0"/>
+          </a:p>
+        </p:txBody>
+      </p:sp>
+      <p:sp>
+        <p:nvSpPr>
+          <p:cNvPr id="4" name="Slide Number Placeholder 3"/>
+          <p:cNvSpPr>
+            <a:spLocks noGrp="1"/>
+          </p:cNvSpPr>
+          <p:nvPr>
+            <p:ph type="sldNum" sz="quarter" idx="10"/>
+          </p:nvPr>
+        </p:nvSpPr>
+        <p:spPr/>
+        <p:txBody>
+          <a:bodyPr/>
+          <a:lstStyle/>
+          <a:p>
+            <a:fld id="{F7021451-1387-4CA6-816F-3879F97B5CBC}" type="slidenum">
+              <a:rPr lang="en-US"/>
+              <a:t>11</a:t>
+            </a:fld>
+            <a:endParaRPr lang="en-US"/>
+          </a:p>
+        </p:txBody>
+      </p:sp>
+    </p:spTree>
+    <p:extLst>
+      <p:ext uri="{BB962C8B-B14F-4D97-AF65-F5344CB8AC3E}">
+        <p14:creationId xmlns:p14="http://schemas.microsoft.com/office/powerpoint/2010/main" val="1024086991"/>
+      </p:ext>
+    </p:extLst>
+  </p:cSld>
+  <p:clrMapOvr>
+    <a:masterClrMapping/>
+  </p:clrMapOvr>
+</p:notes>
+</file>
+
 <file path=ppt/notesSlides/notesSlide2.xml><?xml version="1.0" encoding="utf-8"?>
 <p:notes xmlns:a="http://schemas.openxmlformats.org/drawingml/2006/main" xmlns:r="http://schemas.openxmlformats.org/officeDocument/2006/relationships" xmlns:p="http://schemas.openxmlformats.org/presentationml/2006/main">
   <p:cSld>
@@ -1469,7 +1647,7 @@
           <a:p>
             <a:r>
               <a:rPr lang="en-US" dirty="0"/>
-              <a:t>Пять шагов до готовности заявки. Приоритет №1 — расценить электрику и собрать полный CAPEX.</a:t>
+              <a:t>Полный CAPEX по ТЭО 2024 = $40,7 млн без НДС. Это каркас, которого нет в прайсах 2026.</a:t>
             </a:r>
             <a:endParaRPr lang="en-US" dirty="0"/>
           </a:p>
@@ -2361,6 +2539,3108 @@
               <a:t>дата смет</a:t>
             </a:r>
             <a:endParaRPr lang="en-US" sz="1100" dirty="0"/>
+          </a:p>
+        </p:txBody>
+      </p:sp>
+    </p:spTree>
+  </p:cSld>
+  <p:clrMapOvr>
+    <a:masterClrMapping/>
+  </p:clrMapOvr>
+</p:sld>
+</file>
+
+<file path=ppt/slides/slide10.xml><?xml version="1.0" encoding="utf-8"?>
+<p:sld xmlns:a="http://schemas.openxmlformats.org/drawingml/2006/main" xmlns:r="http://schemas.openxmlformats.org/officeDocument/2006/relationships" xmlns:p="http://schemas.openxmlformats.org/presentationml/2006/main">
+  <p:cSld name="Slide 10">
+    <p:bg>
+      <p:bgPr>
+        <a:solidFill>
+          <a:srgbClr val="FFFFFF"/>
+        </a:solidFill>
+      </p:bgPr>
+    </p:bg>
+    <p:spTree>
+      <p:nvGrpSpPr>
+        <p:cNvPr id="1" name=""/>
+        <p:cNvGrpSpPr/>
+        <p:nvPr/>
+      </p:nvGrpSpPr>
+      <p:grpSpPr>
+        <a:xfrm>
+          <a:off x="0" y="0"/>
+          <a:ext cx="0" cy="0"/>
+          <a:chOff x="0" y="0"/>
+          <a:chExt cx="0" cy="0"/>
+        </a:xfrm>
+      </p:grpSpPr>
+      <p:sp>
+        <p:nvSpPr>
+          <p:cNvPr id="2" name="Text 0"/>
+          <p:cNvSpPr/>
+          <p:nvPr/>
+        </p:nvSpPr>
+        <p:spPr>
+          <a:xfrm>
+            <a:off x="640080" y="502920"/>
+            <a:ext cx="5486400" cy="274320"/>
+          </a:xfrm>
+          <a:prstGeom prst="rect">
+            <a:avLst/>
+          </a:prstGeom>
+          <a:noFill/>
+          <a:ln/>
+        </p:spPr>
+        <p:txBody>
+          <a:bodyPr wrap="square" lIns="0" tIns="0" rIns="0" bIns="0" rtlCol="0" anchor="ctr"/>
+          <a:lstStyle/>
+          <a:p>
+            <a:pPr algn="l" indent="0" marL="0">
+              <a:buNone/>
+            </a:pPr>
+            <a:r>
+              <a:rPr lang="en-US" sz="1100" b="1" spc="200" kern="0" dirty="0">
+                <a:solidFill>
+                  <a:srgbClr val="E8A317"/>
+                </a:solidFill>
+                <a:latin typeface="Calibri" pitchFamily="34" charset="0"/>
+                <a:ea typeface="Calibri" pitchFamily="34" charset="-122"/>
+                <a:cs typeface="Calibri" pitchFamily="34" charset="-120"/>
+              </a:rPr>
+              <a:t>СРАВНЕНИЕ</a:t>
+            </a:r>
+            <a:endParaRPr lang="en-US" sz="1100" dirty="0"/>
+          </a:p>
+        </p:txBody>
+      </p:sp>
+      <p:sp>
+        <p:nvSpPr>
+          <p:cNvPr id="3" name="Text 1"/>
+          <p:cNvSpPr/>
+          <p:nvPr/>
+        </p:nvSpPr>
+        <p:spPr>
+          <a:xfrm>
+            <a:off x="594360" y="822960"/>
+            <a:ext cx="10972800" cy="640080"/>
+          </a:xfrm>
+          <a:prstGeom prst="rect">
+            <a:avLst/>
+          </a:prstGeom>
+          <a:noFill/>
+          <a:ln/>
+        </p:spPr>
+        <p:txBody>
+          <a:bodyPr wrap="square" lIns="0" tIns="0" rIns="0" bIns="0" rtlCol="0" anchor="ctr"/>
+          <a:lstStyle/>
+          <a:p>
+            <a:pPr indent="0" marL="0">
+              <a:buNone/>
+            </a:pPr>
+            <a:r>
+              <a:rPr lang="en-US" sz="3000" b="1" dirty="0">
+                <a:solidFill>
+                  <a:srgbClr val="1B2A1C"/>
+                </a:solidFill>
+                <a:latin typeface="Cambria" pitchFamily="34" charset="0"/>
+                <a:ea typeface="Cambria" pitchFamily="34" charset="-122"/>
+                <a:cs typeface="Cambria" pitchFamily="34" charset="-120"/>
+              </a:rPr>
+              <a:t>ТЭО 2024  →  прайсы 2026</a:t>
+            </a:r>
+            <a:endParaRPr lang="en-US" sz="3000" dirty="0"/>
+          </a:p>
+        </p:txBody>
+      </p:sp>
+      <p:sp>
+        <p:nvSpPr>
+          <p:cNvPr id="4" name="Shape 2"/>
+          <p:cNvSpPr/>
+          <p:nvPr/>
+        </p:nvSpPr>
+        <p:spPr>
+          <a:xfrm>
+            <a:off x="594360" y="1417320"/>
+            <a:ext cx="5349240" cy="1051560"/>
+          </a:xfrm>
+          <a:prstGeom prst="roundRect">
+            <a:avLst>
+              <a:gd name="adj" fmla="val 6957"/>
+            </a:avLst>
+          </a:prstGeom>
+          <a:solidFill>
+            <a:srgbClr val="F4F6F0"/>
+          </a:solidFill>
+          <a:ln w="12700">
+            <a:solidFill>
+              <a:srgbClr val="E2E7DB"/>
+            </a:solidFill>
+            <a:prstDash val="solid"/>
+          </a:ln>
+        </p:spPr>
+      </p:sp>
+      <p:sp>
+        <p:nvSpPr>
+          <p:cNvPr id="5" name="Shape 3"/>
+          <p:cNvSpPr/>
+          <p:nvPr/>
+        </p:nvSpPr>
+        <p:spPr>
+          <a:xfrm>
+            <a:off x="850392" y="1673352"/>
+            <a:ext cx="502920" cy="502920"/>
+          </a:xfrm>
+          <a:prstGeom prst="ellipse">
+            <a:avLst/>
+          </a:prstGeom>
+          <a:solidFill>
+            <a:srgbClr val="2C5F2D"/>
+          </a:solidFill>
+          <a:ln/>
+        </p:spPr>
+      </p:sp>
+      <p:sp>
+        <p:nvSpPr>
+          <p:cNvPr id="6" name="Text 4"/>
+          <p:cNvSpPr/>
+          <p:nvPr/>
+        </p:nvSpPr>
+        <p:spPr>
+          <a:xfrm>
+            <a:off x="850392" y="1673352"/>
+            <a:ext cx="502920" cy="502920"/>
+          </a:xfrm>
+          <a:prstGeom prst="rect">
+            <a:avLst/>
+          </a:prstGeom>
+          <a:noFill/>
+          <a:ln/>
+        </p:spPr>
+        <p:txBody>
+          <a:bodyPr wrap="square" lIns="0" tIns="0" rIns="0" bIns="0" rtlCol="0" anchor="ctr"/>
+          <a:lstStyle/>
+          <a:p>
+            <a:pPr algn="ctr" indent="0" marL="0">
+              <a:buNone/>
+            </a:pPr>
+            <a:r>
+              <a:rPr lang="en-US" sz="2200" b="1" dirty="0">
+                <a:solidFill>
+                  <a:srgbClr val="FFFFFF"/>
+                </a:solidFill>
+                <a:latin typeface="Cambria" pitchFamily="34" charset="0"/>
+                <a:ea typeface="Cambria" pitchFamily="34" charset="-122"/>
+                <a:cs typeface="Cambria" pitchFamily="34" charset="-120"/>
+              </a:rPr>
+              <a:t>1</a:t>
+            </a:r>
+            <a:endParaRPr lang="en-US" sz="2200" dirty="0"/>
+          </a:p>
+        </p:txBody>
+      </p:sp>
+      <p:sp>
+        <p:nvSpPr>
+          <p:cNvPr id="7" name="Text 5"/>
+          <p:cNvSpPr/>
+          <p:nvPr/>
+        </p:nvSpPr>
+        <p:spPr>
+          <a:xfrm>
+            <a:off x="1508760" y="1536192"/>
+            <a:ext cx="4297680" cy="320040"/>
+          </a:xfrm>
+          <a:prstGeom prst="rect">
+            <a:avLst/>
+          </a:prstGeom>
+          <a:noFill/>
+          <a:ln/>
+        </p:spPr>
+        <p:txBody>
+          <a:bodyPr wrap="square" lIns="0" tIns="0" rIns="0" bIns="0" rtlCol="0" anchor="ctr"/>
+          <a:lstStyle/>
+          <a:p>
+            <a:pPr indent="0" marL="0">
+              <a:buNone/>
+            </a:pPr>
+            <a:r>
+              <a:rPr lang="en-US" sz="1400" b="1" dirty="0">
+                <a:solidFill>
+                  <a:srgbClr val="1B2A1C"/>
+                </a:solidFill>
+                <a:latin typeface="Calibri" pitchFamily="34" charset="0"/>
+                <a:ea typeface="Calibri" pitchFamily="34" charset="-122"/>
+                <a:cs typeface="Calibri" pitchFamily="34" charset="-120"/>
+              </a:rPr>
+              <a:t>ТЭО · 23.07.2024</a:t>
+            </a:r>
+            <a:endParaRPr lang="en-US" sz="1400" dirty="0"/>
+          </a:p>
+        </p:txBody>
+      </p:sp>
+      <p:sp>
+        <p:nvSpPr>
+          <p:cNvPr id="8" name="Text 6"/>
+          <p:cNvSpPr/>
+          <p:nvPr/>
+        </p:nvSpPr>
+        <p:spPr>
+          <a:xfrm>
+            <a:off x="1508760" y="1847088"/>
+            <a:ext cx="4297680" cy="274320"/>
+          </a:xfrm>
+          <a:prstGeom prst="rect">
+            <a:avLst/>
+          </a:prstGeom>
+          <a:noFill/>
+          <a:ln/>
+        </p:spPr>
+        <p:txBody>
+          <a:bodyPr wrap="square" lIns="0" tIns="0" rIns="0" bIns="0" rtlCol="0" anchor="ctr"/>
+          <a:lstStyle/>
+          <a:p>
+            <a:pPr indent="0" marL="0">
+              <a:buNone/>
+            </a:pPr>
+            <a:r>
+              <a:rPr lang="en-US" sz="1150" dirty="0">
+                <a:solidFill>
+                  <a:srgbClr val="5B6B5C"/>
+                </a:solidFill>
+                <a:latin typeface="Calibri" pitchFamily="34" charset="0"/>
+                <a:ea typeface="Calibri" pitchFamily="34" charset="-122"/>
+                <a:cs typeface="Calibri" pitchFamily="34" charset="-120"/>
+              </a:rPr>
+              <a:t>Полная смета всего проекта</a:t>
+            </a:r>
+            <a:endParaRPr lang="en-US" sz="1150" dirty="0"/>
+          </a:p>
+        </p:txBody>
+      </p:sp>
+      <p:sp>
+        <p:nvSpPr>
+          <p:cNvPr id="9" name="Text 7"/>
+          <p:cNvSpPr/>
+          <p:nvPr/>
+        </p:nvSpPr>
+        <p:spPr>
+          <a:xfrm>
+            <a:off x="1508760" y="2121408"/>
+            <a:ext cx="4297680" cy="274320"/>
+          </a:xfrm>
+          <a:prstGeom prst="rect">
+            <a:avLst/>
+          </a:prstGeom>
+          <a:noFill/>
+          <a:ln/>
+        </p:spPr>
+        <p:txBody>
+          <a:bodyPr wrap="square" lIns="0" tIns="0" rIns="0" bIns="0" rtlCol="0" anchor="ctr"/>
+          <a:lstStyle/>
+          <a:p>
+            <a:pPr indent="0" marL="0">
+              <a:buNone/>
+            </a:pPr>
+            <a:r>
+              <a:rPr lang="en-US" sz="1250" b="1" dirty="0">
+                <a:solidFill>
+                  <a:srgbClr val="2C5F2D"/>
+                </a:solidFill>
+                <a:latin typeface="Calibri" pitchFamily="34" charset="0"/>
+                <a:ea typeface="Calibri" pitchFamily="34" charset="-122"/>
+                <a:cs typeface="Calibri" pitchFamily="34" charset="-120"/>
+              </a:rPr>
+              <a:t>$40,7 млн — весь CAPEX</a:t>
+            </a:r>
+            <a:endParaRPr lang="en-US" sz="1250" dirty="0"/>
+          </a:p>
+        </p:txBody>
+      </p:sp>
+      <p:sp>
+        <p:nvSpPr>
+          <p:cNvPr id="10" name="Shape 8"/>
+          <p:cNvSpPr/>
+          <p:nvPr/>
+        </p:nvSpPr>
+        <p:spPr>
+          <a:xfrm>
+            <a:off x="6172200" y="1417320"/>
+            <a:ext cx="5349240" cy="1051560"/>
+          </a:xfrm>
+          <a:prstGeom prst="roundRect">
+            <a:avLst>
+              <a:gd name="adj" fmla="val 6957"/>
+            </a:avLst>
+          </a:prstGeom>
+          <a:solidFill>
+            <a:srgbClr val="FBF1DD"/>
+          </a:solidFill>
+          <a:ln w="19050">
+            <a:solidFill>
+              <a:srgbClr val="E8A317"/>
+            </a:solidFill>
+            <a:prstDash val="solid"/>
+          </a:ln>
+        </p:spPr>
+      </p:sp>
+      <p:sp>
+        <p:nvSpPr>
+          <p:cNvPr id="11" name="Shape 9"/>
+          <p:cNvSpPr/>
+          <p:nvPr/>
+        </p:nvSpPr>
+        <p:spPr>
+          <a:xfrm>
+            <a:off x="6428232" y="1673352"/>
+            <a:ext cx="502920" cy="502920"/>
+          </a:xfrm>
+          <a:prstGeom prst="ellipse">
+            <a:avLst/>
+          </a:prstGeom>
+          <a:solidFill>
+            <a:srgbClr val="E8A317"/>
+          </a:solidFill>
+          <a:ln/>
+        </p:spPr>
+      </p:sp>
+      <p:sp>
+        <p:nvSpPr>
+          <p:cNvPr id="12" name="Text 10"/>
+          <p:cNvSpPr/>
+          <p:nvPr/>
+        </p:nvSpPr>
+        <p:spPr>
+          <a:xfrm>
+            <a:off x="6428232" y="1673352"/>
+            <a:ext cx="502920" cy="502920"/>
+          </a:xfrm>
+          <a:prstGeom prst="rect">
+            <a:avLst/>
+          </a:prstGeom>
+          <a:noFill/>
+          <a:ln/>
+        </p:spPr>
+        <p:txBody>
+          <a:bodyPr wrap="square" lIns="0" tIns="0" rIns="0" bIns="0" rtlCol="0" anchor="ctr"/>
+          <a:lstStyle/>
+          <a:p>
+            <a:pPr algn="ctr" indent="0" marL="0">
+              <a:buNone/>
+            </a:pPr>
+            <a:r>
+              <a:rPr lang="en-US" sz="2200" b="1" dirty="0">
+                <a:solidFill>
+                  <a:srgbClr val="FFFFFF"/>
+                </a:solidFill>
+                <a:latin typeface="Cambria" pitchFamily="34" charset="0"/>
+                <a:ea typeface="Cambria" pitchFamily="34" charset="-122"/>
+                <a:cs typeface="Cambria" pitchFamily="34" charset="-120"/>
+              </a:rPr>
+              <a:t>2</a:t>
+            </a:r>
+            <a:endParaRPr lang="en-US" sz="2200" dirty="0"/>
+          </a:p>
+        </p:txBody>
+      </p:sp>
+      <p:sp>
+        <p:nvSpPr>
+          <p:cNvPr id="13" name="Text 11"/>
+          <p:cNvSpPr/>
+          <p:nvPr/>
+        </p:nvSpPr>
+        <p:spPr>
+          <a:xfrm>
+            <a:off x="7086600" y="1536192"/>
+            <a:ext cx="4297680" cy="320040"/>
+          </a:xfrm>
+          <a:prstGeom prst="rect">
+            <a:avLst/>
+          </a:prstGeom>
+          <a:noFill/>
+          <a:ln/>
+        </p:spPr>
+        <p:txBody>
+          <a:bodyPr wrap="square" lIns="0" tIns="0" rIns="0" bIns="0" rtlCol="0" anchor="ctr"/>
+          <a:lstStyle/>
+          <a:p>
+            <a:pPr indent="0" marL="0">
+              <a:buNone/>
+            </a:pPr>
+            <a:r>
+              <a:rPr lang="en-US" sz="1400" b="1" dirty="0">
+                <a:solidFill>
+                  <a:srgbClr val="1B2A1C"/>
+                </a:solidFill>
+                <a:latin typeface="Calibri" pitchFamily="34" charset="0"/>
+                <a:ea typeface="Calibri" pitchFamily="34" charset="-122"/>
+                <a:cs typeface="Calibri" pitchFamily="34" charset="-120"/>
+              </a:rPr>
+              <a:t>Прайсы · 31.07.2026</a:t>
+            </a:r>
+            <a:endParaRPr lang="en-US" sz="1400" dirty="0"/>
+          </a:p>
+        </p:txBody>
+      </p:sp>
+      <p:sp>
+        <p:nvSpPr>
+          <p:cNvPr id="14" name="Text 12"/>
+          <p:cNvSpPr/>
+          <p:nvPr/>
+        </p:nvSpPr>
+        <p:spPr>
+          <a:xfrm>
+            <a:off x="7086600" y="1847088"/>
+            <a:ext cx="4297680" cy="274320"/>
+          </a:xfrm>
+          <a:prstGeom prst="rect">
+            <a:avLst/>
+          </a:prstGeom>
+          <a:noFill/>
+          <a:ln/>
+        </p:spPr>
+        <p:txBody>
+          <a:bodyPr wrap="square" lIns="0" tIns="0" rIns="0" bIns="0" rtlCol="0" anchor="ctr"/>
+          <a:lstStyle/>
+          <a:p>
+            <a:pPr indent="0" marL="0">
+              <a:buNone/>
+            </a:pPr>
+            <a:r>
+              <a:rPr lang="en-US" sz="1150" dirty="0">
+                <a:solidFill>
+                  <a:srgbClr val="5B6B5C"/>
+                </a:solidFill>
+                <a:latin typeface="Calibri" pitchFamily="34" charset="0"/>
+                <a:ea typeface="Calibri" pitchFamily="34" charset="-122"/>
+                <a:cs typeface="Calibri" pitchFamily="34" charset="-120"/>
+              </a:rPr>
+              <a:t>Переоценка оборудования</a:t>
+            </a:r>
+            <a:endParaRPr lang="en-US" sz="1150" dirty="0"/>
+          </a:p>
+        </p:txBody>
+      </p:sp>
+      <p:sp>
+        <p:nvSpPr>
+          <p:cNvPr id="15" name="Text 13"/>
+          <p:cNvSpPr/>
+          <p:nvPr/>
+        </p:nvSpPr>
+        <p:spPr>
+          <a:xfrm>
+            <a:off x="7086600" y="2121408"/>
+            <a:ext cx="4297680" cy="274320"/>
+          </a:xfrm>
+          <a:prstGeom prst="rect">
+            <a:avLst/>
+          </a:prstGeom>
+          <a:noFill/>
+          <a:ln/>
+        </p:spPr>
+        <p:txBody>
+          <a:bodyPr wrap="square" lIns="0" tIns="0" rIns="0" bIns="0" rtlCol="0" anchor="ctr"/>
+          <a:lstStyle/>
+          <a:p>
+            <a:pPr indent="0" marL="0">
+              <a:buNone/>
+            </a:pPr>
+            <a:r>
+              <a:rPr lang="en-US" sz="1250" b="1" dirty="0">
+                <a:solidFill>
+                  <a:srgbClr val="B57B00"/>
+                </a:solidFill>
+                <a:latin typeface="Calibri" pitchFamily="34" charset="0"/>
+                <a:ea typeface="Calibri" pitchFamily="34" charset="-122"/>
+                <a:cs typeface="Calibri" pitchFamily="34" charset="-120"/>
+              </a:rPr>
+              <a:t>$13,03 млн — только поставка</a:t>
+            </a:r>
+            <a:endParaRPr lang="en-US" sz="1250" dirty="0"/>
+          </a:p>
+        </p:txBody>
+      </p:sp>
+      <p:graphicFrame>
+        <p:nvGraphicFramePr>
+          <p:cNvPr id="11" name="Table 0"/>
+          <p:cNvGraphicFramePr>
+            <a:graphicFrameLocks noGrp="1"/>
+          </p:cNvGraphicFramePr>
+          <p:nvPr>
+            <p:extLst>
+              <p:ext uri="{D42A27DB-BD31-4B8C-83A1-F6EECF244321}">
+                <p14:modId xmlns:p14="http://schemas.microsoft.com/office/powerpoint/2010/main" val="1579011935"/>
+              </p:ext>
+            </p:extLst>
+          </p:nvPr>
+        </p:nvGraphicFramePr>
+        <p:xfrm>
+          <a:off x="594360" y="2788920"/>
+          <a:ext cx="10881360" cy="914400"/>
+        </p:xfrm>
+        <a:graphic>
+          <a:graphicData uri="http://schemas.openxmlformats.org/drawingml/2006/table">
+            <a:tbl>
+              <a:tblPr/>
+              <a:tblGrid>
+                <a:gridCol w="4937760"/>
+                <a:gridCol w="2286000"/>
+                <a:gridCol w="2377440"/>
+                <a:gridCol w="1280160"/>
+              </a:tblGrid>
+              <a:tr h="329184">
+                <a:tc>
+                  <a:txBody>
+                    <a:bodyPr/>
+                    <a:lstStyle/>
+                    <a:p>
+                      <a:pPr algn="l" indent="0" marL="0">
+                        <a:buNone/>
+                      </a:pPr>
+                      <a:r>
+                        <a:rPr lang="en-US" sz="1200" b="1" dirty="0">
+                          <a:solidFill>
+                            <a:srgbClr val="FFFFFF"/>
+                          </a:solidFill>
+                          <a:latin typeface="Calibri" pitchFamily="34" charset="0"/>
+                          <a:ea typeface="Calibri" pitchFamily="34" charset="-122"/>
+                          <a:cs typeface="Calibri" pitchFamily="34" charset="-120"/>
+                        </a:rPr>
+                        <a:t>Пакет «железа»</a:t>
+                      </a:r>
+                      <a:endParaRPr lang="en-US" sz="1200" dirty="0">
+                        <a:latin typeface="Calibri" charset="0"/>
+                        <a:ea typeface="Calibri" charset="0"/>
+                        <a:cs typeface="Calibri" charset="0"/>
+                      </a:endParaRPr>
+                    </a:p>
+                  </a:txBody>
+                  <a:tcPr marL="63500" marR="63500" marT="38100" marB="38100" anchor="ctr">
+                    <a:lnL w="6350" cap="flat" cmpd="sng" algn="ctr">
+                      <a:solidFill>
+                        <a:srgbClr val="D3DBC7"/>
+                      </a:solidFill>
+                      <a:prstDash val="solid"/>
+                      <a:round/>
+                      <a:headEnd type="none" w="med" len="med"/>
+                      <a:tailEnd type="none" w="med" len="med"/>
+                    </a:lnL>
+                    <a:lnR w="6350" cap="flat" cmpd="sng" algn="ctr">
+                      <a:solidFill>
+                        <a:srgbClr val="D3DBC7"/>
+                      </a:solidFill>
+                      <a:prstDash val="solid"/>
+                      <a:round/>
+                      <a:headEnd type="none" w="med" len="med"/>
+                      <a:tailEnd type="none" w="med" len="med"/>
+                    </a:lnR>
+                    <a:lnT w="6350" cap="flat" cmpd="sng" algn="ctr">
+                      <a:solidFill>
+                        <a:srgbClr val="D3DBC7"/>
+                      </a:solidFill>
+                      <a:prstDash val="solid"/>
+                      <a:round/>
+                      <a:headEnd type="none" w="med" len="med"/>
+                      <a:tailEnd type="none" w="med" len="med"/>
+                    </a:lnT>
+                    <a:lnB w="6350" cap="flat" cmpd="sng" algn="ctr">
+                      <a:solidFill>
+                        <a:srgbClr val="D3DBC7"/>
+                      </a:solidFill>
+                      <a:prstDash val="solid"/>
+                      <a:round/>
+                      <a:headEnd type="none" w="med" len="med"/>
+                      <a:tailEnd type="none" w="med" len="med"/>
+                    </a:lnB>
+                    <a:solidFill>
+                      <a:srgbClr val="2C5F2D"/>
+                    </a:solidFill>
+                  </a:tcPr>
+                </a:tc>
+                <a:tc>
+                  <a:txBody>
+                    <a:bodyPr/>
+                    <a:lstStyle/>
+                    <a:p>
+                      <a:pPr algn="r" indent="0" marL="0">
+                        <a:buNone/>
+                      </a:pPr>
+                      <a:r>
+                        <a:rPr lang="en-US" sz="1200" b="1" dirty="0">
+                          <a:solidFill>
+                            <a:srgbClr val="FFFFFF"/>
+                          </a:solidFill>
+                          <a:latin typeface="Calibri" pitchFamily="34" charset="0"/>
+                          <a:ea typeface="Calibri" pitchFamily="34" charset="-122"/>
+                          <a:cs typeface="Calibri" pitchFamily="34" charset="-120"/>
+                        </a:rPr>
+                        <a:t>2024, USD</a:t>
+                      </a:r>
+                      <a:endParaRPr lang="en-US" sz="1200" dirty="0">
+                        <a:latin typeface="Calibri" charset="0"/>
+                        <a:ea typeface="Calibri" charset="0"/>
+                        <a:cs typeface="Calibri" charset="0"/>
+                      </a:endParaRPr>
+                    </a:p>
+                  </a:txBody>
+                  <a:tcPr marL="63500" marR="63500" marT="38100" marB="38100" anchor="ctr">
+                    <a:lnL w="6350" cap="flat" cmpd="sng" algn="ctr">
+                      <a:solidFill>
+                        <a:srgbClr val="D3DBC7"/>
+                      </a:solidFill>
+                      <a:prstDash val="solid"/>
+                      <a:round/>
+                      <a:headEnd type="none" w="med" len="med"/>
+                      <a:tailEnd type="none" w="med" len="med"/>
+                    </a:lnL>
+                    <a:lnR w="6350" cap="flat" cmpd="sng" algn="ctr">
+                      <a:solidFill>
+                        <a:srgbClr val="D3DBC7"/>
+                      </a:solidFill>
+                      <a:prstDash val="solid"/>
+                      <a:round/>
+                      <a:headEnd type="none" w="med" len="med"/>
+                      <a:tailEnd type="none" w="med" len="med"/>
+                    </a:lnR>
+                    <a:lnT w="6350" cap="flat" cmpd="sng" algn="ctr">
+                      <a:solidFill>
+                        <a:srgbClr val="D3DBC7"/>
+                      </a:solidFill>
+                      <a:prstDash val="solid"/>
+                      <a:round/>
+                      <a:headEnd type="none" w="med" len="med"/>
+                      <a:tailEnd type="none" w="med" len="med"/>
+                    </a:lnT>
+                    <a:lnB w="6350" cap="flat" cmpd="sng" algn="ctr">
+                      <a:solidFill>
+                        <a:srgbClr val="D3DBC7"/>
+                      </a:solidFill>
+                      <a:prstDash val="solid"/>
+                      <a:round/>
+                      <a:headEnd type="none" w="med" len="med"/>
+                      <a:tailEnd type="none" w="med" len="med"/>
+                    </a:lnB>
+                    <a:solidFill>
+                      <a:srgbClr val="2C5F2D"/>
+                    </a:solidFill>
+                  </a:tcPr>
+                </a:tc>
+                <a:tc>
+                  <a:txBody>
+                    <a:bodyPr/>
+                    <a:lstStyle/>
+                    <a:p>
+                      <a:pPr algn="r" indent="0" marL="0">
+                        <a:buNone/>
+                      </a:pPr>
+                      <a:r>
+                        <a:rPr lang="en-US" sz="1200" b="1" dirty="0">
+                          <a:solidFill>
+                            <a:srgbClr val="FFFFFF"/>
+                          </a:solidFill>
+                          <a:latin typeface="Calibri" pitchFamily="34" charset="0"/>
+                          <a:ea typeface="Calibri" pitchFamily="34" charset="-122"/>
+                          <a:cs typeface="Calibri" pitchFamily="34" charset="-120"/>
+                        </a:rPr>
+                        <a:t>2026, ≈USD</a:t>
+                      </a:r>
+                      <a:endParaRPr lang="en-US" sz="1200" dirty="0">
+                        <a:latin typeface="Calibri" charset="0"/>
+                        <a:ea typeface="Calibri" charset="0"/>
+                        <a:cs typeface="Calibri" charset="0"/>
+                      </a:endParaRPr>
+                    </a:p>
+                  </a:txBody>
+                  <a:tcPr marL="63500" marR="63500" marT="38100" marB="38100" anchor="ctr">
+                    <a:lnL w="6350" cap="flat" cmpd="sng" algn="ctr">
+                      <a:solidFill>
+                        <a:srgbClr val="D3DBC7"/>
+                      </a:solidFill>
+                      <a:prstDash val="solid"/>
+                      <a:round/>
+                      <a:headEnd type="none" w="med" len="med"/>
+                      <a:tailEnd type="none" w="med" len="med"/>
+                    </a:lnL>
+                    <a:lnR w="6350" cap="flat" cmpd="sng" algn="ctr">
+                      <a:solidFill>
+                        <a:srgbClr val="D3DBC7"/>
+                      </a:solidFill>
+                      <a:prstDash val="solid"/>
+                      <a:round/>
+                      <a:headEnd type="none" w="med" len="med"/>
+                      <a:tailEnd type="none" w="med" len="med"/>
+                    </a:lnR>
+                    <a:lnT w="6350" cap="flat" cmpd="sng" algn="ctr">
+                      <a:solidFill>
+                        <a:srgbClr val="D3DBC7"/>
+                      </a:solidFill>
+                      <a:prstDash val="solid"/>
+                      <a:round/>
+                      <a:headEnd type="none" w="med" len="med"/>
+                      <a:tailEnd type="none" w="med" len="med"/>
+                    </a:lnT>
+                    <a:lnB w="6350" cap="flat" cmpd="sng" algn="ctr">
+                      <a:solidFill>
+                        <a:srgbClr val="D3DBC7"/>
+                      </a:solidFill>
+                      <a:prstDash val="solid"/>
+                      <a:round/>
+                      <a:headEnd type="none" w="med" len="med"/>
+                      <a:tailEnd type="none" w="med" len="med"/>
+                    </a:lnB>
+                    <a:solidFill>
+                      <a:srgbClr val="2C5F2D"/>
+                    </a:solidFill>
+                  </a:tcPr>
+                </a:tc>
+                <a:tc>
+                  <a:txBody>
+                    <a:bodyPr/>
+                    <a:lstStyle/>
+                    <a:p>
+                      <a:pPr algn="r" indent="0" marL="0">
+                        <a:buNone/>
+                      </a:pPr>
+                      <a:r>
+                        <a:rPr lang="en-US" sz="1200" b="1" dirty="0">
+                          <a:solidFill>
+                            <a:srgbClr val="FFFFFF"/>
+                          </a:solidFill>
+                          <a:latin typeface="Calibri" pitchFamily="34" charset="0"/>
+                          <a:ea typeface="Calibri" pitchFamily="34" charset="-122"/>
+                          <a:cs typeface="Calibri" pitchFamily="34" charset="-120"/>
+                        </a:rPr>
+                        <a:t>Δ</a:t>
+                      </a:r>
+                      <a:endParaRPr lang="en-US" sz="1200" dirty="0">
+                        <a:latin typeface="Calibri" charset="0"/>
+                        <a:ea typeface="Calibri" charset="0"/>
+                        <a:cs typeface="Calibri" charset="0"/>
+                      </a:endParaRPr>
+                    </a:p>
+                  </a:txBody>
+                  <a:tcPr marL="63500" marR="63500" marT="38100" marB="38100" anchor="ctr">
+                    <a:lnL w="6350" cap="flat" cmpd="sng" algn="ctr">
+                      <a:solidFill>
+                        <a:srgbClr val="D3DBC7"/>
+                      </a:solidFill>
+                      <a:prstDash val="solid"/>
+                      <a:round/>
+                      <a:headEnd type="none" w="med" len="med"/>
+                      <a:tailEnd type="none" w="med" len="med"/>
+                    </a:lnL>
+                    <a:lnR w="6350" cap="flat" cmpd="sng" algn="ctr">
+                      <a:solidFill>
+                        <a:srgbClr val="D3DBC7"/>
+                      </a:solidFill>
+                      <a:prstDash val="solid"/>
+                      <a:round/>
+                      <a:headEnd type="none" w="med" len="med"/>
+                      <a:tailEnd type="none" w="med" len="med"/>
+                    </a:lnR>
+                    <a:lnT w="6350" cap="flat" cmpd="sng" algn="ctr">
+                      <a:solidFill>
+                        <a:srgbClr val="D3DBC7"/>
+                      </a:solidFill>
+                      <a:prstDash val="solid"/>
+                      <a:round/>
+                      <a:headEnd type="none" w="med" len="med"/>
+                      <a:tailEnd type="none" w="med" len="med"/>
+                    </a:lnT>
+                    <a:lnB w="6350" cap="flat" cmpd="sng" algn="ctr">
+                      <a:solidFill>
+                        <a:srgbClr val="D3DBC7"/>
+                      </a:solidFill>
+                      <a:prstDash val="solid"/>
+                      <a:round/>
+                      <a:headEnd type="none" w="med" len="med"/>
+                      <a:tailEnd type="none" w="med" len="med"/>
+                    </a:lnB>
+                    <a:solidFill>
+                      <a:srgbClr val="2C5F2D"/>
+                    </a:solidFill>
+                  </a:tcPr>
+                </a:tc>
+              </a:tr>
+              <a:tr h="329184">
+                <a:tc>
+                  <a:txBody>
+                    <a:bodyPr/>
+                    <a:lstStyle/>
+                    <a:p>
+                      <a:pPr algn="l" indent="0" marL="0">
+                        <a:buNone/>
+                      </a:pPr>
+                      <a:r>
+                        <a:rPr lang="en-US" sz="1150" dirty="0">
+                          <a:solidFill>
+                            <a:srgbClr val="1B2A1C"/>
+                          </a:solidFill>
+                          <a:latin typeface="Calibri" pitchFamily="34" charset="0"/>
+                          <a:ea typeface="Calibri" pitchFamily="34" charset="-122"/>
+                          <a:cs typeface="Calibri" pitchFamily="34" charset="-120"/>
+                        </a:rPr>
+                        <a:t>Технологическое оборудование</a:t>
+                      </a:r>
+                      <a:endParaRPr lang="en-US" sz="1150" dirty="0">
+                        <a:latin typeface="Calibri" charset="0"/>
+                        <a:ea typeface="Calibri" charset="0"/>
+                        <a:cs typeface="Calibri" charset="0"/>
+                      </a:endParaRPr>
+                    </a:p>
+                  </a:txBody>
+                  <a:tcPr marL="63500" marR="63500" marT="38100" marB="38100" anchor="ctr">
+                    <a:lnL w="6350" cap="flat" cmpd="sng" algn="ctr">
+                      <a:solidFill>
+                        <a:srgbClr val="D3DBC7"/>
+                      </a:solidFill>
+                      <a:prstDash val="solid"/>
+                      <a:round/>
+                      <a:headEnd type="none" w="med" len="med"/>
+                      <a:tailEnd type="none" w="med" len="med"/>
+                    </a:lnL>
+                    <a:lnR w="6350" cap="flat" cmpd="sng" algn="ctr">
+                      <a:solidFill>
+                        <a:srgbClr val="D3DBC7"/>
+                      </a:solidFill>
+                      <a:prstDash val="solid"/>
+                      <a:round/>
+                      <a:headEnd type="none" w="med" len="med"/>
+                      <a:tailEnd type="none" w="med" len="med"/>
+                    </a:lnR>
+                    <a:lnT w="6350" cap="flat" cmpd="sng" algn="ctr">
+                      <a:solidFill>
+                        <a:srgbClr val="D3DBC7"/>
+                      </a:solidFill>
+                      <a:prstDash val="solid"/>
+                      <a:round/>
+                      <a:headEnd type="none" w="med" len="med"/>
+                      <a:tailEnd type="none" w="med" len="med"/>
+                    </a:lnT>
+                    <a:lnB w="6350" cap="flat" cmpd="sng" algn="ctr">
+                      <a:solidFill>
+                        <a:srgbClr val="D3DBC7"/>
+                      </a:solidFill>
+                      <a:prstDash val="solid"/>
+                      <a:round/>
+                      <a:headEnd type="none" w="med" len="med"/>
+                      <a:tailEnd type="none" w="med" len="med"/>
+                    </a:lnB>
+                    <a:solidFill>
+                      <a:srgbClr val="FFFFFF"/>
+                    </a:solidFill>
+                  </a:tcPr>
+                </a:tc>
+                <a:tc>
+                  <a:txBody>
+                    <a:bodyPr/>
+                    <a:lstStyle/>
+                    <a:p>
+                      <a:pPr algn="r" indent="0" marL="0">
+                        <a:buNone/>
+                      </a:pPr>
+                      <a:r>
+                        <a:rPr lang="en-US" sz="1150" dirty="0">
+                          <a:solidFill>
+                            <a:srgbClr val="1B2A1C"/>
+                          </a:solidFill>
+                          <a:latin typeface="Calibri" pitchFamily="34" charset="0"/>
+                          <a:ea typeface="Calibri" pitchFamily="34" charset="-122"/>
+                          <a:cs typeface="Calibri" pitchFamily="34" charset="-120"/>
+                        </a:rPr>
+                        <a:t>~10 450 000</a:t>
+                      </a:r>
+                      <a:endParaRPr lang="en-US" sz="1150" dirty="0">
+                        <a:latin typeface="Calibri" charset="0"/>
+                        <a:ea typeface="Calibri" charset="0"/>
+                        <a:cs typeface="Calibri" charset="0"/>
+                      </a:endParaRPr>
+                    </a:p>
+                  </a:txBody>
+                  <a:tcPr marL="63500" marR="63500" marT="38100" marB="38100" anchor="ctr">
+                    <a:lnL w="6350" cap="flat" cmpd="sng" algn="ctr">
+                      <a:solidFill>
+                        <a:srgbClr val="D3DBC7"/>
+                      </a:solidFill>
+                      <a:prstDash val="solid"/>
+                      <a:round/>
+                      <a:headEnd type="none" w="med" len="med"/>
+                      <a:tailEnd type="none" w="med" len="med"/>
+                    </a:lnL>
+                    <a:lnR w="6350" cap="flat" cmpd="sng" algn="ctr">
+                      <a:solidFill>
+                        <a:srgbClr val="D3DBC7"/>
+                      </a:solidFill>
+                      <a:prstDash val="solid"/>
+                      <a:round/>
+                      <a:headEnd type="none" w="med" len="med"/>
+                      <a:tailEnd type="none" w="med" len="med"/>
+                    </a:lnR>
+                    <a:lnT w="6350" cap="flat" cmpd="sng" algn="ctr">
+                      <a:solidFill>
+                        <a:srgbClr val="D3DBC7"/>
+                      </a:solidFill>
+                      <a:prstDash val="solid"/>
+                      <a:round/>
+                      <a:headEnd type="none" w="med" len="med"/>
+                      <a:tailEnd type="none" w="med" len="med"/>
+                    </a:lnT>
+                    <a:lnB w="6350" cap="flat" cmpd="sng" algn="ctr">
+                      <a:solidFill>
+                        <a:srgbClr val="D3DBC7"/>
+                      </a:solidFill>
+                      <a:prstDash val="solid"/>
+                      <a:round/>
+                      <a:headEnd type="none" w="med" len="med"/>
+                      <a:tailEnd type="none" w="med" len="med"/>
+                    </a:lnB>
+                    <a:solidFill>
+                      <a:srgbClr val="FFFFFF"/>
+                    </a:solidFill>
+                  </a:tcPr>
+                </a:tc>
+                <a:tc>
+                  <a:txBody>
+                    <a:bodyPr/>
+                    <a:lstStyle/>
+                    <a:p>
+                      <a:pPr algn="r" indent="0" marL="0">
+                        <a:buNone/>
+                      </a:pPr>
+                      <a:r>
+                        <a:rPr lang="en-US" sz="1150" dirty="0">
+                          <a:solidFill>
+                            <a:srgbClr val="1B2A1C"/>
+                          </a:solidFill>
+                          <a:latin typeface="Calibri" pitchFamily="34" charset="0"/>
+                          <a:ea typeface="Calibri" pitchFamily="34" charset="-122"/>
+                          <a:cs typeface="Calibri" pitchFamily="34" charset="-120"/>
+                        </a:rPr>
+                        <a:t>12 160 982</a:t>
+                      </a:r>
+                      <a:endParaRPr lang="en-US" sz="1150" dirty="0">
+                        <a:latin typeface="Calibri" charset="0"/>
+                        <a:ea typeface="Calibri" charset="0"/>
+                        <a:cs typeface="Calibri" charset="0"/>
+                      </a:endParaRPr>
+                    </a:p>
+                  </a:txBody>
+                  <a:tcPr marL="63500" marR="63500" marT="38100" marB="38100" anchor="ctr">
+                    <a:lnL w="6350" cap="flat" cmpd="sng" algn="ctr">
+                      <a:solidFill>
+                        <a:srgbClr val="D3DBC7"/>
+                      </a:solidFill>
+                      <a:prstDash val="solid"/>
+                      <a:round/>
+                      <a:headEnd type="none" w="med" len="med"/>
+                      <a:tailEnd type="none" w="med" len="med"/>
+                    </a:lnL>
+                    <a:lnR w="6350" cap="flat" cmpd="sng" algn="ctr">
+                      <a:solidFill>
+                        <a:srgbClr val="D3DBC7"/>
+                      </a:solidFill>
+                      <a:prstDash val="solid"/>
+                      <a:round/>
+                      <a:headEnd type="none" w="med" len="med"/>
+                      <a:tailEnd type="none" w="med" len="med"/>
+                    </a:lnR>
+                    <a:lnT w="6350" cap="flat" cmpd="sng" algn="ctr">
+                      <a:solidFill>
+                        <a:srgbClr val="D3DBC7"/>
+                      </a:solidFill>
+                      <a:prstDash val="solid"/>
+                      <a:round/>
+                      <a:headEnd type="none" w="med" len="med"/>
+                      <a:tailEnd type="none" w="med" len="med"/>
+                    </a:lnT>
+                    <a:lnB w="6350" cap="flat" cmpd="sng" algn="ctr">
+                      <a:solidFill>
+                        <a:srgbClr val="D3DBC7"/>
+                      </a:solidFill>
+                      <a:prstDash val="solid"/>
+                      <a:round/>
+                      <a:headEnd type="none" w="med" len="med"/>
+                      <a:tailEnd type="none" w="med" len="med"/>
+                    </a:lnB>
+                    <a:solidFill>
+                      <a:srgbClr val="FFFFFF"/>
+                    </a:solidFill>
+                  </a:tcPr>
+                </a:tc>
+                <a:tc>
+                  <a:txBody>
+                    <a:bodyPr/>
+                    <a:lstStyle/>
+                    <a:p>
+                      <a:pPr algn="r" indent="0" marL="0">
+                        <a:buNone/>
+                      </a:pPr>
+                      <a:r>
+                        <a:rPr lang="en-US" sz="1150" b="1" dirty="0">
+                          <a:solidFill>
+                            <a:srgbClr val="B57B00"/>
+                          </a:solidFill>
+                          <a:latin typeface="Calibri" pitchFamily="34" charset="0"/>
+                          <a:ea typeface="Calibri" pitchFamily="34" charset="-122"/>
+                          <a:cs typeface="Calibri" pitchFamily="34" charset="-120"/>
+                        </a:rPr>
+                        <a:t>+16%</a:t>
+                      </a:r>
+                      <a:endParaRPr lang="en-US" sz="1150" dirty="0">
+                        <a:latin typeface="Calibri" charset="0"/>
+                        <a:ea typeface="Calibri" charset="0"/>
+                        <a:cs typeface="Calibri" charset="0"/>
+                      </a:endParaRPr>
+                    </a:p>
+                  </a:txBody>
+                  <a:tcPr marL="63500" marR="63500" marT="38100" marB="38100" anchor="ctr">
+                    <a:lnL w="6350" cap="flat" cmpd="sng" algn="ctr">
+                      <a:solidFill>
+                        <a:srgbClr val="D3DBC7"/>
+                      </a:solidFill>
+                      <a:prstDash val="solid"/>
+                      <a:round/>
+                      <a:headEnd type="none" w="med" len="med"/>
+                      <a:tailEnd type="none" w="med" len="med"/>
+                    </a:lnL>
+                    <a:lnR w="6350" cap="flat" cmpd="sng" algn="ctr">
+                      <a:solidFill>
+                        <a:srgbClr val="D3DBC7"/>
+                      </a:solidFill>
+                      <a:prstDash val="solid"/>
+                      <a:round/>
+                      <a:headEnd type="none" w="med" len="med"/>
+                      <a:tailEnd type="none" w="med" len="med"/>
+                    </a:lnR>
+                    <a:lnT w="6350" cap="flat" cmpd="sng" algn="ctr">
+                      <a:solidFill>
+                        <a:srgbClr val="D3DBC7"/>
+                      </a:solidFill>
+                      <a:prstDash val="solid"/>
+                      <a:round/>
+                      <a:headEnd type="none" w="med" len="med"/>
+                      <a:tailEnd type="none" w="med" len="med"/>
+                    </a:lnT>
+                    <a:lnB w="6350" cap="flat" cmpd="sng" algn="ctr">
+                      <a:solidFill>
+                        <a:srgbClr val="D3DBC7"/>
+                      </a:solidFill>
+                      <a:prstDash val="solid"/>
+                      <a:round/>
+                      <a:headEnd type="none" w="med" len="med"/>
+                      <a:tailEnd type="none" w="med" len="med"/>
+                    </a:lnB>
+                    <a:solidFill>
+                      <a:srgbClr val="FFFFFF"/>
+                    </a:solidFill>
+                  </a:tcPr>
+                </a:tc>
+              </a:tr>
+              <a:tr h="329184">
+                <a:tc>
+                  <a:txBody>
+                    <a:bodyPr/>
+                    <a:lstStyle/>
+                    <a:p>
+                      <a:pPr algn="l" indent="0" marL="0">
+                        <a:buNone/>
+                      </a:pPr>
+                      <a:r>
+                        <a:rPr lang="en-US" sz="1150" dirty="0">
+                          <a:solidFill>
+                            <a:srgbClr val="1B2A1C"/>
+                          </a:solidFill>
+                          <a:latin typeface="Calibri" pitchFamily="34" charset="0"/>
+                          <a:ea typeface="Calibri" pitchFamily="34" charset="-122"/>
+                          <a:cs typeface="Calibri" pitchFamily="34" charset="-120"/>
+                        </a:rPr>
+                        <a:t>Клапаны / арматура</a:t>
+                      </a:r>
+                      <a:endParaRPr lang="en-US" sz="1150" dirty="0">
+                        <a:latin typeface="Calibri" charset="0"/>
+                        <a:ea typeface="Calibri" charset="0"/>
+                        <a:cs typeface="Calibri" charset="0"/>
+                      </a:endParaRPr>
+                    </a:p>
+                  </a:txBody>
+                  <a:tcPr marL="63500" marR="63500" marT="38100" marB="38100" anchor="ctr">
+                    <a:lnL w="6350" cap="flat" cmpd="sng" algn="ctr">
+                      <a:solidFill>
+                        <a:srgbClr val="D3DBC7"/>
+                      </a:solidFill>
+                      <a:prstDash val="solid"/>
+                      <a:round/>
+                      <a:headEnd type="none" w="med" len="med"/>
+                      <a:tailEnd type="none" w="med" len="med"/>
+                    </a:lnL>
+                    <a:lnR w="6350" cap="flat" cmpd="sng" algn="ctr">
+                      <a:solidFill>
+                        <a:srgbClr val="D3DBC7"/>
+                      </a:solidFill>
+                      <a:prstDash val="solid"/>
+                      <a:round/>
+                      <a:headEnd type="none" w="med" len="med"/>
+                      <a:tailEnd type="none" w="med" len="med"/>
+                    </a:lnR>
+                    <a:lnT w="6350" cap="flat" cmpd="sng" algn="ctr">
+                      <a:solidFill>
+                        <a:srgbClr val="D3DBC7"/>
+                      </a:solidFill>
+                      <a:prstDash val="solid"/>
+                      <a:round/>
+                      <a:headEnd type="none" w="med" len="med"/>
+                      <a:tailEnd type="none" w="med" len="med"/>
+                    </a:lnT>
+                    <a:lnB w="6350" cap="flat" cmpd="sng" algn="ctr">
+                      <a:solidFill>
+                        <a:srgbClr val="D3DBC7"/>
+                      </a:solidFill>
+                      <a:prstDash val="solid"/>
+                      <a:round/>
+                      <a:headEnd type="none" w="med" len="med"/>
+                      <a:tailEnd type="none" w="med" len="med"/>
+                    </a:lnB>
+                    <a:solidFill>
+                      <a:srgbClr val="EEF3E6"/>
+                    </a:solidFill>
+                  </a:tcPr>
+                </a:tc>
+                <a:tc>
+                  <a:txBody>
+                    <a:bodyPr/>
+                    <a:lstStyle/>
+                    <a:p>
+                      <a:pPr algn="r" indent="0" marL="0">
+                        <a:buNone/>
+                      </a:pPr>
+                      <a:r>
+                        <a:rPr lang="en-US" sz="1150" dirty="0">
+                          <a:solidFill>
+                            <a:srgbClr val="1B2A1C"/>
+                          </a:solidFill>
+                          <a:latin typeface="Calibri" pitchFamily="34" charset="0"/>
+                          <a:ea typeface="Calibri" pitchFamily="34" charset="-122"/>
+                          <a:cs typeface="Calibri" pitchFamily="34" charset="-120"/>
+                        </a:rPr>
+                        <a:t>174 120</a:t>
+                      </a:r>
+                      <a:endParaRPr lang="en-US" sz="1150" dirty="0">
+                        <a:latin typeface="Calibri" charset="0"/>
+                        <a:ea typeface="Calibri" charset="0"/>
+                        <a:cs typeface="Calibri" charset="0"/>
+                      </a:endParaRPr>
+                    </a:p>
+                  </a:txBody>
+                  <a:tcPr marL="63500" marR="63500" marT="38100" marB="38100" anchor="ctr">
+                    <a:lnL w="6350" cap="flat" cmpd="sng" algn="ctr">
+                      <a:solidFill>
+                        <a:srgbClr val="D3DBC7"/>
+                      </a:solidFill>
+                      <a:prstDash val="solid"/>
+                      <a:round/>
+                      <a:headEnd type="none" w="med" len="med"/>
+                      <a:tailEnd type="none" w="med" len="med"/>
+                    </a:lnL>
+                    <a:lnR w="6350" cap="flat" cmpd="sng" algn="ctr">
+                      <a:solidFill>
+                        <a:srgbClr val="D3DBC7"/>
+                      </a:solidFill>
+                      <a:prstDash val="solid"/>
+                      <a:round/>
+                      <a:headEnd type="none" w="med" len="med"/>
+                      <a:tailEnd type="none" w="med" len="med"/>
+                    </a:lnR>
+                    <a:lnT w="6350" cap="flat" cmpd="sng" algn="ctr">
+                      <a:solidFill>
+                        <a:srgbClr val="D3DBC7"/>
+                      </a:solidFill>
+                      <a:prstDash val="solid"/>
+                      <a:round/>
+                      <a:headEnd type="none" w="med" len="med"/>
+                      <a:tailEnd type="none" w="med" len="med"/>
+                    </a:lnT>
+                    <a:lnB w="6350" cap="flat" cmpd="sng" algn="ctr">
+                      <a:solidFill>
+                        <a:srgbClr val="D3DBC7"/>
+                      </a:solidFill>
+                      <a:prstDash val="solid"/>
+                      <a:round/>
+                      <a:headEnd type="none" w="med" len="med"/>
+                      <a:tailEnd type="none" w="med" len="med"/>
+                    </a:lnB>
+                    <a:solidFill>
+                      <a:srgbClr val="EEF3E6"/>
+                    </a:solidFill>
+                  </a:tcPr>
+                </a:tc>
+                <a:tc>
+                  <a:txBody>
+                    <a:bodyPr/>
+                    <a:lstStyle/>
+                    <a:p>
+                      <a:pPr algn="r" indent="0" marL="0">
+                        <a:buNone/>
+                      </a:pPr>
+                      <a:r>
+                        <a:rPr lang="en-US" sz="1150" dirty="0">
+                          <a:solidFill>
+                            <a:srgbClr val="1B2A1C"/>
+                          </a:solidFill>
+                          <a:latin typeface="Calibri" pitchFamily="34" charset="0"/>
+                          <a:ea typeface="Calibri" pitchFamily="34" charset="-122"/>
+                          <a:cs typeface="Calibri" pitchFamily="34" charset="-120"/>
+                        </a:rPr>
+                        <a:t>≈ 310 104</a:t>
+                      </a:r>
+                      <a:endParaRPr lang="en-US" sz="1150" dirty="0">
+                        <a:latin typeface="Calibri" charset="0"/>
+                        <a:ea typeface="Calibri" charset="0"/>
+                        <a:cs typeface="Calibri" charset="0"/>
+                      </a:endParaRPr>
+                    </a:p>
+                  </a:txBody>
+                  <a:tcPr marL="63500" marR="63500" marT="38100" marB="38100" anchor="ctr">
+                    <a:lnL w="6350" cap="flat" cmpd="sng" algn="ctr">
+                      <a:solidFill>
+                        <a:srgbClr val="D3DBC7"/>
+                      </a:solidFill>
+                      <a:prstDash val="solid"/>
+                      <a:round/>
+                      <a:headEnd type="none" w="med" len="med"/>
+                      <a:tailEnd type="none" w="med" len="med"/>
+                    </a:lnL>
+                    <a:lnR w="6350" cap="flat" cmpd="sng" algn="ctr">
+                      <a:solidFill>
+                        <a:srgbClr val="D3DBC7"/>
+                      </a:solidFill>
+                      <a:prstDash val="solid"/>
+                      <a:round/>
+                      <a:headEnd type="none" w="med" len="med"/>
+                      <a:tailEnd type="none" w="med" len="med"/>
+                    </a:lnR>
+                    <a:lnT w="6350" cap="flat" cmpd="sng" algn="ctr">
+                      <a:solidFill>
+                        <a:srgbClr val="D3DBC7"/>
+                      </a:solidFill>
+                      <a:prstDash val="solid"/>
+                      <a:round/>
+                      <a:headEnd type="none" w="med" len="med"/>
+                      <a:tailEnd type="none" w="med" len="med"/>
+                    </a:lnT>
+                    <a:lnB w="6350" cap="flat" cmpd="sng" algn="ctr">
+                      <a:solidFill>
+                        <a:srgbClr val="D3DBC7"/>
+                      </a:solidFill>
+                      <a:prstDash val="solid"/>
+                      <a:round/>
+                      <a:headEnd type="none" w="med" len="med"/>
+                      <a:tailEnd type="none" w="med" len="med"/>
+                    </a:lnB>
+                    <a:solidFill>
+                      <a:srgbClr val="EEF3E6"/>
+                    </a:solidFill>
+                  </a:tcPr>
+                </a:tc>
+                <a:tc>
+                  <a:txBody>
+                    <a:bodyPr/>
+                    <a:lstStyle/>
+                    <a:p>
+                      <a:pPr algn="r" indent="0" marL="0">
+                        <a:buNone/>
+                      </a:pPr>
+                      <a:r>
+                        <a:rPr lang="en-US" sz="1150" b="1" dirty="0">
+                          <a:solidFill>
+                            <a:srgbClr val="B57B00"/>
+                          </a:solidFill>
+                          <a:latin typeface="Calibri" pitchFamily="34" charset="0"/>
+                          <a:ea typeface="Calibri" pitchFamily="34" charset="-122"/>
+                          <a:cs typeface="Calibri" pitchFamily="34" charset="-120"/>
+                        </a:rPr>
+                        <a:t>+78%</a:t>
+                      </a:r>
+                      <a:endParaRPr lang="en-US" sz="1150" dirty="0">
+                        <a:latin typeface="Calibri" charset="0"/>
+                        <a:ea typeface="Calibri" charset="0"/>
+                        <a:cs typeface="Calibri" charset="0"/>
+                      </a:endParaRPr>
+                    </a:p>
+                  </a:txBody>
+                  <a:tcPr marL="63500" marR="63500" marT="38100" marB="38100" anchor="ctr">
+                    <a:lnL w="6350" cap="flat" cmpd="sng" algn="ctr">
+                      <a:solidFill>
+                        <a:srgbClr val="D3DBC7"/>
+                      </a:solidFill>
+                      <a:prstDash val="solid"/>
+                      <a:round/>
+                      <a:headEnd type="none" w="med" len="med"/>
+                      <a:tailEnd type="none" w="med" len="med"/>
+                    </a:lnL>
+                    <a:lnR w="6350" cap="flat" cmpd="sng" algn="ctr">
+                      <a:solidFill>
+                        <a:srgbClr val="D3DBC7"/>
+                      </a:solidFill>
+                      <a:prstDash val="solid"/>
+                      <a:round/>
+                      <a:headEnd type="none" w="med" len="med"/>
+                      <a:tailEnd type="none" w="med" len="med"/>
+                    </a:lnR>
+                    <a:lnT w="6350" cap="flat" cmpd="sng" algn="ctr">
+                      <a:solidFill>
+                        <a:srgbClr val="D3DBC7"/>
+                      </a:solidFill>
+                      <a:prstDash val="solid"/>
+                      <a:round/>
+                      <a:headEnd type="none" w="med" len="med"/>
+                      <a:tailEnd type="none" w="med" len="med"/>
+                    </a:lnT>
+                    <a:lnB w="6350" cap="flat" cmpd="sng" algn="ctr">
+                      <a:solidFill>
+                        <a:srgbClr val="D3DBC7"/>
+                      </a:solidFill>
+                      <a:prstDash val="solid"/>
+                      <a:round/>
+                      <a:headEnd type="none" w="med" len="med"/>
+                      <a:tailEnd type="none" w="med" len="med"/>
+                    </a:lnB>
+                    <a:solidFill>
+                      <a:srgbClr val="EEF3E6"/>
+                    </a:solidFill>
+                  </a:tcPr>
+                </a:tc>
+              </a:tr>
+              <a:tr h="329184">
+                <a:tc>
+                  <a:txBody>
+                    <a:bodyPr/>
+                    <a:lstStyle/>
+                    <a:p>
+                      <a:pPr algn="l" indent="0" marL="0">
+                        <a:buNone/>
+                      </a:pPr>
+                      <a:r>
+                        <a:rPr lang="en-US" sz="1150" dirty="0">
+                          <a:solidFill>
+                            <a:srgbClr val="1B2A1C"/>
+                          </a:solidFill>
+                          <a:latin typeface="Calibri" pitchFamily="34" charset="0"/>
+                          <a:ea typeface="Calibri" pitchFamily="34" charset="-122"/>
+                          <a:cs typeface="Calibri" pitchFamily="34" charset="-120"/>
+                        </a:rPr>
+                        <a:t>КИПиА (приборы)</a:t>
+                      </a:r>
+                      <a:endParaRPr lang="en-US" sz="1150" dirty="0">
+                        <a:latin typeface="Calibri" charset="0"/>
+                        <a:ea typeface="Calibri" charset="0"/>
+                        <a:cs typeface="Calibri" charset="0"/>
+                      </a:endParaRPr>
+                    </a:p>
+                  </a:txBody>
+                  <a:tcPr marL="63500" marR="63500" marT="38100" marB="38100" anchor="ctr">
+                    <a:lnL w="6350" cap="flat" cmpd="sng" algn="ctr">
+                      <a:solidFill>
+                        <a:srgbClr val="D3DBC7"/>
+                      </a:solidFill>
+                      <a:prstDash val="solid"/>
+                      <a:round/>
+                      <a:headEnd type="none" w="med" len="med"/>
+                      <a:tailEnd type="none" w="med" len="med"/>
+                    </a:lnL>
+                    <a:lnR w="6350" cap="flat" cmpd="sng" algn="ctr">
+                      <a:solidFill>
+                        <a:srgbClr val="D3DBC7"/>
+                      </a:solidFill>
+                      <a:prstDash val="solid"/>
+                      <a:round/>
+                      <a:headEnd type="none" w="med" len="med"/>
+                      <a:tailEnd type="none" w="med" len="med"/>
+                    </a:lnR>
+                    <a:lnT w="6350" cap="flat" cmpd="sng" algn="ctr">
+                      <a:solidFill>
+                        <a:srgbClr val="D3DBC7"/>
+                      </a:solidFill>
+                      <a:prstDash val="solid"/>
+                      <a:round/>
+                      <a:headEnd type="none" w="med" len="med"/>
+                      <a:tailEnd type="none" w="med" len="med"/>
+                    </a:lnT>
+                    <a:lnB w="6350" cap="flat" cmpd="sng" algn="ctr">
+                      <a:solidFill>
+                        <a:srgbClr val="D3DBC7"/>
+                      </a:solidFill>
+                      <a:prstDash val="solid"/>
+                      <a:round/>
+                      <a:headEnd type="none" w="med" len="med"/>
+                      <a:tailEnd type="none" w="med" len="med"/>
+                    </a:lnB>
+                    <a:solidFill>
+                      <a:srgbClr val="FFFFFF"/>
+                    </a:solidFill>
+                  </a:tcPr>
+                </a:tc>
+                <a:tc>
+                  <a:txBody>
+                    <a:bodyPr/>
+                    <a:lstStyle/>
+                    <a:p>
+                      <a:pPr algn="r" indent="0" marL="0">
+                        <a:buNone/>
+                      </a:pPr>
+                      <a:r>
+                        <a:rPr lang="en-US" sz="1150" dirty="0">
+                          <a:solidFill>
+                            <a:srgbClr val="1B2A1C"/>
+                          </a:solidFill>
+                          <a:latin typeface="Calibri" pitchFamily="34" charset="0"/>
+                          <a:ea typeface="Calibri" pitchFamily="34" charset="-122"/>
+                          <a:cs typeface="Calibri" pitchFamily="34" charset="-120"/>
+                        </a:rPr>
+                        <a:t>66 342</a:t>
+                      </a:r>
+                      <a:endParaRPr lang="en-US" sz="1150" dirty="0">
+                        <a:latin typeface="Calibri" charset="0"/>
+                        <a:ea typeface="Calibri" charset="0"/>
+                        <a:cs typeface="Calibri" charset="0"/>
+                      </a:endParaRPr>
+                    </a:p>
+                  </a:txBody>
+                  <a:tcPr marL="63500" marR="63500" marT="38100" marB="38100" anchor="ctr">
+                    <a:lnL w="6350" cap="flat" cmpd="sng" algn="ctr">
+                      <a:solidFill>
+                        <a:srgbClr val="D3DBC7"/>
+                      </a:solidFill>
+                      <a:prstDash val="solid"/>
+                      <a:round/>
+                      <a:headEnd type="none" w="med" len="med"/>
+                      <a:tailEnd type="none" w="med" len="med"/>
+                    </a:lnL>
+                    <a:lnR w="6350" cap="flat" cmpd="sng" algn="ctr">
+                      <a:solidFill>
+                        <a:srgbClr val="D3DBC7"/>
+                      </a:solidFill>
+                      <a:prstDash val="solid"/>
+                      <a:round/>
+                      <a:headEnd type="none" w="med" len="med"/>
+                      <a:tailEnd type="none" w="med" len="med"/>
+                    </a:lnR>
+                    <a:lnT w="6350" cap="flat" cmpd="sng" algn="ctr">
+                      <a:solidFill>
+                        <a:srgbClr val="D3DBC7"/>
+                      </a:solidFill>
+                      <a:prstDash val="solid"/>
+                      <a:round/>
+                      <a:headEnd type="none" w="med" len="med"/>
+                      <a:tailEnd type="none" w="med" len="med"/>
+                    </a:lnT>
+                    <a:lnB w="6350" cap="flat" cmpd="sng" algn="ctr">
+                      <a:solidFill>
+                        <a:srgbClr val="D3DBC7"/>
+                      </a:solidFill>
+                      <a:prstDash val="solid"/>
+                      <a:round/>
+                      <a:headEnd type="none" w="med" len="med"/>
+                      <a:tailEnd type="none" w="med" len="med"/>
+                    </a:lnB>
+                    <a:solidFill>
+                      <a:srgbClr val="FFFFFF"/>
+                    </a:solidFill>
+                  </a:tcPr>
+                </a:tc>
+                <a:tc>
+                  <a:txBody>
+                    <a:bodyPr/>
+                    <a:lstStyle/>
+                    <a:p>
+                      <a:pPr algn="r" indent="0" marL="0">
+                        <a:buNone/>
+                      </a:pPr>
+                      <a:r>
+                        <a:rPr lang="en-US" sz="1150" dirty="0">
+                          <a:solidFill>
+                            <a:srgbClr val="1B2A1C"/>
+                          </a:solidFill>
+                          <a:latin typeface="Calibri" pitchFamily="34" charset="0"/>
+                          <a:ea typeface="Calibri" pitchFamily="34" charset="-122"/>
+                          <a:cs typeface="Calibri" pitchFamily="34" charset="-120"/>
+                        </a:rPr>
+                        <a:t>≈ 561 705</a:t>
+                      </a:r>
+                      <a:endParaRPr lang="en-US" sz="1150" dirty="0">
+                        <a:latin typeface="Calibri" charset="0"/>
+                        <a:ea typeface="Calibri" charset="0"/>
+                        <a:cs typeface="Calibri" charset="0"/>
+                      </a:endParaRPr>
+                    </a:p>
+                  </a:txBody>
+                  <a:tcPr marL="63500" marR="63500" marT="38100" marB="38100" anchor="ctr">
+                    <a:lnL w="6350" cap="flat" cmpd="sng" algn="ctr">
+                      <a:solidFill>
+                        <a:srgbClr val="D3DBC7"/>
+                      </a:solidFill>
+                      <a:prstDash val="solid"/>
+                      <a:round/>
+                      <a:headEnd type="none" w="med" len="med"/>
+                      <a:tailEnd type="none" w="med" len="med"/>
+                    </a:lnL>
+                    <a:lnR w="6350" cap="flat" cmpd="sng" algn="ctr">
+                      <a:solidFill>
+                        <a:srgbClr val="D3DBC7"/>
+                      </a:solidFill>
+                      <a:prstDash val="solid"/>
+                      <a:round/>
+                      <a:headEnd type="none" w="med" len="med"/>
+                      <a:tailEnd type="none" w="med" len="med"/>
+                    </a:lnR>
+                    <a:lnT w="6350" cap="flat" cmpd="sng" algn="ctr">
+                      <a:solidFill>
+                        <a:srgbClr val="D3DBC7"/>
+                      </a:solidFill>
+                      <a:prstDash val="solid"/>
+                      <a:round/>
+                      <a:headEnd type="none" w="med" len="med"/>
+                      <a:tailEnd type="none" w="med" len="med"/>
+                    </a:lnT>
+                    <a:lnB w="6350" cap="flat" cmpd="sng" algn="ctr">
+                      <a:solidFill>
+                        <a:srgbClr val="D3DBC7"/>
+                      </a:solidFill>
+                      <a:prstDash val="solid"/>
+                      <a:round/>
+                      <a:headEnd type="none" w="med" len="med"/>
+                      <a:tailEnd type="none" w="med" len="med"/>
+                    </a:lnB>
+                    <a:solidFill>
+                      <a:srgbClr val="FFFFFF"/>
+                    </a:solidFill>
+                  </a:tcPr>
+                </a:tc>
+                <a:tc>
+                  <a:txBody>
+                    <a:bodyPr/>
+                    <a:lstStyle/>
+                    <a:p>
+                      <a:pPr algn="r" indent="0" marL="0">
+                        <a:buNone/>
+                      </a:pPr>
+                      <a:r>
+                        <a:rPr lang="en-US" sz="1150" b="1" dirty="0">
+                          <a:solidFill>
+                            <a:srgbClr val="B57B00"/>
+                          </a:solidFill>
+                          <a:latin typeface="Calibri" pitchFamily="34" charset="0"/>
+                          <a:ea typeface="Calibri" pitchFamily="34" charset="-122"/>
+                          <a:cs typeface="Calibri" pitchFamily="34" charset="-120"/>
+                        </a:rPr>
+                        <a:t>×8,5</a:t>
+                      </a:r>
+                      <a:endParaRPr lang="en-US" sz="1150" dirty="0">
+                        <a:latin typeface="Calibri" charset="0"/>
+                        <a:ea typeface="Calibri" charset="0"/>
+                        <a:cs typeface="Calibri" charset="0"/>
+                      </a:endParaRPr>
+                    </a:p>
+                  </a:txBody>
+                  <a:tcPr marL="63500" marR="63500" marT="38100" marB="38100" anchor="ctr">
+                    <a:lnL w="6350" cap="flat" cmpd="sng" algn="ctr">
+                      <a:solidFill>
+                        <a:srgbClr val="D3DBC7"/>
+                      </a:solidFill>
+                      <a:prstDash val="solid"/>
+                      <a:round/>
+                      <a:headEnd type="none" w="med" len="med"/>
+                      <a:tailEnd type="none" w="med" len="med"/>
+                    </a:lnL>
+                    <a:lnR w="6350" cap="flat" cmpd="sng" algn="ctr">
+                      <a:solidFill>
+                        <a:srgbClr val="D3DBC7"/>
+                      </a:solidFill>
+                      <a:prstDash val="solid"/>
+                      <a:round/>
+                      <a:headEnd type="none" w="med" len="med"/>
+                      <a:tailEnd type="none" w="med" len="med"/>
+                    </a:lnR>
+                    <a:lnT w="6350" cap="flat" cmpd="sng" algn="ctr">
+                      <a:solidFill>
+                        <a:srgbClr val="D3DBC7"/>
+                      </a:solidFill>
+                      <a:prstDash val="solid"/>
+                      <a:round/>
+                      <a:headEnd type="none" w="med" len="med"/>
+                      <a:tailEnd type="none" w="med" len="med"/>
+                    </a:lnT>
+                    <a:lnB w="6350" cap="flat" cmpd="sng" algn="ctr">
+                      <a:solidFill>
+                        <a:srgbClr val="D3DBC7"/>
+                      </a:solidFill>
+                      <a:prstDash val="solid"/>
+                      <a:round/>
+                      <a:headEnd type="none" w="med" len="med"/>
+                      <a:tailEnd type="none" w="med" len="med"/>
+                    </a:lnB>
+                    <a:solidFill>
+                      <a:srgbClr val="FFFFFF"/>
+                    </a:solidFill>
+                  </a:tcPr>
+                </a:tc>
+              </a:tr>
+              <a:tr h="329184">
+                <a:tc>
+                  <a:txBody>
+                    <a:bodyPr/>
+                    <a:lstStyle/>
+                    <a:p>
+                      <a:pPr algn="l" indent="0" marL="0">
+                        <a:buNone/>
+                      </a:pPr>
+                      <a:r>
+                        <a:rPr lang="en-US" sz="1150" dirty="0">
+                          <a:solidFill>
+                            <a:srgbClr val="1B2A1C"/>
+                          </a:solidFill>
+                          <a:latin typeface="Calibri" pitchFamily="34" charset="0"/>
+                          <a:ea typeface="Calibri" pitchFamily="34" charset="-122"/>
+                          <a:cs typeface="Calibri" pitchFamily="34" charset="-120"/>
+                        </a:rPr>
+                        <a:t>Трубопроводы, трафо, СН/ВН</a:t>
+                      </a:r>
+                      <a:endParaRPr lang="en-US" sz="1150" dirty="0">
+                        <a:latin typeface="Calibri" charset="0"/>
+                        <a:ea typeface="Calibri" charset="0"/>
+                        <a:cs typeface="Calibri" charset="0"/>
+                      </a:endParaRPr>
+                    </a:p>
+                  </a:txBody>
+                  <a:tcPr marL="63500" marR="63500" marT="38100" marB="38100" anchor="ctr">
+                    <a:lnL w="6350" cap="flat" cmpd="sng" algn="ctr">
+                      <a:solidFill>
+                        <a:srgbClr val="D3DBC7"/>
+                      </a:solidFill>
+                      <a:prstDash val="solid"/>
+                      <a:round/>
+                      <a:headEnd type="none" w="med" len="med"/>
+                      <a:tailEnd type="none" w="med" len="med"/>
+                    </a:lnL>
+                    <a:lnR w="6350" cap="flat" cmpd="sng" algn="ctr">
+                      <a:solidFill>
+                        <a:srgbClr val="D3DBC7"/>
+                      </a:solidFill>
+                      <a:prstDash val="solid"/>
+                      <a:round/>
+                      <a:headEnd type="none" w="med" len="med"/>
+                      <a:tailEnd type="none" w="med" len="med"/>
+                    </a:lnR>
+                    <a:lnT w="6350" cap="flat" cmpd="sng" algn="ctr">
+                      <a:solidFill>
+                        <a:srgbClr val="D3DBC7"/>
+                      </a:solidFill>
+                      <a:prstDash val="solid"/>
+                      <a:round/>
+                      <a:headEnd type="none" w="med" len="med"/>
+                      <a:tailEnd type="none" w="med" len="med"/>
+                    </a:lnT>
+                    <a:lnB w="6350" cap="flat" cmpd="sng" algn="ctr">
+                      <a:solidFill>
+                        <a:srgbClr val="D3DBC7"/>
+                      </a:solidFill>
+                      <a:prstDash val="solid"/>
+                      <a:round/>
+                      <a:headEnd type="none" w="med" len="med"/>
+                      <a:tailEnd type="none" w="med" len="med"/>
+                    </a:lnB>
+                    <a:solidFill>
+                      <a:srgbClr val="EEF3E6"/>
+                    </a:solidFill>
+                  </a:tcPr>
+                </a:tc>
+                <a:tc>
+                  <a:txBody>
+                    <a:bodyPr/>
+                    <a:lstStyle/>
+                    <a:p>
+                      <a:pPr algn="r" indent="0" marL="0">
+                        <a:buNone/>
+                      </a:pPr>
+                      <a:r>
+                        <a:rPr lang="en-US" sz="1150" dirty="0">
+                          <a:solidFill>
+                            <a:srgbClr val="1B2A1C"/>
+                          </a:solidFill>
+                          <a:latin typeface="Calibri" pitchFamily="34" charset="0"/>
+                          <a:ea typeface="Calibri" pitchFamily="34" charset="-122"/>
+                          <a:cs typeface="Calibri" pitchFamily="34" charset="-120"/>
+                        </a:rPr>
+                        <a:t>~1 360 000</a:t>
+                      </a:r>
+                      <a:endParaRPr lang="en-US" sz="1150" dirty="0">
+                        <a:latin typeface="Calibri" charset="0"/>
+                        <a:ea typeface="Calibri" charset="0"/>
+                        <a:cs typeface="Calibri" charset="0"/>
+                      </a:endParaRPr>
+                    </a:p>
+                  </a:txBody>
+                  <a:tcPr marL="63500" marR="63500" marT="38100" marB="38100" anchor="ctr">
+                    <a:lnL w="6350" cap="flat" cmpd="sng" algn="ctr">
+                      <a:solidFill>
+                        <a:srgbClr val="D3DBC7"/>
+                      </a:solidFill>
+                      <a:prstDash val="solid"/>
+                      <a:round/>
+                      <a:headEnd type="none" w="med" len="med"/>
+                      <a:tailEnd type="none" w="med" len="med"/>
+                    </a:lnL>
+                    <a:lnR w="6350" cap="flat" cmpd="sng" algn="ctr">
+                      <a:solidFill>
+                        <a:srgbClr val="D3DBC7"/>
+                      </a:solidFill>
+                      <a:prstDash val="solid"/>
+                      <a:round/>
+                      <a:headEnd type="none" w="med" len="med"/>
+                      <a:tailEnd type="none" w="med" len="med"/>
+                    </a:lnR>
+                    <a:lnT w="6350" cap="flat" cmpd="sng" algn="ctr">
+                      <a:solidFill>
+                        <a:srgbClr val="D3DBC7"/>
+                      </a:solidFill>
+                      <a:prstDash val="solid"/>
+                      <a:round/>
+                      <a:headEnd type="none" w="med" len="med"/>
+                      <a:tailEnd type="none" w="med" len="med"/>
+                    </a:lnT>
+                    <a:lnB w="6350" cap="flat" cmpd="sng" algn="ctr">
+                      <a:solidFill>
+                        <a:srgbClr val="D3DBC7"/>
+                      </a:solidFill>
+                      <a:prstDash val="solid"/>
+                      <a:round/>
+                      <a:headEnd type="none" w="med" len="med"/>
+                      <a:tailEnd type="none" w="med" len="med"/>
+                    </a:lnB>
+                    <a:solidFill>
+                      <a:srgbClr val="EEF3E6"/>
+                    </a:solidFill>
+                  </a:tcPr>
+                </a:tc>
+                <a:tc>
+                  <a:txBody>
+                    <a:bodyPr/>
+                    <a:lstStyle/>
+                    <a:p>
+                      <a:pPr algn="r" indent="0" marL="0">
+                        <a:buNone/>
+                      </a:pPr>
+                      <a:r>
+                        <a:rPr lang="en-US" sz="1150" dirty="0">
+                          <a:solidFill>
+                            <a:srgbClr val="5B6B5C"/>
+                          </a:solidFill>
+                          <a:latin typeface="Calibri" pitchFamily="34" charset="0"/>
+                          <a:ea typeface="Calibri" pitchFamily="34" charset="-122"/>
+                          <a:cs typeface="Calibri" pitchFamily="34" charset="-120"/>
+                        </a:rPr>
+                        <a:t>— (нет в 2026)</a:t>
+                      </a:r>
+                      <a:endParaRPr lang="en-US" sz="1150" dirty="0">
+                        <a:latin typeface="Calibri" charset="0"/>
+                        <a:ea typeface="Calibri" charset="0"/>
+                        <a:cs typeface="Calibri" charset="0"/>
+                      </a:endParaRPr>
+                    </a:p>
+                  </a:txBody>
+                  <a:tcPr marL="63500" marR="63500" marT="38100" marB="38100" anchor="ctr">
+                    <a:lnL w="6350" cap="flat" cmpd="sng" algn="ctr">
+                      <a:solidFill>
+                        <a:srgbClr val="D3DBC7"/>
+                      </a:solidFill>
+                      <a:prstDash val="solid"/>
+                      <a:round/>
+                      <a:headEnd type="none" w="med" len="med"/>
+                      <a:tailEnd type="none" w="med" len="med"/>
+                    </a:lnL>
+                    <a:lnR w="6350" cap="flat" cmpd="sng" algn="ctr">
+                      <a:solidFill>
+                        <a:srgbClr val="D3DBC7"/>
+                      </a:solidFill>
+                      <a:prstDash val="solid"/>
+                      <a:round/>
+                      <a:headEnd type="none" w="med" len="med"/>
+                      <a:tailEnd type="none" w="med" len="med"/>
+                    </a:lnR>
+                    <a:lnT w="6350" cap="flat" cmpd="sng" algn="ctr">
+                      <a:solidFill>
+                        <a:srgbClr val="D3DBC7"/>
+                      </a:solidFill>
+                      <a:prstDash val="solid"/>
+                      <a:round/>
+                      <a:headEnd type="none" w="med" len="med"/>
+                      <a:tailEnd type="none" w="med" len="med"/>
+                    </a:lnT>
+                    <a:lnB w="6350" cap="flat" cmpd="sng" algn="ctr">
+                      <a:solidFill>
+                        <a:srgbClr val="D3DBC7"/>
+                      </a:solidFill>
+                      <a:prstDash val="solid"/>
+                      <a:round/>
+                      <a:headEnd type="none" w="med" len="med"/>
+                      <a:tailEnd type="none" w="med" len="med"/>
+                    </a:lnB>
+                    <a:solidFill>
+                      <a:srgbClr val="EEF3E6"/>
+                    </a:solidFill>
+                  </a:tcPr>
+                </a:tc>
+                <a:tc>
+                  <a:txBody>
+                    <a:bodyPr/>
+                    <a:lstStyle/>
+                    <a:p>
+                      <a:pPr algn="r" indent="0" marL="0">
+                        <a:buNone/>
+                      </a:pPr>
+                      <a:r>
+                        <a:rPr lang="en-US" sz="1150" dirty="0">
+                          <a:solidFill>
+                            <a:srgbClr val="5B6B5C"/>
+                          </a:solidFill>
+                          <a:latin typeface="Calibri" pitchFamily="34" charset="0"/>
+                          <a:ea typeface="Calibri" pitchFamily="34" charset="-122"/>
+                          <a:cs typeface="Calibri" pitchFamily="34" charset="-120"/>
+                        </a:rPr>
+                        <a:t>—</a:t>
+                      </a:r>
+                      <a:endParaRPr lang="en-US" sz="1150" dirty="0">
+                        <a:latin typeface="Calibri" charset="0"/>
+                        <a:ea typeface="Calibri" charset="0"/>
+                        <a:cs typeface="Calibri" charset="0"/>
+                      </a:endParaRPr>
+                    </a:p>
+                  </a:txBody>
+                  <a:tcPr marL="63500" marR="63500" marT="38100" marB="38100" anchor="ctr">
+                    <a:lnL w="6350" cap="flat" cmpd="sng" algn="ctr">
+                      <a:solidFill>
+                        <a:srgbClr val="D3DBC7"/>
+                      </a:solidFill>
+                      <a:prstDash val="solid"/>
+                      <a:round/>
+                      <a:headEnd type="none" w="med" len="med"/>
+                      <a:tailEnd type="none" w="med" len="med"/>
+                    </a:lnL>
+                    <a:lnR w="6350" cap="flat" cmpd="sng" algn="ctr">
+                      <a:solidFill>
+                        <a:srgbClr val="D3DBC7"/>
+                      </a:solidFill>
+                      <a:prstDash val="solid"/>
+                      <a:round/>
+                      <a:headEnd type="none" w="med" len="med"/>
+                      <a:tailEnd type="none" w="med" len="med"/>
+                    </a:lnR>
+                    <a:lnT w="6350" cap="flat" cmpd="sng" algn="ctr">
+                      <a:solidFill>
+                        <a:srgbClr val="D3DBC7"/>
+                      </a:solidFill>
+                      <a:prstDash val="solid"/>
+                      <a:round/>
+                      <a:headEnd type="none" w="med" len="med"/>
+                      <a:tailEnd type="none" w="med" len="med"/>
+                    </a:lnT>
+                    <a:lnB w="6350" cap="flat" cmpd="sng" algn="ctr">
+                      <a:solidFill>
+                        <a:srgbClr val="D3DBC7"/>
+                      </a:solidFill>
+                      <a:prstDash val="solid"/>
+                      <a:round/>
+                      <a:headEnd type="none" w="med" len="med"/>
+                      <a:tailEnd type="none" w="med" len="med"/>
+                    </a:lnB>
+                    <a:solidFill>
+                      <a:srgbClr val="EEF3E6"/>
+                    </a:solidFill>
+                  </a:tcPr>
+                </a:tc>
+              </a:tr>
+              <a:tr h="329184">
+                <a:tc>
+                  <a:txBody>
+                    <a:bodyPr/>
+                    <a:lstStyle/>
+                    <a:p>
+                      <a:pPr algn="l" indent="0" marL="0">
+                        <a:buNone/>
+                      </a:pPr>
+                      <a:r>
+                        <a:rPr lang="en-US" sz="1150" b="1" dirty="0">
+                          <a:solidFill>
+                            <a:srgbClr val="1B2A1C"/>
+                          </a:solidFill>
+                          <a:latin typeface="Calibri" pitchFamily="34" charset="0"/>
+                          <a:ea typeface="Calibri" pitchFamily="34" charset="-122"/>
+                          <a:cs typeface="Calibri" pitchFamily="34" charset="-120"/>
+                        </a:rPr>
+                        <a:t>Сравнимый пакет (обор.+клапаны+КИП)</a:t>
+                      </a:r>
+                      <a:endParaRPr lang="en-US" sz="1150" dirty="0">
+                        <a:latin typeface="Calibri" charset="0"/>
+                        <a:ea typeface="Calibri" charset="0"/>
+                        <a:cs typeface="Calibri" charset="0"/>
+                      </a:endParaRPr>
+                    </a:p>
+                  </a:txBody>
+                  <a:tcPr marL="63500" marR="63500" marT="38100" marB="38100" anchor="ctr">
+                    <a:lnL w="6350" cap="flat" cmpd="sng" algn="ctr">
+                      <a:solidFill>
+                        <a:srgbClr val="D3DBC7"/>
+                      </a:solidFill>
+                      <a:prstDash val="solid"/>
+                      <a:round/>
+                      <a:headEnd type="none" w="med" len="med"/>
+                      <a:tailEnd type="none" w="med" len="med"/>
+                    </a:lnL>
+                    <a:lnR w="6350" cap="flat" cmpd="sng" algn="ctr">
+                      <a:solidFill>
+                        <a:srgbClr val="D3DBC7"/>
+                      </a:solidFill>
+                      <a:prstDash val="solid"/>
+                      <a:round/>
+                      <a:headEnd type="none" w="med" len="med"/>
+                      <a:tailEnd type="none" w="med" len="med"/>
+                    </a:lnR>
+                    <a:lnT w="6350" cap="flat" cmpd="sng" algn="ctr">
+                      <a:solidFill>
+                        <a:srgbClr val="D3DBC7"/>
+                      </a:solidFill>
+                      <a:prstDash val="solid"/>
+                      <a:round/>
+                      <a:headEnd type="none" w="med" len="med"/>
+                      <a:tailEnd type="none" w="med" len="med"/>
+                    </a:lnT>
+                    <a:lnB w="6350" cap="flat" cmpd="sng" algn="ctr">
+                      <a:solidFill>
+                        <a:srgbClr val="D3DBC7"/>
+                      </a:solidFill>
+                      <a:prstDash val="solid"/>
+                      <a:round/>
+                      <a:headEnd type="none" w="med" len="med"/>
+                      <a:tailEnd type="none" w="med" len="med"/>
+                    </a:lnB>
+                    <a:solidFill>
+                      <a:srgbClr val="97BC62"/>
+                    </a:solidFill>
+                  </a:tcPr>
+                </a:tc>
+                <a:tc>
+                  <a:txBody>
+                    <a:bodyPr/>
+                    <a:lstStyle/>
+                    <a:p>
+                      <a:pPr algn="r" indent="0" marL="0">
+                        <a:buNone/>
+                      </a:pPr>
+                      <a:r>
+                        <a:rPr lang="en-US" sz="1150" b="1" dirty="0">
+                          <a:solidFill>
+                            <a:srgbClr val="1B2A1C"/>
+                          </a:solidFill>
+                          <a:latin typeface="Calibri" pitchFamily="34" charset="0"/>
+                          <a:ea typeface="Calibri" pitchFamily="34" charset="-122"/>
+                          <a:cs typeface="Calibri" pitchFamily="34" charset="-120"/>
+                        </a:rPr>
+                        <a:t>~10 690 000</a:t>
+                      </a:r>
+                      <a:endParaRPr lang="en-US" sz="1150" dirty="0">
+                        <a:latin typeface="Calibri" charset="0"/>
+                        <a:ea typeface="Calibri" charset="0"/>
+                        <a:cs typeface="Calibri" charset="0"/>
+                      </a:endParaRPr>
+                    </a:p>
+                  </a:txBody>
+                  <a:tcPr marL="63500" marR="63500" marT="38100" marB="38100" anchor="ctr">
+                    <a:lnL w="6350" cap="flat" cmpd="sng" algn="ctr">
+                      <a:solidFill>
+                        <a:srgbClr val="D3DBC7"/>
+                      </a:solidFill>
+                      <a:prstDash val="solid"/>
+                      <a:round/>
+                      <a:headEnd type="none" w="med" len="med"/>
+                      <a:tailEnd type="none" w="med" len="med"/>
+                    </a:lnL>
+                    <a:lnR w="6350" cap="flat" cmpd="sng" algn="ctr">
+                      <a:solidFill>
+                        <a:srgbClr val="D3DBC7"/>
+                      </a:solidFill>
+                      <a:prstDash val="solid"/>
+                      <a:round/>
+                      <a:headEnd type="none" w="med" len="med"/>
+                      <a:tailEnd type="none" w="med" len="med"/>
+                    </a:lnR>
+                    <a:lnT w="6350" cap="flat" cmpd="sng" algn="ctr">
+                      <a:solidFill>
+                        <a:srgbClr val="D3DBC7"/>
+                      </a:solidFill>
+                      <a:prstDash val="solid"/>
+                      <a:round/>
+                      <a:headEnd type="none" w="med" len="med"/>
+                      <a:tailEnd type="none" w="med" len="med"/>
+                    </a:lnT>
+                    <a:lnB w="6350" cap="flat" cmpd="sng" algn="ctr">
+                      <a:solidFill>
+                        <a:srgbClr val="D3DBC7"/>
+                      </a:solidFill>
+                      <a:prstDash val="solid"/>
+                      <a:round/>
+                      <a:headEnd type="none" w="med" len="med"/>
+                      <a:tailEnd type="none" w="med" len="med"/>
+                    </a:lnB>
+                    <a:solidFill>
+                      <a:srgbClr val="97BC62"/>
+                    </a:solidFill>
+                  </a:tcPr>
+                </a:tc>
+                <a:tc>
+                  <a:txBody>
+                    <a:bodyPr/>
+                    <a:lstStyle/>
+                    <a:p>
+                      <a:pPr algn="r" indent="0" marL="0">
+                        <a:buNone/>
+                      </a:pPr>
+                      <a:r>
+                        <a:rPr lang="en-US" sz="1150" b="1" dirty="0">
+                          <a:solidFill>
+                            <a:srgbClr val="1B2A1C"/>
+                          </a:solidFill>
+                          <a:latin typeface="Calibri" pitchFamily="34" charset="0"/>
+                          <a:ea typeface="Calibri" pitchFamily="34" charset="-122"/>
+                          <a:cs typeface="Calibri" pitchFamily="34" charset="-120"/>
+                        </a:rPr>
+                        <a:t>≈ 13 032 791</a:t>
+                      </a:r>
+                      <a:endParaRPr lang="en-US" sz="1150" dirty="0">
+                        <a:latin typeface="Calibri" charset="0"/>
+                        <a:ea typeface="Calibri" charset="0"/>
+                        <a:cs typeface="Calibri" charset="0"/>
+                      </a:endParaRPr>
+                    </a:p>
+                  </a:txBody>
+                  <a:tcPr marL="63500" marR="63500" marT="38100" marB="38100" anchor="ctr">
+                    <a:lnL w="6350" cap="flat" cmpd="sng" algn="ctr">
+                      <a:solidFill>
+                        <a:srgbClr val="D3DBC7"/>
+                      </a:solidFill>
+                      <a:prstDash val="solid"/>
+                      <a:round/>
+                      <a:headEnd type="none" w="med" len="med"/>
+                      <a:tailEnd type="none" w="med" len="med"/>
+                    </a:lnL>
+                    <a:lnR w="6350" cap="flat" cmpd="sng" algn="ctr">
+                      <a:solidFill>
+                        <a:srgbClr val="D3DBC7"/>
+                      </a:solidFill>
+                      <a:prstDash val="solid"/>
+                      <a:round/>
+                      <a:headEnd type="none" w="med" len="med"/>
+                      <a:tailEnd type="none" w="med" len="med"/>
+                    </a:lnR>
+                    <a:lnT w="6350" cap="flat" cmpd="sng" algn="ctr">
+                      <a:solidFill>
+                        <a:srgbClr val="D3DBC7"/>
+                      </a:solidFill>
+                      <a:prstDash val="solid"/>
+                      <a:round/>
+                      <a:headEnd type="none" w="med" len="med"/>
+                      <a:tailEnd type="none" w="med" len="med"/>
+                    </a:lnT>
+                    <a:lnB w="6350" cap="flat" cmpd="sng" algn="ctr">
+                      <a:solidFill>
+                        <a:srgbClr val="D3DBC7"/>
+                      </a:solidFill>
+                      <a:prstDash val="solid"/>
+                      <a:round/>
+                      <a:headEnd type="none" w="med" len="med"/>
+                      <a:tailEnd type="none" w="med" len="med"/>
+                    </a:lnB>
+                    <a:solidFill>
+                      <a:srgbClr val="97BC62"/>
+                    </a:solidFill>
+                  </a:tcPr>
+                </a:tc>
+                <a:tc>
+                  <a:txBody>
+                    <a:bodyPr/>
+                    <a:lstStyle/>
+                    <a:p>
+                      <a:pPr algn="r" indent="0" marL="0">
+                        <a:buNone/>
+                      </a:pPr>
+                      <a:r>
+                        <a:rPr lang="en-US" sz="1150" b="1" dirty="0">
+                          <a:solidFill>
+                            <a:srgbClr val="1B2A1C"/>
+                          </a:solidFill>
+                          <a:latin typeface="Calibri" pitchFamily="34" charset="0"/>
+                          <a:ea typeface="Calibri" pitchFamily="34" charset="-122"/>
+                          <a:cs typeface="Calibri" pitchFamily="34" charset="-120"/>
+                        </a:rPr>
+                        <a:t>+22%</a:t>
+                      </a:r>
+                      <a:endParaRPr lang="en-US" sz="1150" dirty="0">
+                        <a:latin typeface="Calibri" charset="0"/>
+                        <a:ea typeface="Calibri" charset="0"/>
+                        <a:cs typeface="Calibri" charset="0"/>
+                      </a:endParaRPr>
+                    </a:p>
+                  </a:txBody>
+                  <a:tcPr marL="63500" marR="63500" marT="38100" marB="38100" anchor="ctr">
+                    <a:lnL w="6350" cap="flat" cmpd="sng" algn="ctr">
+                      <a:solidFill>
+                        <a:srgbClr val="D3DBC7"/>
+                      </a:solidFill>
+                      <a:prstDash val="solid"/>
+                      <a:round/>
+                      <a:headEnd type="none" w="med" len="med"/>
+                      <a:tailEnd type="none" w="med" len="med"/>
+                    </a:lnL>
+                    <a:lnR w="6350" cap="flat" cmpd="sng" algn="ctr">
+                      <a:solidFill>
+                        <a:srgbClr val="D3DBC7"/>
+                      </a:solidFill>
+                      <a:prstDash val="solid"/>
+                      <a:round/>
+                      <a:headEnd type="none" w="med" len="med"/>
+                      <a:tailEnd type="none" w="med" len="med"/>
+                    </a:lnR>
+                    <a:lnT w="6350" cap="flat" cmpd="sng" algn="ctr">
+                      <a:solidFill>
+                        <a:srgbClr val="D3DBC7"/>
+                      </a:solidFill>
+                      <a:prstDash val="solid"/>
+                      <a:round/>
+                      <a:headEnd type="none" w="med" len="med"/>
+                      <a:tailEnd type="none" w="med" len="med"/>
+                    </a:lnT>
+                    <a:lnB w="6350" cap="flat" cmpd="sng" algn="ctr">
+                      <a:solidFill>
+                        <a:srgbClr val="D3DBC7"/>
+                      </a:solidFill>
+                      <a:prstDash val="solid"/>
+                      <a:round/>
+                      <a:headEnd type="none" w="med" len="med"/>
+                      <a:tailEnd type="none" w="med" len="med"/>
+                    </a:lnB>
+                    <a:solidFill>
+                      <a:srgbClr val="97BC62"/>
+                    </a:solidFill>
+                  </a:tcPr>
+                </a:tc>
+              </a:tr>
+            </a:tbl>
+          </a:graphicData>
+        </a:graphic>
+      </p:graphicFrame>
+      <p:sp>
+        <p:nvSpPr>
+          <p:cNvPr id="17" name="Shape 14"/>
+          <p:cNvSpPr/>
+          <p:nvPr/>
+        </p:nvSpPr>
+        <p:spPr>
+          <a:xfrm>
+            <a:off x="594360" y="5166360"/>
+            <a:ext cx="10972800" cy="1234440"/>
+          </a:xfrm>
+          <a:prstGeom prst="roundRect">
+            <a:avLst>
+              <a:gd name="adj" fmla="val 5926"/>
+            </a:avLst>
+          </a:prstGeom>
+          <a:solidFill>
+            <a:srgbClr val="F4F6F0"/>
+          </a:solidFill>
+          <a:ln/>
+        </p:spPr>
+      </p:sp>
+      <p:sp>
+        <p:nvSpPr>
+          <p:cNvPr id="18" name="Text 15"/>
+          <p:cNvSpPr/>
+          <p:nvPr/>
+        </p:nvSpPr>
+        <p:spPr>
+          <a:xfrm>
+            <a:off x="868680" y="5303520"/>
+            <a:ext cx="10424160" cy="960120"/>
+          </a:xfrm>
+          <a:prstGeom prst="rect">
+            <a:avLst/>
+          </a:prstGeom>
+          <a:noFill/>
+          <a:ln/>
+        </p:spPr>
+        <p:txBody>
+          <a:bodyPr wrap="square" lIns="0" tIns="0" rIns="0" bIns="0" rtlCol="0" anchor="ctr"/>
+          <a:lstStyle/>
+          <a:p>
+            <a:pPr indent="0" marL="0">
+              <a:lnSpc>
+                <a:spcPct val="112000"/>
+              </a:lnSpc>
+              <a:buNone/>
+            </a:pPr>
+            <a:r>
+              <a:rPr lang="en-US" sz="1250" b="1" dirty="0">
+                <a:solidFill>
+                  <a:srgbClr val="2C5F2D"/>
+                </a:solidFill>
+                <a:latin typeface="Calibri" pitchFamily="34" charset="0"/>
+                <a:ea typeface="Calibri" pitchFamily="34" charset="-122"/>
+                <a:cs typeface="Calibri" pitchFamily="34" charset="-120"/>
+              </a:rPr>
+              <a:t>Ключевое:  </a:t>
+            </a:r>
+            <a:pPr indent="0" marL="0">
+              <a:lnSpc>
+                <a:spcPct val="112000"/>
+              </a:lnSpc>
+              <a:buNone/>
+            </a:pPr>
+            <a:r>
+              <a:rPr lang="en-US" sz="1250" dirty="0">
+                <a:solidFill>
+                  <a:srgbClr val="1B2A1C"/>
+                </a:solidFill>
+                <a:latin typeface="Calibri" pitchFamily="34" charset="0"/>
+                <a:ea typeface="Calibri" pitchFamily="34" charset="-122"/>
+                <a:cs typeface="Calibri" pitchFamily="34" charset="-120"/>
+              </a:rPr>
+              <a:t>оборудование +16% (инфляция по «железу»); КИПиА выросли кратно — не цена, а резко расширенный объём (509 приборов против укрупнённых категорий 2024). </a:t>
+            </a:r>
+            <a:pPr indent="0" marL="0">
+              <a:lnSpc>
+                <a:spcPct val="112000"/>
+              </a:lnSpc>
+              <a:buNone/>
+            </a:pPr>
+            <a:r>
+              <a:rPr lang="en-US" sz="1250" b="1" dirty="0">
+                <a:solidFill>
+                  <a:srgbClr val="B57B00"/>
+                </a:solidFill>
+                <a:latin typeface="Calibri" pitchFamily="34" charset="0"/>
+                <a:ea typeface="Calibri" pitchFamily="34" charset="-122"/>
+                <a:cs typeface="Calibri" pitchFamily="34" charset="-120"/>
+              </a:rPr>
+              <a:t>Рекомендация: </a:t>
+            </a:r>
+            <a:pPr indent="0" marL="0">
+              <a:lnSpc>
+                <a:spcPct val="112000"/>
+              </a:lnSpc>
+              <a:buNone/>
+            </a:pPr>
+            <a:r>
+              <a:rPr lang="en-US" sz="1250" dirty="0">
+                <a:solidFill>
+                  <a:srgbClr val="1B2A1C"/>
+                </a:solidFill>
+                <a:latin typeface="Calibri" pitchFamily="34" charset="0"/>
+                <a:ea typeface="Calibri" pitchFamily="34" charset="-122"/>
+                <a:cs typeface="Calibri" pitchFamily="34" charset="-120"/>
+              </a:rPr>
+              <a:t>собрать «CAPEX-2026» = структура ТЭО-2024 + цены 2026 + расценка электрики. Итог будет заметно выше $40,7 млн.</a:t>
+            </a:r>
+            <a:endParaRPr lang="en-US" sz="1250" dirty="0"/>
+          </a:p>
+        </p:txBody>
+      </p:sp>
+    </p:spTree>
+  </p:cSld>
+  <p:clrMapOvr>
+    <a:masterClrMapping/>
+  </p:clrMapOvr>
+</p:sld>
+</file>
+
+<file path=ppt/slides/slide11.xml><?xml version="1.0" encoding="utf-8"?>
+<p:sld xmlns:a="http://schemas.openxmlformats.org/drawingml/2006/main" xmlns:r="http://schemas.openxmlformats.org/officeDocument/2006/relationships" xmlns:p="http://schemas.openxmlformats.org/presentationml/2006/main">
+  <p:cSld name="Slide 11">
+    <p:bg>
+      <p:bgPr>
+        <a:solidFill>
+          <a:srgbClr val="FFFFFF"/>
+        </a:solidFill>
+      </p:bgPr>
+    </p:bg>
+    <p:spTree>
+      <p:nvGrpSpPr>
+        <p:cNvPr id="1" name=""/>
+        <p:cNvGrpSpPr/>
+        <p:nvPr/>
+      </p:nvGrpSpPr>
+      <p:grpSpPr>
+        <a:xfrm>
+          <a:off x="0" y="0"/>
+          <a:ext cx="0" cy="0"/>
+          <a:chOff x="0" y="0"/>
+          <a:chExt cx="0" cy="0"/>
+        </a:xfrm>
+      </p:grpSpPr>
+      <p:sp>
+        <p:nvSpPr>
+          <p:cNvPr id="2" name="Text 0"/>
+          <p:cNvSpPr/>
+          <p:nvPr/>
+        </p:nvSpPr>
+        <p:spPr>
+          <a:xfrm>
+            <a:off x="640080" y="502920"/>
+            <a:ext cx="5486400" cy="274320"/>
+          </a:xfrm>
+          <a:prstGeom prst="rect">
+            <a:avLst/>
+          </a:prstGeom>
+          <a:noFill/>
+          <a:ln/>
+        </p:spPr>
+        <p:txBody>
+          <a:bodyPr wrap="square" lIns="0" tIns="0" rIns="0" bIns="0" rtlCol="0" anchor="ctr"/>
+          <a:lstStyle/>
+          <a:p>
+            <a:pPr algn="l" indent="0" marL="0">
+              <a:buNone/>
+            </a:pPr>
+            <a:r>
+              <a:rPr lang="en-US" sz="1100" b="1" spc="200" kern="0" dirty="0">
+                <a:solidFill>
+                  <a:srgbClr val="E8A317"/>
+                </a:solidFill>
+                <a:latin typeface="Calibri" pitchFamily="34" charset="0"/>
+                <a:ea typeface="Calibri" pitchFamily="34" charset="-122"/>
+                <a:cs typeface="Calibri" pitchFamily="34" charset="-120"/>
+              </a:rPr>
+              <a:t>ПЛАН ДЕЙСТВИЙ</a:t>
+            </a:r>
+            <a:endParaRPr lang="en-US" sz="1100" dirty="0"/>
+          </a:p>
+        </p:txBody>
+      </p:sp>
+      <p:sp>
+        <p:nvSpPr>
+          <p:cNvPr id="3" name="Text 1"/>
+          <p:cNvSpPr/>
+          <p:nvPr/>
+        </p:nvSpPr>
+        <p:spPr>
+          <a:xfrm>
+            <a:off x="594360" y="822960"/>
+            <a:ext cx="10972800" cy="640080"/>
+          </a:xfrm>
+          <a:prstGeom prst="rect">
+            <a:avLst/>
+          </a:prstGeom>
+          <a:noFill/>
+          <a:ln/>
+        </p:spPr>
+        <p:txBody>
+          <a:bodyPr wrap="square" lIns="0" tIns="0" rIns="0" bIns="0" rtlCol="0" anchor="ctr"/>
+          <a:lstStyle/>
+          <a:p>
+            <a:pPr indent="0" marL="0">
+              <a:buNone/>
+            </a:pPr>
+            <a:r>
+              <a:rPr lang="en-US" sz="3000" b="1" dirty="0">
+                <a:solidFill>
+                  <a:srgbClr val="1B2A1C"/>
+                </a:solidFill>
+                <a:latin typeface="Cambria" pitchFamily="34" charset="0"/>
+                <a:ea typeface="Cambria" pitchFamily="34" charset="-122"/>
+                <a:cs typeface="Cambria" pitchFamily="34" charset="-120"/>
+              </a:rPr>
+              <a:t>Что закрыть до подачи в ФРП / БРК / БВУ</a:t>
+            </a:r>
+            <a:endParaRPr lang="en-US" sz="3000" dirty="0"/>
+          </a:p>
+        </p:txBody>
+      </p:sp>
+      <p:sp>
+        <p:nvSpPr>
+          <p:cNvPr id="4" name="Shape 2"/>
+          <p:cNvSpPr/>
+          <p:nvPr/>
+        </p:nvSpPr>
+        <p:spPr>
+          <a:xfrm>
+            <a:off x="731520" y="1737360"/>
+            <a:ext cx="566928" cy="566928"/>
+          </a:xfrm>
+          <a:prstGeom prst="ellipse">
+            <a:avLst/>
+          </a:prstGeom>
+          <a:solidFill>
+            <a:srgbClr val="E8A317"/>
+          </a:solidFill>
+          <a:ln/>
+        </p:spPr>
+      </p:sp>
+      <p:sp>
+        <p:nvSpPr>
+          <p:cNvPr id="5" name="Text 3"/>
+          <p:cNvSpPr/>
+          <p:nvPr/>
+        </p:nvSpPr>
+        <p:spPr>
+          <a:xfrm>
+            <a:off x="731520" y="1737360"/>
+            <a:ext cx="566928" cy="566928"/>
+          </a:xfrm>
+          <a:prstGeom prst="rect">
+            <a:avLst/>
+          </a:prstGeom>
+          <a:noFill/>
+          <a:ln/>
+        </p:spPr>
+        <p:txBody>
+          <a:bodyPr wrap="square" lIns="0" tIns="0" rIns="0" bIns="0" rtlCol="0" anchor="ctr"/>
+          <a:lstStyle/>
+          <a:p>
+            <a:pPr algn="ctr" indent="0" marL="0">
+              <a:buNone/>
+            </a:pPr>
+            <a:r>
+              <a:rPr lang="en-US" sz="2400" b="1" dirty="0">
+                <a:solidFill>
+                  <a:srgbClr val="FFFFFF"/>
+                </a:solidFill>
+                <a:latin typeface="Cambria" pitchFamily="34" charset="0"/>
+                <a:ea typeface="Cambria" pitchFamily="34" charset="-122"/>
+                <a:cs typeface="Cambria" pitchFamily="34" charset="-120"/>
+              </a:rPr>
+              <a:t>1</a:t>
+            </a:r>
+            <a:endParaRPr lang="en-US" sz="2400" dirty="0"/>
+          </a:p>
+        </p:txBody>
+      </p:sp>
+      <p:sp>
+        <p:nvSpPr>
+          <p:cNvPr id="6" name="Text 4"/>
+          <p:cNvSpPr/>
+          <p:nvPr/>
+        </p:nvSpPr>
+        <p:spPr>
+          <a:xfrm>
+            <a:off x="1554480" y="1719072"/>
+            <a:ext cx="9966960" cy="365760"/>
+          </a:xfrm>
+          <a:prstGeom prst="rect">
+            <a:avLst/>
+          </a:prstGeom>
+          <a:noFill/>
+          <a:ln/>
+        </p:spPr>
+        <p:txBody>
+          <a:bodyPr wrap="square" lIns="0" tIns="0" rIns="0" bIns="0" rtlCol="0" anchor="ctr"/>
+          <a:lstStyle/>
+          <a:p>
+            <a:pPr indent="0" marL="0">
+              <a:buNone/>
+            </a:pPr>
+            <a:r>
+              <a:rPr lang="en-US" sz="1700" b="1" dirty="0">
+                <a:solidFill>
+                  <a:srgbClr val="1B2A1C"/>
+                </a:solidFill>
+                <a:latin typeface="Calibri" pitchFamily="34" charset="0"/>
+                <a:ea typeface="Calibri" pitchFamily="34" charset="-122"/>
+                <a:cs typeface="Calibri" pitchFamily="34" charset="-120"/>
+              </a:rPr>
+              <a:t>Расценить электромонтаж</a:t>
+            </a:r>
+            <a:endParaRPr lang="en-US" sz="1700" dirty="0"/>
+          </a:p>
+        </p:txBody>
+      </p:sp>
+      <p:sp>
+        <p:nvSpPr>
+          <p:cNvPr id="7" name="Text 5"/>
+          <p:cNvSpPr/>
+          <p:nvPr/>
+        </p:nvSpPr>
+        <p:spPr>
+          <a:xfrm>
+            <a:off x="1554480" y="2057400"/>
+            <a:ext cx="9966960" cy="365760"/>
+          </a:xfrm>
+          <a:prstGeom prst="rect">
+            <a:avLst/>
+          </a:prstGeom>
+          <a:noFill/>
+          <a:ln/>
+        </p:spPr>
+        <p:txBody>
+          <a:bodyPr wrap="square" lIns="0" tIns="0" rIns="0" bIns="0" rtlCol="0" anchor="ctr"/>
+          <a:lstStyle/>
+          <a:p>
+            <a:pPr indent="0" marL="0">
+              <a:buNone/>
+            </a:pPr>
+            <a:r>
+              <a:rPr lang="en-US" sz="1300" dirty="0">
+                <a:solidFill>
+                  <a:srgbClr val="5B6B5C"/>
+                </a:solidFill>
+                <a:latin typeface="Calibri" pitchFamily="34" charset="0"/>
+                <a:ea typeface="Calibri" pitchFamily="34" charset="-122"/>
+                <a:cs typeface="Calibri" pitchFamily="34" charset="-120"/>
+              </a:rPr>
+              <a:t>Заполнить BOQ (6 фаз, ~409 позиций) — сейчас нулевая строка в бюджете</a:t>
+            </a:r>
+            <a:endParaRPr lang="en-US" sz="1300" dirty="0"/>
+          </a:p>
+        </p:txBody>
+      </p:sp>
+      <p:sp>
+        <p:nvSpPr>
+          <p:cNvPr id="8" name="Shape 6"/>
+          <p:cNvSpPr/>
+          <p:nvPr/>
+        </p:nvSpPr>
+        <p:spPr>
+          <a:xfrm>
+            <a:off x="731520" y="2670048"/>
+            <a:ext cx="566928" cy="566928"/>
+          </a:xfrm>
+          <a:prstGeom prst="ellipse">
+            <a:avLst/>
+          </a:prstGeom>
+          <a:solidFill>
+            <a:srgbClr val="2C5F2D"/>
+          </a:solidFill>
+          <a:ln/>
+        </p:spPr>
+      </p:sp>
+      <p:sp>
+        <p:nvSpPr>
+          <p:cNvPr id="9" name="Text 7"/>
+          <p:cNvSpPr/>
+          <p:nvPr/>
+        </p:nvSpPr>
+        <p:spPr>
+          <a:xfrm>
+            <a:off x="731520" y="2670048"/>
+            <a:ext cx="566928" cy="566928"/>
+          </a:xfrm>
+          <a:prstGeom prst="rect">
+            <a:avLst/>
+          </a:prstGeom>
+          <a:noFill/>
+          <a:ln/>
+        </p:spPr>
+        <p:txBody>
+          <a:bodyPr wrap="square" lIns="0" tIns="0" rIns="0" bIns="0" rtlCol="0" anchor="ctr"/>
+          <a:lstStyle/>
+          <a:p>
+            <a:pPr algn="ctr" indent="0" marL="0">
+              <a:buNone/>
+            </a:pPr>
+            <a:r>
+              <a:rPr lang="en-US" sz="2400" b="1" dirty="0">
+                <a:solidFill>
+                  <a:srgbClr val="FFFFFF"/>
+                </a:solidFill>
+                <a:latin typeface="Cambria" pitchFamily="34" charset="0"/>
+                <a:ea typeface="Cambria" pitchFamily="34" charset="-122"/>
+                <a:cs typeface="Cambria" pitchFamily="34" charset="-120"/>
+              </a:rPr>
+              <a:t>2</a:t>
+            </a:r>
+            <a:endParaRPr lang="en-US" sz="2400" dirty="0"/>
+          </a:p>
+        </p:txBody>
+      </p:sp>
+      <p:sp>
+        <p:nvSpPr>
+          <p:cNvPr id="10" name="Text 8"/>
+          <p:cNvSpPr/>
+          <p:nvPr/>
+        </p:nvSpPr>
+        <p:spPr>
+          <a:xfrm>
+            <a:off x="1554480" y="2651760"/>
+            <a:ext cx="9966960" cy="365760"/>
+          </a:xfrm>
+          <a:prstGeom prst="rect">
+            <a:avLst/>
+          </a:prstGeom>
+          <a:noFill/>
+          <a:ln/>
+        </p:spPr>
+        <p:txBody>
+          <a:bodyPr wrap="square" lIns="0" tIns="0" rIns="0" bIns="0" rtlCol="0" anchor="ctr"/>
+          <a:lstStyle/>
+          <a:p>
+            <a:pPr indent="0" marL="0">
+              <a:buNone/>
+            </a:pPr>
+            <a:r>
+              <a:rPr lang="en-US" sz="1700" b="1" dirty="0">
+                <a:solidFill>
+                  <a:srgbClr val="1B2A1C"/>
+                </a:solidFill>
+                <a:latin typeface="Calibri" pitchFamily="34" charset="0"/>
+                <a:ea typeface="Calibri" pitchFamily="34" charset="-122"/>
+                <a:cs typeface="Calibri" pitchFamily="34" charset="-120"/>
+              </a:rPr>
+              <a:t>Собрать полный CAPEX</a:t>
+            </a:r>
+            <a:endParaRPr lang="en-US" sz="1700" dirty="0"/>
+          </a:p>
+        </p:txBody>
+      </p:sp>
+      <p:sp>
+        <p:nvSpPr>
+          <p:cNvPr id="11" name="Text 9"/>
+          <p:cNvSpPr/>
+          <p:nvPr/>
+        </p:nvSpPr>
+        <p:spPr>
+          <a:xfrm>
+            <a:off x="1554480" y="2990088"/>
+            <a:ext cx="9966960" cy="365760"/>
+          </a:xfrm>
+          <a:prstGeom prst="rect">
+            <a:avLst/>
+          </a:prstGeom>
+          <a:noFill/>
+          <a:ln/>
+        </p:spPr>
+        <p:txBody>
+          <a:bodyPr wrap="square" lIns="0" tIns="0" rIns="0" bIns="0" rtlCol="0" anchor="ctr"/>
+          <a:lstStyle/>
+          <a:p>
+            <a:pPr indent="0" marL="0">
+              <a:buNone/>
+            </a:pPr>
+            <a:r>
+              <a:rPr lang="en-US" sz="1300" dirty="0">
+                <a:solidFill>
+                  <a:srgbClr val="5B6B5C"/>
+                </a:solidFill>
+                <a:latin typeface="Calibri" pitchFamily="34" charset="0"/>
+                <a:ea typeface="Calibri" pitchFamily="34" charset="-122"/>
+                <a:cs typeface="Calibri" pitchFamily="34" charset="-120"/>
+              </a:rPr>
+              <a:t>Добавить СМР, монтаж, ПНР, логистику, таможню, НДС, инжиниринг, резерв</a:t>
+            </a:r>
+            <a:endParaRPr lang="en-US" sz="1300" dirty="0"/>
+          </a:p>
+        </p:txBody>
+      </p:sp>
+      <p:sp>
+        <p:nvSpPr>
+          <p:cNvPr id="12" name="Shape 10"/>
+          <p:cNvSpPr/>
+          <p:nvPr/>
+        </p:nvSpPr>
+        <p:spPr>
+          <a:xfrm>
+            <a:off x="731520" y="3602736"/>
+            <a:ext cx="566928" cy="566928"/>
+          </a:xfrm>
+          <a:prstGeom prst="ellipse">
+            <a:avLst/>
+          </a:prstGeom>
+          <a:solidFill>
+            <a:srgbClr val="2C5F2D"/>
+          </a:solidFill>
+          <a:ln/>
+        </p:spPr>
+      </p:sp>
+      <p:sp>
+        <p:nvSpPr>
+          <p:cNvPr id="13" name="Text 11"/>
+          <p:cNvSpPr/>
+          <p:nvPr/>
+        </p:nvSpPr>
+        <p:spPr>
+          <a:xfrm>
+            <a:off x="731520" y="3602736"/>
+            <a:ext cx="566928" cy="566928"/>
+          </a:xfrm>
+          <a:prstGeom prst="rect">
+            <a:avLst/>
+          </a:prstGeom>
+          <a:noFill/>
+          <a:ln/>
+        </p:spPr>
+        <p:txBody>
+          <a:bodyPr wrap="square" lIns="0" tIns="0" rIns="0" bIns="0" rtlCol="0" anchor="ctr"/>
+          <a:lstStyle/>
+          <a:p>
+            <a:pPr algn="ctr" indent="0" marL="0">
+              <a:buNone/>
+            </a:pPr>
+            <a:r>
+              <a:rPr lang="en-US" sz="2400" b="1" dirty="0">
+                <a:solidFill>
+                  <a:srgbClr val="FFFFFF"/>
+                </a:solidFill>
+                <a:latin typeface="Cambria" pitchFamily="34" charset="0"/>
+                <a:ea typeface="Cambria" pitchFamily="34" charset="-122"/>
+                <a:cs typeface="Cambria" pitchFamily="34" charset="-120"/>
+              </a:rPr>
+              <a:t>3</a:t>
+            </a:r>
+            <a:endParaRPr lang="en-US" sz="2400" dirty="0"/>
+          </a:p>
+        </p:txBody>
+      </p:sp>
+      <p:sp>
+        <p:nvSpPr>
+          <p:cNvPr id="14" name="Text 12"/>
+          <p:cNvSpPr/>
+          <p:nvPr/>
+        </p:nvSpPr>
+        <p:spPr>
+          <a:xfrm>
+            <a:off x="1554480" y="3584448"/>
+            <a:ext cx="9966960" cy="365760"/>
+          </a:xfrm>
+          <a:prstGeom prst="rect">
+            <a:avLst/>
+          </a:prstGeom>
+          <a:noFill/>
+          <a:ln/>
+        </p:spPr>
+        <p:txBody>
+          <a:bodyPr wrap="square" lIns="0" tIns="0" rIns="0" bIns="0" rtlCol="0" anchor="ctr"/>
+          <a:lstStyle/>
+          <a:p>
+            <a:pPr indent="0" marL="0">
+              <a:buNone/>
+            </a:pPr>
+            <a:r>
+              <a:rPr lang="en-US" sz="1700" b="1" dirty="0">
+                <a:solidFill>
+                  <a:srgbClr val="1B2A1C"/>
+                </a:solidFill>
+                <a:latin typeface="Calibri" pitchFamily="34" charset="0"/>
+                <a:ea typeface="Calibri" pitchFamily="34" charset="-122"/>
+                <a:cs typeface="Calibri" pitchFamily="34" charset="-120"/>
+              </a:rPr>
+              <a:t>Свести в единую валюту</a:t>
+            </a:r>
+            <a:endParaRPr lang="en-US" sz="1700" dirty="0"/>
+          </a:p>
+        </p:txBody>
+      </p:sp>
+      <p:sp>
+        <p:nvSpPr>
+          <p:cNvPr id="15" name="Text 13"/>
+          <p:cNvSpPr/>
+          <p:nvPr/>
+        </p:nvSpPr>
+        <p:spPr>
+          <a:xfrm>
+            <a:off x="1554480" y="3922776"/>
+            <a:ext cx="9966960" cy="365760"/>
+          </a:xfrm>
+          <a:prstGeom prst="rect">
+            <a:avLst/>
+          </a:prstGeom>
+          <a:noFill/>
+          <a:ln/>
+        </p:spPr>
+        <p:txBody>
+          <a:bodyPr wrap="square" lIns="0" tIns="0" rIns="0" bIns="0" rtlCol="0" anchor="ctr"/>
+          <a:lstStyle/>
+          <a:p>
+            <a:pPr indent="0" marL="0">
+              <a:buNone/>
+            </a:pPr>
+            <a:r>
+              <a:rPr lang="en-US" sz="1300" dirty="0">
+                <a:solidFill>
+                  <a:srgbClr val="5B6B5C"/>
+                </a:solidFill>
+                <a:latin typeface="Calibri" pitchFamily="34" charset="0"/>
+                <a:ea typeface="Calibri" pitchFamily="34" charset="-122"/>
+                <a:cs typeface="Calibri" pitchFamily="34" charset="-120"/>
+              </a:rPr>
+              <a:t>Зафиксировать курс EUR/USD/KZT на дату; убрать валютный разнобой</a:t>
+            </a:r>
+            <a:endParaRPr lang="en-US" sz="1300" dirty="0"/>
+          </a:p>
+        </p:txBody>
+      </p:sp>
+      <p:sp>
+        <p:nvSpPr>
+          <p:cNvPr id="16" name="Shape 14"/>
+          <p:cNvSpPr/>
+          <p:nvPr/>
+        </p:nvSpPr>
+        <p:spPr>
+          <a:xfrm>
+            <a:off x="731520" y="4535424"/>
+            <a:ext cx="566928" cy="566928"/>
+          </a:xfrm>
+          <a:prstGeom prst="ellipse">
+            <a:avLst/>
+          </a:prstGeom>
+          <a:solidFill>
+            <a:srgbClr val="2C5F2D"/>
+          </a:solidFill>
+          <a:ln/>
+        </p:spPr>
+      </p:sp>
+      <p:sp>
+        <p:nvSpPr>
+          <p:cNvPr id="17" name="Text 15"/>
+          <p:cNvSpPr/>
+          <p:nvPr/>
+        </p:nvSpPr>
+        <p:spPr>
+          <a:xfrm>
+            <a:off x="731520" y="4535424"/>
+            <a:ext cx="566928" cy="566928"/>
+          </a:xfrm>
+          <a:prstGeom prst="rect">
+            <a:avLst/>
+          </a:prstGeom>
+          <a:noFill/>
+          <a:ln/>
+        </p:spPr>
+        <p:txBody>
+          <a:bodyPr wrap="square" lIns="0" tIns="0" rIns="0" bIns="0" rtlCol="0" anchor="ctr"/>
+          <a:lstStyle/>
+          <a:p>
+            <a:pPr algn="ctr" indent="0" marL="0">
+              <a:buNone/>
+            </a:pPr>
+            <a:r>
+              <a:rPr lang="en-US" sz="2400" b="1" dirty="0">
+                <a:solidFill>
+                  <a:srgbClr val="FFFFFF"/>
+                </a:solidFill>
+                <a:latin typeface="Cambria" pitchFamily="34" charset="0"/>
+                <a:ea typeface="Cambria" pitchFamily="34" charset="-122"/>
+                <a:cs typeface="Cambria" pitchFamily="34" charset="-120"/>
+              </a:rPr>
+              <a:t>4</a:t>
+            </a:r>
+            <a:endParaRPr lang="en-US" sz="2400" dirty="0"/>
+          </a:p>
+        </p:txBody>
+      </p:sp>
+      <p:sp>
+        <p:nvSpPr>
+          <p:cNvPr id="18" name="Text 16"/>
+          <p:cNvSpPr/>
+          <p:nvPr/>
+        </p:nvSpPr>
+        <p:spPr>
+          <a:xfrm>
+            <a:off x="1554480" y="4517136"/>
+            <a:ext cx="9966960" cy="365760"/>
+          </a:xfrm>
+          <a:prstGeom prst="rect">
+            <a:avLst/>
+          </a:prstGeom>
+          <a:noFill/>
+          <a:ln/>
+        </p:spPr>
+        <p:txBody>
+          <a:bodyPr wrap="square" lIns="0" tIns="0" rIns="0" bIns="0" rtlCol="0" anchor="ctr"/>
+          <a:lstStyle/>
+          <a:p>
+            <a:pPr indent="0" marL="0">
+              <a:buNone/>
+            </a:pPr>
+            <a:r>
+              <a:rPr lang="en-US" sz="1700" b="1" dirty="0">
+                <a:solidFill>
+                  <a:srgbClr val="1B2A1C"/>
+                </a:solidFill>
+                <a:latin typeface="Calibri" pitchFamily="34" charset="0"/>
+                <a:ea typeface="Calibri" pitchFamily="34" charset="-122"/>
+                <a:cs typeface="Calibri" pitchFamily="34" charset="-120"/>
+              </a:rPr>
+              <a:t>Актуализировать цены</a:t>
+            </a:r>
+            <a:endParaRPr lang="en-US" sz="1700" dirty="0"/>
+          </a:p>
+        </p:txBody>
+      </p:sp>
+      <p:sp>
+        <p:nvSpPr>
+          <p:cNvPr id="19" name="Text 17"/>
+          <p:cNvSpPr/>
+          <p:nvPr/>
+        </p:nvSpPr>
+        <p:spPr>
+          <a:xfrm>
+            <a:off x="1554480" y="4855464"/>
+            <a:ext cx="9966960" cy="365760"/>
+          </a:xfrm>
+          <a:prstGeom prst="rect">
+            <a:avLst/>
+          </a:prstGeom>
+          <a:noFill/>
+          <a:ln/>
+        </p:spPr>
+        <p:txBody>
+          <a:bodyPr wrap="square" lIns="0" tIns="0" rIns="0" bIns="0" rtlCol="0" anchor="ctr"/>
+          <a:lstStyle/>
+          <a:p>
+            <a:pPr indent="0" marL="0">
+              <a:buNone/>
+            </a:pPr>
+            <a:r>
+              <a:rPr lang="en-US" sz="1300" dirty="0">
+                <a:solidFill>
+                  <a:srgbClr val="5B6B5C"/>
+                </a:solidFill>
+                <a:latin typeface="Calibri" pitchFamily="34" charset="0"/>
+                <a:ea typeface="Calibri" pitchFamily="34" charset="-122"/>
+                <a:cs typeface="Calibri" pitchFamily="34" charset="-120"/>
+              </a:rPr>
+              <a:t>Срок действия предложений истёк (1 мес.); подтвердить у поставщика</a:t>
+            </a:r>
+            <a:endParaRPr lang="en-US" sz="1300" dirty="0"/>
+          </a:p>
+        </p:txBody>
+      </p:sp>
+      <p:sp>
+        <p:nvSpPr>
+          <p:cNvPr id="20" name="Shape 18"/>
+          <p:cNvSpPr/>
+          <p:nvPr/>
+        </p:nvSpPr>
+        <p:spPr>
+          <a:xfrm>
+            <a:off x="731520" y="5468112"/>
+            <a:ext cx="566928" cy="566928"/>
+          </a:xfrm>
+          <a:prstGeom prst="ellipse">
+            <a:avLst/>
+          </a:prstGeom>
+          <a:solidFill>
+            <a:srgbClr val="2C5F2D"/>
+          </a:solidFill>
+          <a:ln/>
+        </p:spPr>
+      </p:sp>
+      <p:sp>
+        <p:nvSpPr>
+          <p:cNvPr id="21" name="Text 19"/>
+          <p:cNvSpPr/>
+          <p:nvPr/>
+        </p:nvSpPr>
+        <p:spPr>
+          <a:xfrm>
+            <a:off x="731520" y="5468112"/>
+            <a:ext cx="566928" cy="566928"/>
+          </a:xfrm>
+          <a:prstGeom prst="rect">
+            <a:avLst/>
+          </a:prstGeom>
+          <a:noFill/>
+          <a:ln/>
+        </p:spPr>
+        <p:txBody>
+          <a:bodyPr wrap="square" lIns="0" tIns="0" rIns="0" bIns="0" rtlCol="0" anchor="ctr"/>
+          <a:lstStyle/>
+          <a:p>
+            <a:pPr algn="ctr" indent="0" marL="0">
+              <a:buNone/>
+            </a:pPr>
+            <a:r>
+              <a:rPr lang="en-US" sz="2400" b="1" dirty="0">
+                <a:solidFill>
+                  <a:srgbClr val="FFFFFF"/>
+                </a:solidFill>
+                <a:latin typeface="Cambria" pitchFamily="34" charset="0"/>
+                <a:ea typeface="Cambria" pitchFamily="34" charset="-122"/>
+                <a:cs typeface="Cambria" pitchFamily="34" charset="-120"/>
+              </a:rPr>
+              <a:t>5</a:t>
+            </a:r>
+            <a:endParaRPr lang="en-US" sz="2400" dirty="0"/>
+          </a:p>
+        </p:txBody>
+      </p:sp>
+      <p:sp>
+        <p:nvSpPr>
+          <p:cNvPr id="22" name="Text 20"/>
+          <p:cNvSpPr/>
+          <p:nvPr/>
+        </p:nvSpPr>
+        <p:spPr>
+          <a:xfrm>
+            <a:off x="1554480" y="5449824"/>
+            <a:ext cx="9966960" cy="365760"/>
+          </a:xfrm>
+          <a:prstGeom prst="rect">
+            <a:avLst/>
+          </a:prstGeom>
+          <a:noFill/>
+          <a:ln/>
+        </p:spPr>
+        <p:txBody>
+          <a:bodyPr wrap="square" lIns="0" tIns="0" rIns="0" bIns="0" rtlCol="0" anchor="ctr"/>
+          <a:lstStyle/>
+          <a:p>
+            <a:pPr indent="0" marL="0">
+              <a:buNone/>
+            </a:pPr>
+            <a:r>
+              <a:rPr lang="en-US" sz="1700" b="1" dirty="0">
+                <a:solidFill>
+                  <a:srgbClr val="1B2A1C"/>
+                </a:solidFill>
+                <a:latin typeface="Calibri" pitchFamily="34" charset="0"/>
+                <a:ea typeface="Calibri" pitchFamily="34" charset="-122"/>
+                <a:cs typeface="Calibri" pitchFamily="34" charset="-120"/>
+              </a:rPr>
+              <a:t>Структурировать финансирование</a:t>
+            </a:r>
+            <a:endParaRPr lang="en-US" sz="1700" dirty="0"/>
+          </a:p>
+        </p:txBody>
+      </p:sp>
+      <p:sp>
+        <p:nvSpPr>
+          <p:cNvPr id="23" name="Text 21"/>
+          <p:cNvSpPr/>
+          <p:nvPr/>
+        </p:nvSpPr>
+        <p:spPr>
+          <a:xfrm>
+            <a:off x="1554480" y="5788152"/>
+            <a:ext cx="9966960" cy="365760"/>
+          </a:xfrm>
+          <a:prstGeom prst="rect">
+            <a:avLst/>
+          </a:prstGeom>
+          <a:noFill/>
+          <a:ln/>
+        </p:spPr>
+        <p:txBody>
+          <a:bodyPr wrap="square" lIns="0" tIns="0" rIns="0" bIns="0" rtlCol="0" anchor="ctr"/>
+          <a:lstStyle/>
+          <a:p>
+            <a:pPr indent="0" marL="0">
+              <a:buNone/>
+            </a:pPr>
+            <a:r>
+              <a:rPr lang="en-US" sz="1300" dirty="0">
+                <a:solidFill>
+                  <a:srgbClr val="5B6B5C"/>
+                </a:solidFill>
+                <a:latin typeface="Calibri" pitchFamily="34" charset="0"/>
+                <a:ea typeface="Calibri" pitchFamily="34" charset="-122"/>
+                <a:cs typeface="Calibri" pitchFamily="34" charset="-120"/>
+              </a:rPr>
+              <a:t>Разбить CAPEX на транши и источники под требования ФРП, БРК, БВУ</a:t>
+            </a:r>
+            <a:endParaRPr lang="en-US" sz="1300" dirty="0"/>
           </a:p>
         </p:txBody>
       </p:sp>
@@ -16272,7 +19552,7 @@
     <p:bg>
       <p:bgPr>
         <a:solidFill>
-          <a:srgbClr val="FFFFFF"/>
+          <a:srgbClr val="F4F6F0"/>
         </a:solidFill>
       </p:bgPr>
     </p:bg>
@@ -16323,7 +19603,7 @@
                 <a:ea typeface="Calibri" pitchFamily="34" charset="-122"/>
                 <a:cs typeface="Calibri" pitchFamily="34" charset="-120"/>
               </a:rPr>
-              <a:t>ПЛАН ДЕЙСТВИЙ</a:t>
+              <a:t>КОНТЕКСТ · ТЭО 23.07.2024</a:t>
             </a:r>
             <a:endParaRPr lang="en-US" sz="1100" dirty="0"/>
           </a:p>
@@ -16362,81 +19642,1185 @@
                 <a:ea typeface="Cambria" pitchFamily="34" charset="-122"/>
                 <a:cs typeface="Cambria" pitchFamily="34" charset="-120"/>
               </a:rPr>
-              <a:t>Что закрыть до подачи в ФРП / БРК / БВУ</a:t>
+              <a:t>Полный CAPEX по исследованию 2024</a:t>
             </a:r>
             <a:endParaRPr lang="en-US" sz="3000" dirty="0"/>
           </a:p>
         </p:txBody>
       </p:sp>
+      <p:graphicFrame>
+        <p:nvGraphicFramePr>
+          <p:cNvPr id="10" name="Table 0"/>
+          <p:cNvGraphicFramePr>
+            <a:graphicFrameLocks noGrp="1"/>
+          </p:cNvGraphicFramePr>
+          <p:nvPr>
+            <p:extLst>
+              <p:ext uri="{D42A27DB-BD31-4B8C-83A1-F6EECF244321}">
+                <p14:modId xmlns:p14="http://schemas.microsoft.com/office/powerpoint/2010/main" val="1579011935"/>
+              </p:ext>
+            </p:extLst>
+          </p:nvPr>
+        </p:nvGraphicFramePr>
+        <p:xfrm>
+          <a:off x="594360" y="1645920"/>
+          <a:ext cx="8412480" cy="914400"/>
+        </p:xfrm>
+        <a:graphic>
+          <a:graphicData uri="http://schemas.openxmlformats.org/drawingml/2006/table">
+            <a:tbl>
+              <a:tblPr/>
+              <a:tblGrid>
+                <a:gridCol w="6035040"/>
+                <a:gridCol w="2377440"/>
+              </a:tblGrid>
+              <a:tr h="384048">
+                <a:tc>
+                  <a:txBody>
+                    <a:bodyPr/>
+                    <a:lstStyle/>
+                    <a:p>
+                      <a:pPr algn="l" indent="0" marL="0">
+                        <a:buNone/>
+                      </a:pPr>
+                      <a:r>
+                        <a:rPr lang="en-US" sz="1200" b="1" dirty="0">
+                          <a:solidFill>
+                            <a:srgbClr val="FFFFFF"/>
+                          </a:solidFill>
+                          <a:latin typeface="Calibri" pitchFamily="34" charset="0"/>
+                          <a:ea typeface="Calibri" pitchFamily="34" charset="-122"/>
+                          <a:cs typeface="Calibri" pitchFamily="34" charset="-120"/>
+                        </a:rPr>
+                        <a:t>Статья</a:t>
+                      </a:r>
+                      <a:endParaRPr lang="en-US" sz="1200" dirty="0">
+                        <a:latin typeface="Calibri" charset="0"/>
+                        <a:ea typeface="Calibri" charset="0"/>
+                        <a:cs typeface="Calibri" charset="0"/>
+                      </a:endParaRPr>
+                    </a:p>
+                  </a:txBody>
+                  <a:tcPr marL="63500" marR="63500" marT="38100" marB="38100" anchor="ctr">
+                    <a:lnL w="6350" cap="flat" cmpd="sng" algn="ctr">
+                      <a:solidFill>
+                        <a:srgbClr val="D3DBC7"/>
+                      </a:solidFill>
+                      <a:prstDash val="solid"/>
+                      <a:round/>
+                      <a:headEnd type="none" w="med" len="med"/>
+                      <a:tailEnd type="none" w="med" len="med"/>
+                    </a:lnL>
+                    <a:lnR w="6350" cap="flat" cmpd="sng" algn="ctr">
+                      <a:solidFill>
+                        <a:srgbClr val="D3DBC7"/>
+                      </a:solidFill>
+                      <a:prstDash val="solid"/>
+                      <a:round/>
+                      <a:headEnd type="none" w="med" len="med"/>
+                      <a:tailEnd type="none" w="med" len="med"/>
+                    </a:lnR>
+                    <a:lnT w="6350" cap="flat" cmpd="sng" algn="ctr">
+                      <a:solidFill>
+                        <a:srgbClr val="D3DBC7"/>
+                      </a:solidFill>
+                      <a:prstDash val="solid"/>
+                      <a:round/>
+                      <a:headEnd type="none" w="med" len="med"/>
+                      <a:tailEnd type="none" w="med" len="med"/>
+                    </a:lnT>
+                    <a:lnB w="6350" cap="flat" cmpd="sng" algn="ctr">
+                      <a:solidFill>
+                        <a:srgbClr val="D3DBC7"/>
+                      </a:solidFill>
+                      <a:prstDash val="solid"/>
+                      <a:round/>
+                      <a:headEnd type="none" w="med" len="med"/>
+                      <a:tailEnd type="none" w="med" len="med"/>
+                    </a:lnB>
+                    <a:solidFill>
+                      <a:srgbClr val="2C5F2D"/>
+                    </a:solidFill>
+                  </a:tcPr>
+                </a:tc>
+                <a:tc>
+                  <a:txBody>
+                    <a:bodyPr/>
+                    <a:lstStyle/>
+                    <a:p>
+                      <a:pPr algn="r" indent="0" marL="0">
+                        <a:buNone/>
+                      </a:pPr>
+                      <a:r>
+                        <a:rPr lang="en-US" sz="1200" b="1" dirty="0">
+                          <a:solidFill>
+                            <a:srgbClr val="FFFFFF"/>
+                          </a:solidFill>
+                          <a:latin typeface="Calibri" pitchFamily="34" charset="0"/>
+                          <a:ea typeface="Calibri" pitchFamily="34" charset="-122"/>
+                          <a:cs typeface="Calibri" pitchFamily="34" charset="-120"/>
+                        </a:rPr>
+                        <a:t>USD</a:t>
+                      </a:r>
+                      <a:endParaRPr lang="en-US" sz="1200" dirty="0">
+                        <a:latin typeface="Calibri" charset="0"/>
+                        <a:ea typeface="Calibri" charset="0"/>
+                        <a:cs typeface="Calibri" charset="0"/>
+                      </a:endParaRPr>
+                    </a:p>
+                  </a:txBody>
+                  <a:tcPr marL="63500" marR="63500" marT="38100" marB="38100" anchor="ctr">
+                    <a:lnL w="6350" cap="flat" cmpd="sng" algn="ctr">
+                      <a:solidFill>
+                        <a:srgbClr val="D3DBC7"/>
+                      </a:solidFill>
+                      <a:prstDash val="solid"/>
+                      <a:round/>
+                      <a:headEnd type="none" w="med" len="med"/>
+                      <a:tailEnd type="none" w="med" len="med"/>
+                    </a:lnL>
+                    <a:lnR w="6350" cap="flat" cmpd="sng" algn="ctr">
+                      <a:solidFill>
+                        <a:srgbClr val="D3DBC7"/>
+                      </a:solidFill>
+                      <a:prstDash val="solid"/>
+                      <a:round/>
+                      <a:headEnd type="none" w="med" len="med"/>
+                      <a:tailEnd type="none" w="med" len="med"/>
+                    </a:lnR>
+                    <a:lnT w="6350" cap="flat" cmpd="sng" algn="ctr">
+                      <a:solidFill>
+                        <a:srgbClr val="D3DBC7"/>
+                      </a:solidFill>
+                      <a:prstDash val="solid"/>
+                      <a:round/>
+                      <a:headEnd type="none" w="med" len="med"/>
+                      <a:tailEnd type="none" w="med" len="med"/>
+                    </a:lnT>
+                    <a:lnB w="6350" cap="flat" cmpd="sng" algn="ctr">
+                      <a:solidFill>
+                        <a:srgbClr val="D3DBC7"/>
+                      </a:solidFill>
+                      <a:prstDash val="solid"/>
+                      <a:round/>
+                      <a:headEnd type="none" w="med" len="med"/>
+                      <a:tailEnd type="none" w="med" len="med"/>
+                    </a:lnB>
+                    <a:solidFill>
+                      <a:srgbClr val="2C5F2D"/>
+                    </a:solidFill>
+                  </a:tcPr>
+                </a:tc>
+              </a:tr>
+              <a:tr h="384048">
+                <a:tc>
+                  <a:txBody>
+                    <a:bodyPr/>
+                    <a:lstStyle/>
+                    <a:p>
+                      <a:pPr algn="l" indent="0" marL="0">
+                        <a:buNone/>
+                      </a:pPr>
+                      <a:r>
+                        <a:rPr lang="en-US" sz="1200" dirty="0">
+                          <a:solidFill>
+                            <a:srgbClr val="1B2A1C"/>
+                          </a:solidFill>
+                          <a:latin typeface="Calibri" pitchFamily="34" charset="0"/>
+                          <a:ea typeface="Calibri" pitchFamily="34" charset="-122"/>
+                          <a:cs typeface="Calibri" pitchFamily="34" charset="-120"/>
+                        </a:rPr>
+                        <a:t>Проектные работы (Design)</a:t>
+                      </a:r>
+                      <a:endParaRPr lang="en-US" sz="1200" dirty="0">
+                        <a:latin typeface="Calibri" charset="0"/>
+                        <a:ea typeface="Calibri" charset="0"/>
+                        <a:cs typeface="Calibri" charset="0"/>
+                      </a:endParaRPr>
+                    </a:p>
+                  </a:txBody>
+                  <a:tcPr marL="63500" marR="63500" marT="38100" marB="38100" anchor="ctr">
+                    <a:lnL w="6350" cap="flat" cmpd="sng" algn="ctr">
+                      <a:solidFill>
+                        <a:srgbClr val="D3DBC7"/>
+                      </a:solidFill>
+                      <a:prstDash val="solid"/>
+                      <a:round/>
+                      <a:headEnd type="none" w="med" len="med"/>
+                      <a:tailEnd type="none" w="med" len="med"/>
+                    </a:lnL>
+                    <a:lnR w="6350" cap="flat" cmpd="sng" algn="ctr">
+                      <a:solidFill>
+                        <a:srgbClr val="D3DBC7"/>
+                      </a:solidFill>
+                      <a:prstDash val="solid"/>
+                      <a:round/>
+                      <a:headEnd type="none" w="med" len="med"/>
+                      <a:tailEnd type="none" w="med" len="med"/>
+                    </a:lnR>
+                    <a:lnT w="6350" cap="flat" cmpd="sng" algn="ctr">
+                      <a:solidFill>
+                        <a:srgbClr val="D3DBC7"/>
+                      </a:solidFill>
+                      <a:prstDash val="solid"/>
+                      <a:round/>
+                      <a:headEnd type="none" w="med" len="med"/>
+                      <a:tailEnd type="none" w="med" len="med"/>
+                    </a:lnT>
+                    <a:lnB w="6350" cap="flat" cmpd="sng" algn="ctr">
+                      <a:solidFill>
+                        <a:srgbClr val="D3DBC7"/>
+                      </a:solidFill>
+                      <a:prstDash val="solid"/>
+                      <a:round/>
+                      <a:headEnd type="none" w="med" len="med"/>
+                      <a:tailEnd type="none" w="med" len="med"/>
+                    </a:lnB>
+                    <a:solidFill>
+                      <a:srgbClr val="FFFFFF"/>
+                    </a:solidFill>
+                  </a:tcPr>
+                </a:tc>
+                <a:tc>
+                  <a:txBody>
+                    <a:bodyPr/>
+                    <a:lstStyle/>
+                    <a:p>
+                      <a:pPr algn="r" indent="0" marL="0">
+                        <a:buNone/>
+                      </a:pPr>
+                      <a:r>
+                        <a:rPr lang="en-US" sz="1200" dirty="0">
+                          <a:solidFill>
+                            <a:srgbClr val="1B2A1C"/>
+                          </a:solidFill>
+                          <a:latin typeface="Calibri" pitchFamily="34" charset="0"/>
+                          <a:ea typeface="Calibri" pitchFamily="34" charset="-122"/>
+                          <a:cs typeface="Calibri" pitchFamily="34" charset="-120"/>
+                        </a:rPr>
+                        <a:t>$1 124 000</a:t>
+                      </a:r>
+                      <a:endParaRPr lang="en-US" sz="1200" dirty="0">
+                        <a:latin typeface="Calibri" charset="0"/>
+                        <a:ea typeface="Calibri" charset="0"/>
+                        <a:cs typeface="Calibri" charset="0"/>
+                      </a:endParaRPr>
+                    </a:p>
+                  </a:txBody>
+                  <a:tcPr marL="63500" marR="63500" marT="38100" marB="38100" anchor="ctr">
+                    <a:lnL w="6350" cap="flat" cmpd="sng" algn="ctr">
+                      <a:solidFill>
+                        <a:srgbClr val="D3DBC7"/>
+                      </a:solidFill>
+                      <a:prstDash val="solid"/>
+                      <a:round/>
+                      <a:headEnd type="none" w="med" len="med"/>
+                      <a:tailEnd type="none" w="med" len="med"/>
+                    </a:lnL>
+                    <a:lnR w="6350" cap="flat" cmpd="sng" algn="ctr">
+                      <a:solidFill>
+                        <a:srgbClr val="D3DBC7"/>
+                      </a:solidFill>
+                      <a:prstDash val="solid"/>
+                      <a:round/>
+                      <a:headEnd type="none" w="med" len="med"/>
+                      <a:tailEnd type="none" w="med" len="med"/>
+                    </a:lnR>
+                    <a:lnT w="6350" cap="flat" cmpd="sng" algn="ctr">
+                      <a:solidFill>
+                        <a:srgbClr val="D3DBC7"/>
+                      </a:solidFill>
+                      <a:prstDash val="solid"/>
+                      <a:round/>
+                      <a:headEnd type="none" w="med" len="med"/>
+                      <a:tailEnd type="none" w="med" len="med"/>
+                    </a:lnT>
+                    <a:lnB w="6350" cap="flat" cmpd="sng" algn="ctr">
+                      <a:solidFill>
+                        <a:srgbClr val="D3DBC7"/>
+                      </a:solidFill>
+                      <a:prstDash val="solid"/>
+                      <a:round/>
+                      <a:headEnd type="none" w="med" len="med"/>
+                      <a:tailEnd type="none" w="med" len="med"/>
+                    </a:lnB>
+                    <a:solidFill>
+                      <a:srgbClr val="FFFFFF"/>
+                    </a:solidFill>
+                  </a:tcPr>
+                </a:tc>
+              </a:tr>
+              <a:tr h="384048">
+                <a:tc>
+                  <a:txBody>
+                    <a:bodyPr/>
+                    <a:lstStyle/>
+                    <a:p>
+                      <a:pPr algn="l" indent="0" marL="0">
+                        <a:buNone/>
+                      </a:pPr>
+                      <a:r>
+                        <a:rPr lang="en-US" sz="1200" dirty="0">
+                          <a:solidFill>
+                            <a:srgbClr val="1B2A1C"/>
+                          </a:solidFill>
+                          <a:latin typeface="Calibri" pitchFamily="34" charset="0"/>
+                          <a:ea typeface="Calibri" pitchFamily="34" charset="-122"/>
+                          <a:cs typeface="Calibri" pitchFamily="34" charset="-120"/>
+                        </a:rPr>
+                        <a:t>Биогазовый завод</a:t>
+                      </a:r>
+                      <a:endParaRPr lang="en-US" sz="1200" dirty="0">
+                        <a:latin typeface="Calibri" charset="0"/>
+                        <a:ea typeface="Calibri" charset="0"/>
+                        <a:cs typeface="Calibri" charset="0"/>
+                      </a:endParaRPr>
+                    </a:p>
+                  </a:txBody>
+                  <a:tcPr marL="63500" marR="63500" marT="38100" marB="38100" anchor="ctr">
+                    <a:lnL w="6350" cap="flat" cmpd="sng" algn="ctr">
+                      <a:solidFill>
+                        <a:srgbClr val="D3DBC7"/>
+                      </a:solidFill>
+                      <a:prstDash val="solid"/>
+                      <a:round/>
+                      <a:headEnd type="none" w="med" len="med"/>
+                      <a:tailEnd type="none" w="med" len="med"/>
+                    </a:lnL>
+                    <a:lnR w="6350" cap="flat" cmpd="sng" algn="ctr">
+                      <a:solidFill>
+                        <a:srgbClr val="D3DBC7"/>
+                      </a:solidFill>
+                      <a:prstDash val="solid"/>
+                      <a:round/>
+                      <a:headEnd type="none" w="med" len="med"/>
+                      <a:tailEnd type="none" w="med" len="med"/>
+                    </a:lnR>
+                    <a:lnT w="6350" cap="flat" cmpd="sng" algn="ctr">
+                      <a:solidFill>
+                        <a:srgbClr val="D3DBC7"/>
+                      </a:solidFill>
+                      <a:prstDash val="solid"/>
+                      <a:round/>
+                      <a:headEnd type="none" w="med" len="med"/>
+                      <a:tailEnd type="none" w="med" len="med"/>
+                    </a:lnT>
+                    <a:lnB w="6350" cap="flat" cmpd="sng" algn="ctr">
+                      <a:solidFill>
+                        <a:srgbClr val="D3DBC7"/>
+                      </a:solidFill>
+                      <a:prstDash val="solid"/>
+                      <a:round/>
+                      <a:headEnd type="none" w="med" len="med"/>
+                      <a:tailEnd type="none" w="med" len="med"/>
+                    </a:lnB>
+                    <a:solidFill>
+                      <a:srgbClr val="EEF3E6"/>
+                    </a:solidFill>
+                  </a:tcPr>
+                </a:tc>
+                <a:tc>
+                  <a:txBody>
+                    <a:bodyPr/>
+                    <a:lstStyle/>
+                    <a:p>
+                      <a:pPr algn="r" indent="0" marL="0">
+                        <a:buNone/>
+                      </a:pPr>
+                      <a:r>
+                        <a:rPr lang="en-US" sz="1200" dirty="0">
+                          <a:solidFill>
+                            <a:srgbClr val="1B2A1C"/>
+                          </a:solidFill>
+                          <a:latin typeface="Calibri" pitchFamily="34" charset="0"/>
+                          <a:ea typeface="Calibri" pitchFamily="34" charset="-122"/>
+                          <a:cs typeface="Calibri" pitchFamily="34" charset="-120"/>
+                        </a:rPr>
+                        <a:t>$15 124 612</a:t>
+                      </a:r>
+                      <a:endParaRPr lang="en-US" sz="1200" dirty="0">
+                        <a:latin typeface="Calibri" charset="0"/>
+                        <a:ea typeface="Calibri" charset="0"/>
+                        <a:cs typeface="Calibri" charset="0"/>
+                      </a:endParaRPr>
+                    </a:p>
+                  </a:txBody>
+                  <a:tcPr marL="63500" marR="63500" marT="38100" marB="38100" anchor="ctr">
+                    <a:lnL w="6350" cap="flat" cmpd="sng" algn="ctr">
+                      <a:solidFill>
+                        <a:srgbClr val="D3DBC7"/>
+                      </a:solidFill>
+                      <a:prstDash val="solid"/>
+                      <a:round/>
+                      <a:headEnd type="none" w="med" len="med"/>
+                      <a:tailEnd type="none" w="med" len="med"/>
+                    </a:lnL>
+                    <a:lnR w="6350" cap="flat" cmpd="sng" algn="ctr">
+                      <a:solidFill>
+                        <a:srgbClr val="D3DBC7"/>
+                      </a:solidFill>
+                      <a:prstDash val="solid"/>
+                      <a:round/>
+                      <a:headEnd type="none" w="med" len="med"/>
+                      <a:tailEnd type="none" w="med" len="med"/>
+                    </a:lnR>
+                    <a:lnT w="6350" cap="flat" cmpd="sng" algn="ctr">
+                      <a:solidFill>
+                        <a:srgbClr val="D3DBC7"/>
+                      </a:solidFill>
+                      <a:prstDash val="solid"/>
+                      <a:round/>
+                      <a:headEnd type="none" w="med" len="med"/>
+                      <a:tailEnd type="none" w="med" len="med"/>
+                    </a:lnT>
+                    <a:lnB w="6350" cap="flat" cmpd="sng" algn="ctr">
+                      <a:solidFill>
+                        <a:srgbClr val="D3DBC7"/>
+                      </a:solidFill>
+                      <a:prstDash val="solid"/>
+                      <a:round/>
+                      <a:headEnd type="none" w="med" len="med"/>
+                      <a:tailEnd type="none" w="med" len="med"/>
+                    </a:lnB>
+                    <a:solidFill>
+                      <a:srgbClr val="EEF3E6"/>
+                    </a:solidFill>
+                  </a:tcPr>
+                </a:tc>
+              </a:tr>
+              <a:tr h="384048">
+                <a:tc>
+                  <a:txBody>
+                    <a:bodyPr/>
+                    <a:lstStyle/>
+                    <a:p>
+                      <a:pPr algn="l" indent="0" marL="0">
+                        <a:buNone/>
+                      </a:pPr>
+                      <a:r>
+                        <a:rPr lang="en-US" sz="1200" dirty="0">
+                          <a:solidFill>
+                            <a:srgbClr val="1B2A1C"/>
+                          </a:solidFill>
+                          <a:latin typeface="Calibri" pitchFamily="34" charset="0"/>
+                          <a:ea typeface="Calibri" pitchFamily="34" charset="-122"/>
+                          <a:cs typeface="Calibri" pitchFamily="34" charset="-120"/>
+                        </a:rPr>
+                        <a:t>Завод твёрдых удобрений</a:t>
+                      </a:r>
+                      <a:endParaRPr lang="en-US" sz="1200" dirty="0">
+                        <a:latin typeface="Calibri" charset="0"/>
+                        <a:ea typeface="Calibri" charset="0"/>
+                        <a:cs typeface="Calibri" charset="0"/>
+                      </a:endParaRPr>
+                    </a:p>
+                  </a:txBody>
+                  <a:tcPr marL="63500" marR="63500" marT="38100" marB="38100" anchor="ctr">
+                    <a:lnL w="6350" cap="flat" cmpd="sng" algn="ctr">
+                      <a:solidFill>
+                        <a:srgbClr val="D3DBC7"/>
+                      </a:solidFill>
+                      <a:prstDash val="solid"/>
+                      <a:round/>
+                      <a:headEnd type="none" w="med" len="med"/>
+                      <a:tailEnd type="none" w="med" len="med"/>
+                    </a:lnL>
+                    <a:lnR w="6350" cap="flat" cmpd="sng" algn="ctr">
+                      <a:solidFill>
+                        <a:srgbClr val="D3DBC7"/>
+                      </a:solidFill>
+                      <a:prstDash val="solid"/>
+                      <a:round/>
+                      <a:headEnd type="none" w="med" len="med"/>
+                      <a:tailEnd type="none" w="med" len="med"/>
+                    </a:lnR>
+                    <a:lnT w="6350" cap="flat" cmpd="sng" algn="ctr">
+                      <a:solidFill>
+                        <a:srgbClr val="D3DBC7"/>
+                      </a:solidFill>
+                      <a:prstDash val="solid"/>
+                      <a:round/>
+                      <a:headEnd type="none" w="med" len="med"/>
+                      <a:tailEnd type="none" w="med" len="med"/>
+                    </a:lnT>
+                    <a:lnB w="6350" cap="flat" cmpd="sng" algn="ctr">
+                      <a:solidFill>
+                        <a:srgbClr val="D3DBC7"/>
+                      </a:solidFill>
+                      <a:prstDash val="solid"/>
+                      <a:round/>
+                      <a:headEnd type="none" w="med" len="med"/>
+                      <a:tailEnd type="none" w="med" len="med"/>
+                    </a:lnB>
+                    <a:solidFill>
+                      <a:srgbClr val="FFFFFF"/>
+                    </a:solidFill>
+                  </a:tcPr>
+                </a:tc>
+                <a:tc>
+                  <a:txBody>
+                    <a:bodyPr/>
+                    <a:lstStyle/>
+                    <a:p>
+                      <a:pPr algn="r" indent="0" marL="0">
+                        <a:buNone/>
+                      </a:pPr>
+                      <a:r>
+                        <a:rPr lang="en-US" sz="1200" dirty="0">
+                          <a:solidFill>
+                            <a:srgbClr val="1B2A1C"/>
+                          </a:solidFill>
+                          <a:latin typeface="Calibri" pitchFamily="34" charset="0"/>
+                          <a:ea typeface="Calibri" pitchFamily="34" charset="-122"/>
+                          <a:cs typeface="Calibri" pitchFamily="34" charset="-120"/>
+                        </a:rPr>
+                        <a:t>$11 821 212</a:t>
+                      </a:r>
+                      <a:endParaRPr lang="en-US" sz="1200" dirty="0">
+                        <a:latin typeface="Calibri" charset="0"/>
+                        <a:ea typeface="Calibri" charset="0"/>
+                        <a:cs typeface="Calibri" charset="0"/>
+                      </a:endParaRPr>
+                    </a:p>
+                  </a:txBody>
+                  <a:tcPr marL="63500" marR="63500" marT="38100" marB="38100" anchor="ctr">
+                    <a:lnL w="6350" cap="flat" cmpd="sng" algn="ctr">
+                      <a:solidFill>
+                        <a:srgbClr val="D3DBC7"/>
+                      </a:solidFill>
+                      <a:prstDash val="solid"/>
+                      <a:round/>
+                      <a:headEnd type="none" w="med" len="med"/>
+                      <a:tailEnd type="none" w="med" len="med"/>
+                    </a:lnL>
+                    <a:lnR w="6350" cap="flat" cmpd="sng" algn="ctr">
+                      <a:solidFill>
+                        <a:srgbClr val="D3DBC7"/>
+                      </a:solidFill>
+                      <a:prstDash val="solid"/>
+                      <a:round/>
+                      <a:headEnd type="none" w="med" len="med"/>
+                      <a:tailEnd type="none" w="med" len="med"/>
+                    </a:lnR>
+                    <a:lnT w="6350" cap="flat" cmpd="sng" algn="ctr">
+                      <a:solidFill>
+                        <a:srgbClr val="D3DBC7"/>
+                      </a:solidFill>
+                      <a:prstDash val="solid"/>
+                      <a:round/>
+                      <a:headEnd type="none" w="med" len="med"/>
+                      <a:tailEnd type="none" w="med" len="med"/>
+                    </a:lnT>
+                    <a:lnB w="6350" cap="flat" cmpd="sng" algn="ctr">
+                      <a:solidFill>
+                        <a:srgbClr val="D3DBC7"/>
+                      </a:solidFill>
+                      <a:prstDash val="solid"/>
+                      <a:round/>
+                      <a:headEnd type="none" w="med" len="med"/>
+                      <a:tailEnd type="none" w="med" len="med"/>
+                    </a:lnB>
+                    <a:solidFill>
+                      <a:srgbClr val="FFFFFF"/>
+                    </a:solidFill>
+                  </a:tcPr>
+                </a:tc>
+              </a:tr>
+              <a:tr h="384048">
+                <a:tc>
+                  <a:txBody>
+                    <a:bodyPr/>
+                    <a:lstStyle/>
+                    <a:p>
+                      <a:pPr algn="l" indent="0" marL="0">
+                        <a:buNone/>
+                      </a:pPr>
+                      <a:r>
+                        <a:rPr lang="en-US" sz="1200" dirty="0">
+                          <a:solidFill>
+                            <a:srgbClr val="1B2A1C"/>
+                          </a:solidFill>
+                          <a:latin typeface="Calibri" pitchFamily="34" charset="0"/>
+                          <a:ea typeface="Calibri" pitchFamily="34" charset="-122"/>
+                          <a:cs typeface="Calibri" pitchFamily="34" charset="-120"/>
+                        </a:rPr>
+                        <a:t>Preliminaries (мобилизация, персонал, техника)</a:t>
+                      </a:r>
+                      <a:endParaRPr lang="en-US" sz="1200" dirty="0">
+                        <a:latin typeface="Calibri" charset="0"/>
+                        <a:ea typeface="Calibri" charset="0"/>
+                        <a:cs typeface="Calibri" charset="0"/>
+                      </a:endParaRPr>
+                    </a:p>
+                  </a:txBody>
+                  <a:tcPr marL="63500" marR="63500" marT="38100" marB="38100" anchor="ctr">
+                    <a:lnL w="6350" cap="flat" cmpd="sng" algn="ctr">
+                      <a:solidFill>
+                        <a:srgbClr val="D3DBC7"/>
+                      </a:solidFill>
+                      <a:prstDash val="solid"/>
+                      <a:round/>
+                      <a:headEnd type="none" w="med" len="med"/>
+                      <a:tailEnd type="none" w="med" len="med"/>
+                    </a:lnL>
+                    <a:lnR w="6350" cap="flat" cmpd="sng" algn="ctr">
+                      <a:solidFill>
+                        <a:srgbClr val="D3DBC7"/>
+                      </a:solidFill>
+                      <a:prstDash val="solid"/>
+                      <a:round/>
+                      <a:headEnd type="none" w="med" len="med"/>
+                      <a:tailEnd type="none" w="med" len="med"/>
+                    </a:lnR>
+                    <a:lnT w="6350" cap="flat" cmpd="sng" algn="ctr">
+                      <a:solidFill>
+                        <a:srgbClr val="D3DBC7"/>
+                      </a:solidFill>
+                      <a:prstDash val="solid"/>
+                      <a:round/>
+                      <a:headEnd type="none" w="med" len="med"/>
+                      <a:tailEnd type="none" w="med" len="med"/>
+                    </a:lnT>
+                    <a:lnB w="6350" cap="flat" cmpd="sng" algn="ctr">
+                      <a:solidFill>
+                        <a:srgbClr val="D3DBC7"/>
+                      </a:solidFill>
+                      <a:prstDash val="solid"/>
+                      <a:round/>
+                      <a:headEnd type="none" w="med" len="med"/>
+                      <a:tailEnd type="none" w="med" len="med"/>
+                    </a:lnB>
+                    <a:solidFill>
+                      <a:srgbClr val="EEF3E6"/>
+                    </a:solidFill>
+                  </a:tcPr>
+                </a:tc>
+                <a:tc>
+                  <a:txBody>
+                    <a:bodyPr/>
+                    <a:lstStyle/>
+                    <a:p>
+                      <a:pPr algn="r" indent="0" marL="0">
+                        <a:buNone/>
+                      </a:pPr>
+                      <a:r>
+                        <a:rPr lang="en-US" sz="1200" dirty="0">
+                          <a:solidFill>
+                            <a:srgbClr val="1B2A1C"/>
+                          </a:solidFill>
+                          <a:latin typeface="Calibri" pitchFamily="34" charset="0"/>
+                          <a:ea typeface="Calibri" pitchFamily="34" charset="-122"/>
+                          <a:cs typeface="Calibri" pitchFamily="34" charset="-120"/>
+                        </a:rPr>
+                        <a:t>$2 358 200</a:t>
+                      </a:r>
+                      <a:endParaRPr lang="en-US" sz="1200" dirty="0">
+                        <a:latin typeface="Calibri" charset="0"/>
+                        <a:ea typeface="Calibri" charset="0"/>
+                        <a:cs typeface="Calibri" charset="0"/>
+                      </a:endParaRPr>
+                    </a:p>
+                  </a:txBody>
+                  <a:tcPr marL="63500" marR="63500" marT="38100" marB="38100" anchor="ctr">
+                    <a:lnL w="6350" cap="flat" cmpd="sng" algn="ctr">
+                      <a:solidFill>
+                        <a:srgbClr val="D3DBC7"/>
+                      </a:solidFill>
+                      <a:prstDash val="solid"/>
+                      <a:round/>
+                      <a:headEnd type="none" w="med" len="med"/>
+                      <a:tailEnd type="none" w="med" len="med"/>
+                    </a:lnL>
+                    <a:lnR w="6350" cap="flat" cmpd="sng" algn="ctr">
+                      <a:solidFill>
+                        <a:srgbClr val="D3DBC7"/>
+                      </a:solidFill>
+                      <a:prstDash val="solid"/>
+                      <a:round/>
+                      <a:headEnd type="none" w="med" len="med"/>
+                      <a:tailEnd type="none" w="med" len="med"/>
+                    </a:lnR>
+                    <a:lnT w="6350" cap="flat" cmpd="sng" algn="ctr">
+                      <a:solidFill>
+                        <a:srgbClr val="D3DBC7"/>
+                      </a:solidFill>
+                      <a:prstDash val="solid"/>
+                      <a:round/>
+                      <a:headEnd type="none" w="med" len="med"/>
+                      <a:tailEnd type="none" w="med" len="med"/>
+                    </a:lnT>
+                    <a:lnB w="6350" cap="flat" cmpd="sng" algn="ctr">
+                      <a:solidFill>
+                        <a:srgbClr val="D3DBC7"/>
+                      </a:solidFill>
+                      <a:prstDash val="solid"/>
+                      <a:round/>
+                      <a:headEnd type="none" w="med" len="med"/>
+                      <a:tailEnd type="none" w="med" len="med"/>
+                    </a:lnB>
+                    <a:solidFill>
+                      <a:srgbClr val="EEF3E6"/>
+                    </a:solidFill>
+                  </a:tcPr>
+                </a:tc>
+              </a:tr>
+              <a:tr h="384048">
+                <a:tc>
+                  <a:txBody>
+                    <a:bodyPr/>
+                    <a:lstStyle/>
+                    <a:p>
+                      <a:pPr algn="l" indent="0" marL="0">
+                        <a:buNone/>
+                      </a:pPr>
+                      <a:r>
+                        <a:rPr lang="en-US" sz="1200" dirty="0">
+                          <a:solidFill>
+                            <a:srgbClr val="1B2A1C"/>
+                          </a:solidFill>
+                          <a:latin typeface="Calibri" pitchFamily="34" charset="0"/>
+                          <a:ea typeface="Calibri" pitchFamily="34" charset="-122"/>
+                          <a:cs typeface="Calibri" pitchFamily="34" charset="-120"/>
+                        </a:rPr>
+                        <a:t>Прочие объекты (здания, лагуна, ОСВ, склад, благоустр.)</a:t>
+                      </a:r>
+                      <a:endParaRPr lang="en-US" sz="1200" dirty="0">
+                        <a:latin typeface="Calibri" charset="0"/>
+                        <a:ea typeface="Calibri" charset="0"/>
+                        <a:cs typeface="Calibri" charset="0"/>
+                      </a:endParaRPr>
+                    </a:p>
+                  </a:txBody>
+                  <a:tcPr marL="63500" marR="63500" marT="38100" marB="38100" anchor="ctr">
+                    <a:lnL w="6350" cap="flat" cmpd="sng" algn="ctr">
+                      <a:solidFill>
+                        <a:srgbClr val="D3DBC7"/>
+                      </a:solidFill>
+                      <a:prstDash val="solid"/>
+                      <a:round/>
+                      <a:headEnd type="none" w="med" len="med"/>
+                      <a:tailEnd type="none" w="med" len="med"/>
+                    </a:lnL>
+                    <a:lnR w="6350" cap="flat" cmpd="sng" algn="ctr">
+                      <a:solidFill>
+                        <a:srgbClr val="D3DBC7"/>
+                      </a:solidFill>
+                      <a:prstDash val="solid"/>
+                      <a:round/>
+                      <a:headEnd type="none" w="med" len="med"/>
+                      <a:tailEnd type="none" w="med" len="med"/>
+                    </a:lnR>
+                    <a:lnT w="6350" cap="flat" cmpd="sng" algn="ctr">
+                      <a:solidFill>
+                        <a:srgbClr val="D3DBC7"/>
+                      </a:solidFill>
+                      <a:prstDash val="solid"/>
+                      <a:round/>
+                      <a:headEnd type="none" w="med" len="med"/>
+                      <a:tailEnd type="none" w="med" len="med"/>
+                    </a:lnT>
+                    <a:lnB w="6350" cap="flat" cmpd="sng" algn="ctr">
+                      <a:solidFill>
+                        <a:srgbClr val="D3DBC7"/>
+                      </a:solidFill>
+                      <a:prstDash val="solid"/>
+                      <a:round/>
+                      <a:headEnd type="none" w="med" len="med"/>
+                      <a:tailEnd type="none" w="med" len="med"/>
+                    </a:lnB>
+                    <a:solidFill>
+                      <a:srgbClr val="FFFFFF"/>
+                    </a:solidFill>
+                  </a:tcPr>
+                </a:tc>
+                <a:tc>
+                  <a:txBody>
+                    <a:bodyPr/>
+                    <a:lstStyle/>
+                    <a:p>
+                      <a:pPr algn="r" indent="0" marL="0">
+                        <a:buNone/>
+                      </a:pPr>
+                      <a:r>
+                        <a:rPr lang="en-US" sz="1200" dirty="0">
+                          <a:solidFill>
+                            <a:srgbClr val="1B2A1C"/>
+                          </a:solidFill>
+                          <a:latin typeface="Calibri" pitchFamily="34" charset="0"/>
+                          <a:ea typeface="Calibri" pitchFamily="34" charset="-122"/>
+                          <a:cs typeface="Calibri" pitchFamily="34" charset="-120"/>
+                        </a:rPr>
+                        <a:t>$6 052 006</a:t>
+                      </a:r>
+                      <a:endParaRPr lang="en-US" sz="1200" dirty="0">
+                        <a:latin typeface="Calibri" charset="0"/>
+                        <a:ea typeface="Calibri" charset="0"/>
+                        <a:cs typeface="Calibri" charset="0"/>
+                      </a:endParaRPr>
+                    </a:p>
+                  </a:txBody>
+                  <a:tcPr marL="63500" marR="63500" marT="38100" marB="38100" anchor="ctr">
+                    <a:lnL w="6350" cap="flat" cmpd="sng" algn="ctr">
+                      <a:solidFill>
+                        <a:srgbClr val="D3DBC7"/>
+                      </a:solidFill>
+                      <a:prstDash val="solid"/>
+                      <a:round/>
+                      <a:headEnd type="none" w="med" len="med"/>
+                      <a:tailEnd type="none" w="med" len="med"/>
+                    </a:lnL>
+                    <a:lnR w="6350" cap="flat" cmpd="sng" algn="ctr">
+                      <a:solidFill>
+                        <a:srgbClr val="D3DBC7"/>
+                      </a:solidFill>
+                      <a:prstDash val="solid"/>
+                      <a:round/>
+                      <a:headEnd type="none" w="med" len="med"/>
+                      <a:tailEnd type="none" w="med" len="med"/>
+                    </a:lnR>
+                    <a:lnT w="6350" cap="flat" cmpd="sng" algn="ctr">
+                      <a:solidFill>
+                        <a:srgbClr val="D3DBC7"/>
+                      </a:solidFill>
+                      <a:prstDash val="solid"/>
+                      <a:round/>
+                      <a:headEnd type="none" w="med" len="med"/>
+                      <a:tailEnd type="none" w="med" len="med"/>
+                    </a:lnT>
+                    <a:lnB w="6350" cap="flat" cmpd="sng" algn="ctr">
+                      <a:solidFill>
+                        <a:srgbClr val="D3DBC7"/>
+                      </a:solidFill>
+                      <a:prstDash val="solid"/>
+                      <a:round/>
+                      <a:headEnd type="none" w="med" len="med"/>
+                      <a:tailEnd type="none" w="med" len="med"/>
+                    </a:lnB>
+                    <a:solidFill>
+                      <a:srgbClr val="FFFFFF"/>
+                    </a:solidFill>
+                  </a:tcPr>
+                </a:tc>
+              </a:tr>
+              <a:tr h="384048">
+                <a:tc>
+                  <a:txBody>
+                    <a:bodyPr/>
+                    <a:lstStyle/>
+                    <a:p>
+                      <a:pPr algn="l" indent="0" marL="0">
+                        <a:buNone/>
+                      </a:pPr>
+                      <a:r>
+                        <a:rPr lang="en-US" sz="1200" dirty="0">
+                          <a:solidFill>
+                            <a:srgbClr val="1B2A1C"/>
+                          </a:solidFill>
+                          <a:latin typeface="Calibri" pitchFamily="34" charset="0"/>
+                          <a:ea typeface="Calibri" pitchFamily="34" charset="-122"/>
+                          <a:cs typeface="Calibri" pitchFamily="34" charset="-120"/>
+                        </a:rPr>
+                        <a:t>Накладные и прибыль ГенПодрядчика (~11,6%)</a:t>
+                      </a:r>
+                      <a:endParaRPr lang="en-US" sz="1200" dirty="0">
+                        <a:latin typeface="Calibri" charset="0"/>
+                        <a:ea typeface="Calibri" charset="0"/>
+                        <a:cs typeface="Calibri" charset="0"/>
+                      </a:endParaRPr>
+                    </a:p>
+                  </a:txBody>
+                  <a:tcPr marL="63500" marR="63500" marT="38100" marB="38100" anchor="ctr">
+                    <a:lnL w="6350" cap="flat" cmpd="sng" algn="ctr">
+                      <a:solidFill>
+                        <a:srgbClr val="D3DBC7"/>
+                      </a:solidFill>
+                      <a:prstDash val="solid"/>
+                      <a:round/>
+                      <a:headEnd type="none" w="med" len="med"/>
+                      <a:tailEnd type="none" w="med" len="med"/>
+                    </a:lnL>
+                    <a:lnR w="6350" cap="flat" cmpd="sng" algn="ctr">
+                      <a:solidFill>
+                        <a:srgbClr val="D3DBC7"/>
+                      </a:solidFill>
+                      <a:prstDash val="solid"/>
+                      <a:round/>
+                      <a:headEnd type="none" w="med" len="med"/>
+                      <a:tailEnd type="none" w="med" len="med"/>
+                    </a:lnR>
+                    <a:lnT w="6350" cap="flat" cmpd="sng" algn="ctr">
+                      <a:solidFill>
+                        <a:srgbClr val="D3DBC7"/>
+                      </a:solidFill>
+                      <a:prstDash val="solid"/>
+                      <a:round/>
+                      <a:headEnd type="none" w="med" len="med"/>
+                      <a:tailEnd type="none" w="med" len="med"/>
+                    </a:lnT>
+                    <a:lnB w="6350" cap="flat" cmpd="sng" algn="ctr">
+                      <a:solidFill>
+                        <a:srgbClr val="D3DBC7"/>
+                      </a:solidFill>
+                      <a:prstDash val="solid"/>
+                      <a:round/>
+                      <a:headEnd type="none" w="med" len="med"/>
+                      <a:tailEnd type="none" w="med" len="med"/>
+                    </a:lnB>
+                    <a:solidFill>
+                      <a:srgbClr val="EEF3E6"/>
+                    </a:solidFill>
+                  </a:tcPr>
+                </a:tc>
+                <a:tc>
+                  <a:txBody>
+                    <a:bodyPr/>
+                    <a:lstStyle/>
+                    <a:p>
+                      <a:pPr algn="r" indent="0" marL="0">
+                        <a:buNone/>
+                      </a:pPr>
+                      <a:r>
+                        <a:rPr lang="en-US" sz="1200" dirty="0">
+                          <a:solidFill>
+                            <a:srgbClr val="1B2A1C"/>
+                          </a:solidFill>
+                          <a:latin typeface="Calibri" pitchFamily="34" charset="0"/>
+                          <a:ea typeface="Calibri" pitchFamily="34" charset="-122"/>
+                          <a:cs typeface="Calibri" pitchFamily="34" charset="-120"/>
+                        </a:rPr>
+                        <a:t>$4 242 724</a:t>
+                      </a:r>
+                      <a:endParaRPr lang="en-US" sz="1200" dirty="0">
+                        <a:latin typeface="Calibri" charset="0"/>
+                        <a:ea typeface="Calibri" charset="0"/>
+                        <a:cs typeface="Calibri" charset="0"/>
+                      </a:endParaRPr>
+                    </a:p>
+                  </a:txBody>
+                  <a:tcPr marL="63500" marR="63500" marT="38100" marB="38100" anchor="ctr">
+                    <a:lnL w="6350" cap="flat" cmpd="sng" algn="ctr">
+                      <a:solidFill>
+                        <a:srgbClr val="D3DBC7"/>
+                      </a:solidFill>
+                      <a:prstDash val="solid"/>
+                      <a:round/>
+                      <a:headEnd type="none" w="med" len="med"/>
+                      <a:tailEnd type="none" w="med" len="med"/>
+                    </a:lnL>
+                    <a:lnR w="6350" cap="flat" cmpd="sng" algn="ctr">
+                      <a:solidFill>
+                        <a:srgbClr val="D3DBC7"/>
+                      </a:solidFill>
+                      <a:prstDash val="solid"/>
+                      <a:round/>
+                      <a:headEnd type="none" w="med" len="med"/>
+                      <a:tailEnd type="none" w="med" len="med"/>
+                    </a:lnR>
+                    <a:lnT w="6350" cap="flat" cmpd="sng" algn="ctr">
+                      <a:solidFill>
+                        <a:srgbClr val="D3DBC7"/>
+                      </a:solidFill>
+                      <a:prstDash val="solid"/>
+                      <a:round/>
+                      <a:headEnd type="none" w="med" len="med"/>
+                      <a:tailEnd type="none" w="med" len="med"/>
+                    </a:lnT>
+                    <a:lnB w="6350" cap="flat" cmpd="sng" algn="ctr">
+                      <a:solidFill>
+                        <a:srgbClr val="D3DBC7"/>
+                      </a:solidFill>
+                      <a:prstDash val="solid"/>
+                      <a:round/>
+                      <a:headEnd type="none" w="med" len="med"/>
+                      <a:tailEnd type="none" w="med" len="med"/>
+                    </a:lnB>
+                    <a:solidFill>
+                      <a:srgbClr val="EEF3E6"/>
+                    </a:solidFill>
+                  </a:tcPr>
+                </a:tc>
+              </a:tr>
+              <a:tr h="384048">
+                <a:tc>
+                  <a:txBody>
+                    <a:bodyPr/>
+                    <a:lstStyle/>
+                    <a:p>
+                      <a:pPr algn="l" indent="0" marL="0">
+                        <a:buNone/>
+                      </a:pPr>
+                      <a:r>
+                        <a:rPr lang="en-US" sz="1200" b="1" dirty="0">
+                          <a:solidFill>
+                            <a:srgbClr val="1B2A1C"/>
+                          </a:solidFill>
+                          <a:latin typeface="Calibri" pitchFamily="34" charset="0"/>
+                          <a:ea typeface="Calibri" pitchFamily="34" charset="-122"/>
+                          <a:cs typeface="Calibri" pitchFamily="34" charset="-120"/>
+                        </a:rPr>
+                        <a:t>ИТОГО (без НДС)</a:t>
+                      </a:r>
+                      <a:endParaRPr lang="en-US" sz="1200" dirty="0">
+                        <a:latin typeface="Calibri" charset="0"/>
+                        <a:ea typeface="Calibri" charset="0"/>
+                        <a:cs typeface="Calibri" charset="0"/>
+                      </a:endParaRPr>
+                    </a:p>
+                  </a:txBody>
+                  <a:tcPr marL="63500" marR="63500" marT="38100" marB="38100" anchor="ctr">
+                    <a:lnL w="6350" cap="flat" cmpd="sng" algn="ctr">
+                      <a:solidFill>
+                        <a:srgbClr val="D3DBC7"/>
+                      </a:solidFill>
+                      <a:prstDash val="solid"/>
+                      <a:round/>
+                      <a:headEnd type="none" w="med" len="med"/>
+                      <a:tailEnd type="none" w="med" len="med"/>
+                    </a:lnL>
+                    <a:lnR w="6350" cap="flat" cmpd="sng" algn="ctr">
+                      <a:solidFill>
+                        <a:srgbClr val="D3DBC7"/>
+                      </a:solidFill>
+                      <a:prstDash val="solid"/>
+                      <a:round/>
+                      <a:headEnd type="none" w="med" len="med"/>
+                      <a:tailEnd type="none" w="med" len="med"/>
+                    </a:lnR>
+                    <a:lnT w="6350" cap="flat" cmpd="sng" algn="ctr">
+                      <a:solidFill>
+                        <a:srgbClr val="D3DBC7"/>
+                      </a:solidFill>
+                      <a:prstDash val="solid"/>
+                      <a:round/>
+                      <a:headEnd type="none" w="med" len="med"/>
+                      <a:tailEnd type="none" w="med" len="med"/>
+                    </a:lnT>
+                    <a:lnB w="6350" cap="flat" cmpd="sng" algn="ctr">
+                      <a:solidFill>
+                        <a:srgbClr val="D3DBC7"/>
+                      </a:solidFill>
+                      <a:prstDash val="solid"/>
+                      <a:round/>
+                      <a:headEnd type="none" w="med" len="med"/>
+                      <a:tailEnd type="none" w="med" len="med"/>
+                    </a:lnB>
+                    <a:solidFill>
+                      <a:srgbClr val="97BC62"/>
+                    </a:solidFill>
+                  </a:tcPr>
+                </a:tc>
+                <a:tc>
+                  <a:txBody>
+                    <a:bodyPr/>
+                    <a:lstStyle/>
+                    <a:p>
+                      <a:pPr algn="r" indent="0" marL="0">
+                        <a:buNone/>
+                      </a:pPr>
+                      <a:r>
+                        <a:rPr lang="en-US" sz="1200" b="1" dirty="0">
+                          <a:solidFill>
+                            <a:srgbClr val="1B2A1C"/>
+                          </a:solidFill>
+                          <a:latin typeface="Calibri" pitchFamily="34" charset="0"/>
+                          <a:ea typeface="Calibri" pitchFamily="34" charset="-122"/>
+                          <a:cs typeface="Calibri" pitchFamily="34" charset="-120"/>
+                        </a:rPr>
+                        <a:t>$40 722 753</a:t>
+                      </a:r>
+                      <a:endParaRPr lang="en-US" sz="1200" dirty="0">
+                        <a:latin typeface="Calibri" charset="0"/>
+                        <a:ea typeface="Calibri" charset="0"/>
+                        <a:cs typeface="Calibri" charset="0"/>
+                      </a:endParaRPr>
+                    </a:p>
+                  </a:txBody>
+                  <a:tcPr marL="63500" marR="63500" marT="38100" marB="38100" anchor="ctr">
+                    <a:lnL w="6350" cap="flat" cmpd="sng" algn="ctr">
+                      <a:solidFill>
+                        <a:srgbClr val="D3DBC7"/>
+                      </a:solidFill>
+                      <a:prstDash val="solid"/>
+                      <a:round/>
+                      <a:headEnd type="none" w="med" len="med"/>
+                      <a:tailEnd type="none" w="med" len="med"/>
+                    </a:lnL>
+                    <a:lnR w="6350" cap="flat" cmpd="sng" algn="ctr">
+                      <a:solidFill>
+                        <a:srgbClr val="D3DBC7"/>
+                      </a:solidFill>
+                      <a:prstDash val="solid"/>
+                      <a:round/>
+                      <a:headEnd type="none" w="med" len="med"/>
+                      <a:tailEnd type="none" w="med" len="med"/>
+                    </a:lnR>
+                    <a:lnT w="6350" cap="flat" cmpd="sng" algn="ctr">
+                      <a:solidFill>
+                        <a:srgbClr val="D3DBC7"/>
+                      </a:solidFill>
+                      <a:prstDash val="solid"/>
+                      <a:round/>
+                      <a:headEnd type="none" w="med" len="med"/>
+                      <a:tailEnd type="none" w="med" len="med"/>
+                    </a:lnT>
+                    <a:lnB w="6350" cap="flat" cmpd="sng" algn="ctr">
+                      <a:solidFill>
+                        <a:srgbClr val="D3DBC7"/>
+                      </a:solidFill>
+                      <a:prstDash val="solid"/>
+                      <a:round/>
+                      <a:headEnd type="none" w="med" len="med"/>
+                      <a:tailEnd type="none" w="med" len="med"/>
+                    </a:lnB>
+                    <a:solidFill>
+                      <a:srgbClr val="97BC62"/>
+                    </a:solidFill>
+                  </a:tcPr>
+                </a:tc>
+              </a:tr>
+            </a:tbl>
+          </a:graphicData>
+        </a:graphic>
+      </p:graphicFrame>
       <p:sp>
         <p:nvSpPr>
-          <p:cNvPr id="4" name="Shape 2"/>
+          <p:cNvPr id="5" name="Shape 2"/>
           <p:cNvSpPr/>
           <p:nvPr/>
         </p:nvSpPr>
         <p:spPr>
           <a:xfrm>
-            <a:off x="731520" y="1737360"/>
-            <a:ext cx="566928" cy="566928"/>
+            <a:off x="8869680" y="1645920"/>
+            <a:ext cx="2743200" cy="2148840"/>
           </a:xfrm>
-          <a:prstGeom prst="ellipse">
-            <a:avLst/>
+          <a:prstGeom prst="roundRect">
+            <a:avLst>
+              <a:gd name="adj" fmla="val 4255"/>
+            </a:avLst>
           </a:prstGeom>
           <a:solidFill>
-            <a:srgbClr val="E8A317"/>
+            <a:srgbClr val="2C5F2D"/>
           </a:solidFill>
           <a:ln/>
+          <a:effectLst>
+            <a:outerShdw sx="100000" sy="100000" kx="0" ky="0" algn="bl" rotWithShape="0" blurRad="101600" dist="38100" dir="5400000">
+              <a:srgbClr val="3B4A3B">
+                <a:alpha val="35000"/>
+              </a:srgbClr>
+            </a:outerShdw>
+          </a:effectLst>
         </p:spPr>
       </p:sp>
       <p:sp>
         <p:nvSpPr>
-          <p:cNvPr id="5" name="Text 3"/>
+          <p:cNvPr id="6" name="Text 3"/>
           <p:cNvSpPr/>
           <p:nvPr/>
         </p:nvSpPr>
         <p:spPr>
           <a:xfrm>
-            <a:off x="731520" y="1737360"/>
-            <a:ext cx="566928" cy="566928"/>
-          </a:xfrm>
-          <a:prstGeom prst="rect">
-            <a:avLst/>
-          </a:prstGeom>
-          <a:noFill/>
-          <a:ln/>
-        </p:spPr>
-        <p:txBody>
-          <a:bodyPr wrap="square" lIns="0" tIns="0" rIns="0" bIns="0" rtlCol="0" anchor="ctr"/>
-          <a:lstStyle/>
-          <a:p>
-            <a:pPr algn="ctr" indent="0" marL="0">
-              <a:buNone/>
-            </a:pPr>
-            <a:r>
-              <a:rPr lang="en-US" sz="2400" b="1" dirty="0">
-                <a:solidFill>
-                  <a:srgbClr val="FFFFFF"/>
-                </a:solidFill>
-                <a:latin typeface="Cambria" pitchFamily="34" charset="0"/>
-                <a:ea typeface="Cambria" pitchFamily="34" charset="-122"/>
-                <a:cs typeface="Cambria" pitchFamily="34" charset="-120"/>
-              </a:rPr>
-              <a:t>1</a:t>
-            </a:r>
-            <a:endParaRPr lang="en-US" sz="2400" dirty="0"/>
-          </a:p>
-        </p:txBody>
-      </p:sp>
-      <p:sp>
-        <p:nvSpPr>
-          <p:cNvPr id="6" name="Text 4"/>
-          <p:cNvSpPr/>
-          <p:nvPr/>
-        </p:nvSpPr>
-        <p:spPr>
-          <a:xfrm>
-            <a:off x="1554480" y="1719072"/>
-            <a:ext cx="9966960" cy="365760"/>
+            <a:off x="9052560" y="1874520"/>
+            <a:ext cx="2377440" cy="320040"/>
           </a:xfrm>
           <a:prstGeom prst="rect">
             <a:avLst/>
@@ -16452,30 +20836,30 @@
               <a:buNone/>
             </a:pPr>
             <a:r>
-              <a:rPr lang="en-US" sz="1700" b="1" dirty="0">
+              <a:rPr lang="en-US" sz="1100" b="1" spc="100" kern="0" dirty="0">
                 <a:solidFill>
-                  <a:srgbClr val="1B2A1C"/>
+                  <a:srgbClr val="97BC62"/>
                 </a:solidFill>
                 <a:latin typeface="Calibri" pitchFamily="34" charset="0"/>
                 <a:ea typeface="Calibri" pitchFamily="34" charset="-122"/>
                 <a:cs typeface="Calibri" pitchFamily="34" charset="-120"/>
               </a:rPr>
-              <a:t>Расценить электромонтаж</a:t>
+              <a:t>ПОЛНЫЙ CAPEX 2024</a:t>
             </a:r>
-            <a:endParaRPr lang="en-US" sz="1700" dirty="0"/>
+            <a:endParaRPr lang="en-US" sz="1100" dirty="0"/>
           </a:p>
         </p:txBody>
       </p:sp>
       <p:sp>
         <p:nvSpPr>
-          <p:cNvPr id="7" name="Text 5"/>
+          <p:cNvPr id="7" name="Text 4"/>
           <p:cNvSpPr/>
           <p:nvPr/>
         </p:nvSpPr>
         <p:spPr>
           <a:xfrm>
-            <a:off x="1554480" y="2057400"/>
-            <a:ext cx="9966960" cy="365760"/>
+            <a:off x="9006840" y="2240280"/>
+            <a:ext cx="2514600" cy="914400"/>
           </a:xfrm>
           <a:prstGeom prst="rect">
             <a:avLst/>
@@ -16491,66 +20875,7 @@
               <a:buNone/>
             </a:pPr>
             <a:r>
-              <a:rPr lang="en-US" sz="1300" dirty="0">
-                <a:solidFill>
-                  <a:srgbClr val="5B6B5C"/>
-                </a:solidFill>
-                <a:latin typeface="Calibri" pitchFamily="34" charset="0"/>
-                <a:ea typeface="Calibri" pitchFamily="34" charset="-122"/>
-                <a:cs typeface="Calibri" pitchFamily="34" charset="-120"/>
-              </a:rPr>
-              <a:t>Заполнить BOQ (6 фаз, ~409 позиций) — сейчас нулевая строка в бюджете</a:t>
-            </a:r>
-            <a:endParaRPr lang="en-US" sz="1300" dirty="0"/>
-          </a:p>
-        </p:txBody>
-      </p:sp>
-      <p:sp>
-        <p:nvSpPr>
-          <p:cNvPr id="8" name="Shape 6"/>
-          <p:cNvSpPr/>
-          <p:nvPr/>
-        </p:nvSpPr>
-        <p:spPr>
-          <a:xfrm>
-            <a:off x="731520" y="2670048"/>
-            <a:ext cx="566928" cy="566928"/>
-          </a:xfrm>
-          <a:prstGeom prst="ellipse">
-            <a:avLst/>
-          </a:prstGeom>
-          <a:solidFill>
-            <a:srgbClr val="2C5F2D"/>
-          </a:solidFill>
-          <a:ln/>
-        </p:spPr>
-      </p:sp>
-      <p:sp>
-        <p:nvSpPr>
-          <p:cNvPr id="9" name="Text 7"/>
-          <p:cNvSpPr/>
-          <p:nvPr/>
-        </p:nvSpPr>
-        <p:spPr>
-          <a:xfrm>
-            <a:off x="731520" y="2670048"/>
-            <a:ext cx="566928" cy="566928"/>
-          </a:xfrm>
-          <a:prstGeom prst="rect">
-            <a:avLst/>
-          </a:prstGeom>
-          <a:noFill/>
-          <a:ln/>
-        </p:spPr>
-        <p:txBody>
-          <a:bodyPr wrap="square" lIns="0" tIns="0" rIns="0" bIns="0" rtlCol="0" anchor="ctr"/>
-          <a:lstStyle/>
-          <a:p>
-            <a:pPr algn="ctr" indent="0" marL="0">
-              <a:buNone/>
-            </a:pPr>
-            <a:r>
-              <a:rPr lang="en-US" sz="2400" b="1" dirty="0">
+              <a:rPr lang="en-US" sz="5200" b="1" dirty="0">
                 <a:solidFill>
                   <a:srgbClr val="FFFFFF"/>
                 </a:solidFill>
@@ -16558,22 +20883,22 @@
                 <a:ea typeface="Cambria" pitchFamily="34" charset="-122"/>
                 <a:cs typeface="Cambria" pitchFamily="34" charset="-120"/>
               </a:rPr>
-              <a:t>2</a:t>
+              <a:t>$40,7</a:t>
             </a:r>
-            <a:endParaRPr lang="en-US" sz="2400" dirty="0"/>
+            <a:endParaRPr lang="en-US" sz="5200" dirty="0"/>
           </a:p>
         </p:txBody>
       </p:sp>
       <p:sp>
         <p:nvSpPr>
-          <p:cNvPr id="10" name="Text 8"/>
+          <p:cNvPr id="8" name="Text 5"/>
           <p:cNvSpPr/>
           <p:nvPr/>
         </p:nvSpPr>
         <p:spPr>
           <a:xfrm>
-            <a:off x="1554480" y="2651760"/>
-            <a:ext cx="9966960" cy="365760"/>
+            <a:off x="9052560" y="3200400"/>
+            <a:ext cx="2377440" cy="365760"/>
           </a:xfrm>
           <a:prstGeom prst="rect">
             <a:avLst/>
@@ -16589,30 +20914,57 @@
               <a:buNone/>
             </a:pPr>
             <a:r>
-              <a:rPr lang="en-US" sz="1700" b="1" dirty="0">
+              <a:rPr lang="en-US" sz="1400" b="1" dirty="0">
                 <a:solidFill>
-                  <a:srgbClr val="1B2A1C"/>
+                  <a:srgbClr val="E8A317"/>
                 </a:solidFill>
                 <a:latin typeface="Calibri" pitchFamily="34" charset="0"/>
                 <a:ea typeface="Calibri" pitchFamily="34" charset="-122"/>
                 <a:cs typeface="Calibri" pitchFamily="34" charset="-120"/>
               </a:rPr>
-              <a:t>Собрать полный CAPEX</a:t>
+              <a:t>млн US$, без НДС</a:t>
             </a:r>
-            <a:endParaRPr lang="en-US" sz="1700" dirty="0"/>
+            <a:endParaRPr lang="en-US" sz="1400" dirty="0"/>
           </a:p>
         </p:txBody>
       </p:sp>
       <p:sp>
         <p:nvSpPr>
-          <p:cNvPr id="11" name="Text 9"/>
+          <p:cNvPr id="9" name="Shape 6"/>
           <p:cNvSpPr/>
           <p:nvPr/>
         </p:nvSpPr>
         <p:spPr>
           <a:xfrm>
-            <a:off x="1554480" y="2990088"/>
-            <a:ext cx="9966960" cy="365760"/>
+            <a:off x="8869680" y="3977640"/>
+            <a:ext cx="2743200" cy="1051560"/>
+          </a:xfrm>
+          <a:prstGeom prst="roundRect">
+            <a:avLst>
+              <a:gd name="adj" fmla="val 8696"/>
+            </a:avLst>
+          </a:prstGeom>
+          <a:solidFill>
+            <a:srgbClr val="FFFFFF"/>
+          </a:solidFill>
+          <a:ln w="12700">
+            <a:solidFill>
+              <a:srgbClr val="E2E7DB"/>
+            </a:solidFill>
+            <a:prstDash val="solid"/>
+          </a:ln>
+        </p:spPr>
+      </p:sp>
+      <p:sp>
+        <p:nvSpPr>
+          <p:cNvPr id="10" name="Text 7"/>
+          <p:cNvSpPr/>
+          <p:nvPr/>
+        </p:nvSpPr>
+        <p:spPr>
+          <a:xfrm>
+            <a:off x="9052560" y="4114800"/>
+            <a:ext cx="2377440" cy="457200"/>
           </a:xfrm>
           <a:prstGeom prst="rect">
             <a:avLst/>
@@ -16628,74 +20980,15 @@
               <a:buNone/>
             </a:pPr>
             <a:r>
-              <a:rPr lang="en-US" sz="1300" dirty="0">
-                <a:solidFill>
-                  <a:srgbClr val="5B6B5C"/>
-                </a:solidFill>
-                <a:latin typeface="Calibri" pitchFamily="34" charset="0"/>
-                <a:ea typeface="Calibri" pitchFamily="34" charset="-122"/>
-                <a:cs typeface="Calibri" pitchFamily="34" charset="-120"/>
-              </a:rPr>
-              <a:t>Добавить СМР, монтаж, ПНР, логистику, таможню, НДС, инжиниринг, резерв</a:t>
-            </a:r>
-            <a:endParaRPr lang="en-US" sz="1300" dirty="0"/>
-          </a:p>
-        </p:txBody>
-      </p:sp>
-      <p:sp>
-        <p:nvSpPr>
-          <p:cNvPr id="12" name="Shape 10"/>
-          <p:cNvSpPr/>
-          <p:nvPr/>
-        </p:nvSpPr>
-        <p:spPr>
-          <a:xfrm>
-            <a:off x="731520" y="3602736"/>
-            <a:ext cx="566928" cy="566928"/>
-          </a:xfrm>
-          <a:prstGeom prst="ellipse">
-            <a:avLst/>
-          </a:prstGeom>
-          <a:solidFill>
-            <a:srgbClr val="2C5F2D"/>
-          </a:solidFill>
-          <a:ln/>
-        </p:spPr>
-      </p:sp>
-      <p:sp>
-        <p:nvSpPr>
-          <p:cNvPr id="13" name="Text 11"/>
-          <p:cNvSpPr/>
-          <p:nvPr/>
-        </p:nvSpPr>
-        <p:spPr>
-          <a:xfrm>
-            <a:off x="731520" y="3602736"/>
-            <a:ext cx="566928" cy="566928"/>
-          </a:xfrm>
-          <a:prstGeom prst="rect">
-            <a:avLst/>
-          </a:prstGeom>
-          <a:noFill/>
-          <a:ln/>
-        </p:spPr>
-        <p:txBody>
-          <a:bodyPr wrap="square" lIns="0" tIns="0" rIns="0" bIns="0" rtlCol="0" anchor="ctr"/>
-          <a:lstStyle/>
-          <a:p>
-            <a:pPr algn="ctr" indent="0" marL="0">
-              <a:buNone/>
-            </a:pPr>
-            <a:r>
               <a:rPr lang="en-US" sz="2400" b="1" dirty="0">
                 <a:solidFill>
-                  <a:srgbClr val="FFFFFF"/>
+                  <a:srgbClr val="2C5F2D"/>
                 </a:solidFill>
                 <a:latin typeface="Cambria" pitchFamily="34" charset="0"/>
                 <a:ea typeface="Cambria" pitchFamily="34" charset="-122"/>
                 <a:cs typeface="Cambria" pitchFamily="34" charset="-120"/>
               </a:rPr>
-              <a:t>3</a:t>
+              <a:t>$16,57 млн</a:t>
             </a:r>
             <a:endParaRPr lang="en-US" sz="2400" dirty="0"/>
           </a:p>
@@ -16703,14 +20996,14 @@
       </p:sp>
       <p:sp>
         <p:nvSpPr>
-          <p:cNvPr id="14" name="Text 12"/>
+          <p:cNvPr id="11" name="Text 8"/>
           <p:cNvSpPr/>
           <p:nvPr/>
         </p:nvSpPr>
         <p:spPr>
           <a:xfrm>
-            <a:off x="1554480" y="3584448"/>
-            <a:ext cx="9966960" cy="365760"/>
+            <a:off x="9052560" y="4572000"/>
+            <a:ext cx="2423160" cy="411480"/>
           </a:xfrm>
           <a:prstGeom prst="rect">
             <a:avLst/>
@@ -16726,30 +21019,30 @@
               <a:buNone/>
             </a:pPr>
             <a:r>
-              <a:rPr lang="en-US" sz="1700" b="1" dirty="0">
+              <a:rPr lang="en-US" sz="1050" dirty="0">
                 <a:solidFill>
-                  <a:srgbClr val="1B2A1C"/>
+                  <a:srgbClr val="5B6B5C"/>
                 </a:solidFill>
                 <a:latin typeface="Calibri" pitchFamily="34" charset="0"/>
                 <a:ea typeface="Calibri" pitchFamily="34" charset="-122"/>
                 <a:cs typeface="Calibri" pitchFamily="34" charset="-120"/>
               </a:rPr>
-              <a:t>Свести в единую валюту</a:t>
+              <a:t>в т.ч. строительная часть (Civil Works)</a:t>
             </a:r>
-            <a:endParaRPr lang="en-US" sz="1700" dirty="0"/>
+            <a:endParaRPr lang="en-US" sz="1050" dirty="0"/>
           </a:p>
         </p:txBody>
       </p:sp>
       <p:sp>
         <p:nvSpPr>
-          <p:cNvPr id="15" name="Text 13"/>
+          <p:cNvPr id="12" name="Text 9"/>
           <p:cNvSpPr/>
           <p:nvPr/>
         </p:nvSpPr>
         <p:spPr>
           <a:xfrm>
-            <a:off x="1554480" y="3922776"/>
-            <a:ext cx="9966960" cy="365760"/>
+            <a:off x="594360" y="5760720"/>
+            <a:ext cx="10972800" cy="548640"/>
           </a:xfrm>
           <a:prstGeom prst="rect">
             <a:avLst/>
@@ -16765,7 +21058,7 @@
               <a:buNone/>
             </a:pPr>
             <a:r>
-              <a:rPr lang="en-US" sz="1300" dirty="0">
+              <a:rPr lang="en-US" sz="1200" i="1" dirty="0">
                 <a:solidFill>
                   <a:srgbClr val="5B6B5C"/>
                 </a:solidFill>
@@ -16773,283 +21066,9 @@
                 <a:ea typeface="Calibri" pitchFamily="34" charset="-122"/>
                 <a:cs typeface="Calibri" pitchFamily="34" charset="-120"/>
               </a:rPr>
-              <a:t>Зафиксировать курс EUR/USD/KZT на дату; убрать валютный разнобой</a:t>
+              <a:t>Файлы 2026 обновляют только оборудование внутри этого же проекта. ТЭО-2024 — источник полного CAPEX, которого нет в прайсах 2026.</a:t>
             </a:r>
-            <a:endParaRPr lang="en-US" sz="1300" dirty="0"/>
-          </a:p>
-        </p:txBody>
-      </p:sp>
-      <p:sp>
-        <p:nvSpPr>
-          <p:cNvPr id="16" name="Shape 14"/>
-          <p:cNvSpPr/>
-          <p:nvPr/>
-        </p:nvSpPr>
-        <p:spPr>
-          <a:xfrm>
-            <a:off x="731520" y="4535424"/>
-            <a:ext cx="566928" cy="566928"/>
-          </a:xfrm>
-          <a:prstGeom prst="ellipse">
-            <a:avLst/>
-          </a:prstGeom>
-          <a:solidFill>
-            <a:srgbClr val="2C5F2D"/>
-          </a:solidFill>
-          <a:ln/>
-        </p:spPr>
-      </p:sp>
-      <p:sp>
-        <p:nvSpPr>
-          <p:cNvPr id="17" name="Text 15"/>
-          <p:cNvSpPr/>
-          <p:nvPr/>
-        </p:nvSpPr>
-        <p:spPr>
-          <a:xfrm>
-            <a:off x="731520" y="4535424"/>
-            <a:ext cx="566928" cy="566928"/>
-          </a:xfrm>
-          <a:prstGeom prst="rect">
-            <a:avLst/>
-          </a:prstGeom>
-          <a:noFill/>
-          <a:ln/>
-        </p:spPr>
-        <p:txBody>
-          <a:bodyPr wrap="square" lIns="0" tIns="0" rIns="0" bIns="0" rtlCol="0" anchor="ctr"/>
-          <a:lstStyle/>
-          <a:p>
-            <a:pPr algn="ctr" indent="0" marL="0">
-              <a:buNone/>
-            </a:pPr>
-            <a:r>
-              <a:rPr lang="en-US" sz="2400" b="1" dirty="0">
-                <a:solidFill>
-                  <a:srgbClr val="FFFFFF"/>
-                </a:solidFill>
-                <a:latin typeface="Cambria" pitchFamily="34" charset="0"/>
-                <a:ea typeface="Cambria" pitchFamily="34" charset="-122"/>
-                <a:cs typeface="Cambria" pitchFamily="34" charset="-120"/>
-              </a:rPr>
-              <a:t>4</a:t>
-            </a:r>
-            <a:endParaRPr lang="en-US" sz="2400" dirty="0"/>
-          </a:p>
-        </p:txBody>
-      </p:sp>
-      <p:sp>
-        <p:nvSpPr>
-          <p:cNvPr id="18" name="Text 16"/>
-          <p:cNvSpPr/>
-          <p:nvPr/>
-        </p:nvSpPr>
-        <p:spPr>
-          <a:xfrm>
-            <a:off x="1554480" y="4517136"/>
-            <a:ext cx="9966960" cy="365760"/>
-          </a:xfrm>
-          <a:prstGeom prst="rect">
-            <a:avLst/>
-          </a:prstGeom>
-          <a:noFill/>
-          <a:ln/>
-        </p:spPr>
-        <p:txBody>
-          <a:bodyPr wrap="square" lIns="0" tIns="0" rIns="0" bIns="0" rtlCol="0" anchor="ctr"/>
-          <a:lstStyle/>
-          <a:p>
-            <a:pPr indent="0" marL="0">
-              <a:buNone/>
-            </a:pPr>
-            <a:r>
-              <a:rPr lang="en-US" sz="1700" b="1" dirty="0">
-                <a:solidFill>
-                  <a:srgbClr val="1B2A1C"/>
-                </a:solidFill>
-                <a:latin typeface="Calibri" pitchFamily="34" charset="0"/>
-                <a:ea typeface="Calibri" pitchFamily="34" charset="-122"/>
-                <a:cs typeface="Calibri" pitchFamily="34" charset="-120"/>
-              </a:rPr>
-              <a:t>Актуализировать цены</a:t>
-            </a:r>
-            <a:endParaRPr lang="en-US" sz="1700" dirty="0"/>
-          </a:p>
-        </p:txBody>
-      </p:sp>
-      <p:sp>
-        <p:nvSpPr>
-          <p:cNvPr id="19" name="Text 17"/>
-          <p:cNvSpPr/>
-          <p:nvPr/>
-        </p:nvSpPr>
-        <p:spPr>
-          <a:xfrm>
-            <a:off x="1554480" y="4855464"/>
-            <a:ext cx="9966960" cy="365760"/>
-          </a:xfrm>
-          <a:prstGeom prst="rect">
-            <a:avLst/>
-          </a:prstGeom>
-          <a:noFill/>
-          <a:ln/>
-        </p:spPr>
-        <p:txBody>
-          <a:bodyPr wrap="square" lIns="0" tIns="0" rIns="0" bIns="0" rtlCol="0" anchor="ctr"/>
-          <a:lstStyle/>
-          <a:p>
-            <a:pPr indent="0" marL="0">
-              <a:buNone/>
-            </a:pPr>
-            <a:r>
-              <a:rPr lang="en-US" sz="1300" dirty="0">
-                <a:solidFill>
-                  <a:srgbClr val="5B6B5C"/>
-                </a:solidFill>
-                <a:latin typeface="Calibri" pitchFamily="34" charset="0"/>
-                <a:ea typeface="Calibri" pitchFamily="34" charset="-122"/>
-                <a:cs typeface="Calibri" pitchFamily="34" charset="-120"/>
-              </a:rPr>
-              <a:t>Срок действия предложений истёк (1 мес.); подтвердить у поставщика</a:t>
-            </a:r>
-            <a:endParaRPr lang="en-US" sz="1300" dirty="0"/>
-          </a:p>
-        </p:txBody>
-      </p:sp>
-      <p:sp>
-        <p:nvSpPr>
-          <p:cNvPr id="20" name="Shape 18"/>
-          <p:cNvSpPr/>
-          <p:nvPr/>
-        </p:nvSpPr>
-        <p:spPr>
-          <a:xfrm>
-            <a:off x="731520" y="5468112"/>
-            <a:ext cx="566928" cy="566928"/>
-          </a:xfrm>
-          <a:prstGeom prst="ellipse">
-            <a:avLst/>
-          </a:prstGeom>
-          <a:solidFill>
-            <a:srgbClr val="2C5F2D"/>
-          </a:solidFill>
-          <a:ln/>
-        </p:spPr>
-      </p:sp>
-      <p:sp>
-        <p:nvSpPr>
-          <p:cNvPr id="21" name="Text 19"/>
-          <p:cNvSpPr/>
-          <p:nvPr/>
-        </p:nvSpPr>
-        <p:spPr>
-          <a:xfrm>
-            <a:off x="731520" y="5468112"/>
-            <a:ext cx="566928" cy="566928"/>
-          </a:xfrm>
-          <a:prstGeom prst="rect">
-            <a:avLst/>
-          </a:prstGeom>
-          <a:noFill/>
-          <a:ln/>
-        </p:spPr>
-        <p:txBody>
-          <a:bodyPr wrap="square" lIns="0" tIns="0" rIns="0" bIns="0" rtlCol="0" anchor="ctr"/>
-          <a:lstStyle/>
-          <a:p>
-            <a:pPr algn="ctr" indent="0" marL="0">
-              <a:buNone/>
-            </a:pPr>
-            <a:r>
-              <a:rPr lang="en-US" sz="2400" b="1" dirty="0">
-                <a:solidFill>
-                  <a:srgbClr val="FFFFFF"/>
-                </a:solidFill>
-                <a:latin typeface="Cambria" pitchFamily="34" charset="0"/>
-                <a:ea typeface="Cambria" pitchFamily="34" charset="-122"/>
-                <a:cs typeface="Cambria" pitchFamily="34" charset="-120"/>
-              </a:rPr>
-              <a:t>5</a:t>
-            </a:r>
-            <a:endParaRPr lang="en-US" sz="2400" dirty="0"/>
-          </a:p>
-        </p:txBody>
-      </p:sp>
-      <p:sp>
-        <p:nvSpPr>
-          <p:cNvPr id="22" name="Text 20"/>
-          <p:cNvSpPr/>
-          <p:nvPr/>
-        </p:nvSpPr>
-        <p:spPr>
-          <a:xfrm>
-            <a:off x="1554480" y="5449824"/>
-            <a:ext cx="9966960" cy="365760"/>
-          </a:xfrm>
-          <a:prstGeom prst="rect">
-            <a:avLst/>
-          </a:prstGeom>
-          <a:noFill/>
-          <a:ln/>
-        </p:spPr>
-        <p:txBody>
-          <a:bodyPr wrap="square" lIns="0" tIns="0" rIns="0" bIns="0" rtlCol="0" anchor="ctr"/>
-          <a:lstStyle/>
-          <a:p>
-            <a:pPr indent="0" marL="0">
-              <a:buNone/>
-            </a:pPr>
-            <a:r>
-              <a:rPr lang="en-US" sz="1700" b="1" dirty="0">
-                <a:solidFill>
-                  <a:srgbClr val="1B2A1C"/>
-                </a:solidFill>
-                <a:latin typeface="Calibri" pitchFamily="34" charset="0"/>
-                <a:ea typeface="Calibri" pitchFamily="34" charset="-122"/>
-                <a:cs typeface="Calibri" pitchFamily="34" charset="-120"/>
-              </a:rPr>
-              <a:t>Структурировать финансирование</a:t>
-            </a:r>
-            <a:endParaRPr lang="en-US" sz="1700" dirty="0"/>
-          </a:p>
-        </p:txBody>
-      </p:sp>
-      <p:sp>
-        <p:nvSpPr>
-          <p:cNvPr id="23" name="Text 21"/>
-          <p:cNvSpPr/>
-          <p:nvPr/>
-        </p:nvSpPr>
-        <p:spPr>
-          <a:xfrm>
-            <a:off x="1554480" y="5788152"/>
-            <a:ext cx="9966960" cy="365760"/>
-          </a:xfrm>
-          <a:prstGeom prst="rect">
-            <a:avLst/>
-          </a:prstGeom>
-          <a:noFill/>
-          <a:ln/>
-        </p:spPr>
-        <p:txBody>
-          <a:bodyPr wrap="square" lIns="0" tIns="0" rIns="0" bIns="0" rtlCol="0" anchor="ctr"/>
-          <a:lstStyle/>
-          <a:p>
-            <a:pPr indent="0" marL="0">
-              <a:buNone/>
-            </a:pPr>
-            <a:r>
-              <a:rPr lang="en-US" sz="1300" dirty="0">
-                <a:solidFill>
-                  <a:srgbClr val="5B6B5C"/>
-                </a:solidFill>
-                <a:latin typeface="Calibri" pitchFamily="34" charset="0"/>
-                <a:ea typeface="Calibri" pitchFamily="34" charset="-122"/>
-                <a:cs typeface="Calibri" pitchFamily="34" charset="-120"/>
-              </a:rPr>
-              <a:t>Разбить CAPEX на транши и источники под требования ФРП, БРК, БВУ</a:t>
-            </a:r>
-            <a:endParaRPr lang="en-US" sz="1300" dirty="0"/>
+            <a:endParaRPr lang="en-US" sz="1200" dirty="0"/>
           </a:p>
         </p:txBody>
       </p:sp>
